--- a/课件/题集刷题导航/第7章-图/第7章-图.pptx
+++ b/课件/题集刷题导航/第7章-图/第7章-图.pptx
@@ -1,25 +1,25 @@
 
 <file path=ppt/presentation.xml><?xml version="1.0" encoding="utf-8"?>
-<p:presentation xmlns:a="http://schemas.openxmlformats.org/drawingml/2006/main" xmlns:r="http://schemas.openxmlformats.org/officeDocument/2006/relationships" xmlns:p="http://schemas.openxmlformats.org/presentationml/2006/main" saveSubsetFonts="1" autoCompressPictures="0">
+<p:presentation xmlns:a="http://schemas.openxmlformats.org/drawingml/2006/main" xmlns:r="http://schemas.openxmlformats.org/officeDocument/2006/relationships" xmlns:p="http://schemas.openxmlformats.org/presentationml/2006/main" autoCompressPictures="0">
   <p:sldMasterIdLst>
     <p:sldMasterId id="2147483648" r:id="rId1"/>
   </p:sldMasterIdLst>
+  <p:notesMasterIdLst>
+    <p:notesMasterId r:id="rId4"/>
+  </p:notesMasterIdLst>
   <p:sldIdLst>
-    <p:sldId id="256" r:id="rId2"/>
-    <p:sldId id="257" r:id="rId3"/>
-    <p:sldId id="258" r:id="rId4"/>
-    <p:sldId id="259" r:id="rId5"/>
-    <p:sldId id="260" r:id="rId6"/>
-    <p:sldId id="261" r:id="rId7"/>
-    <p:sldId id="262" r:id="rId8"/>
-    <p:sldId id="263" r:id="rId9"/>
-    <p:sldId id="264" r:id="rId10"/>
+    <p:sldId id="256" r:id="rId3"/>
+    <p:sldId id="257" r:id="rId5"/>
+    <p:sldId id="258" r:id="rId6"/>
+    <p:sldId id="259" r:id="rId7"/>
+    <p:sldId id="260" r:id="rId8"/>
+    <p:sldId id="261" r:id="rId9"/>
+    <p:sldId id="263" r:id="rId10"/>
+    <p:sldId id="262" r:id="rId11"/>
+    <p:sldId id="264" r:id="rId12"/>
   </p:sldIdLst>
-  <p:notesMasterIdLst>
-    <p:notesMasterId r:id="rId11"/>
-  </p:notesMasterIdLst>
-  <p:sldSz cx="12191695" cy="6858000"/>
-  <p:notesSz cx="6858000" cy="12191695"/>
+  <p:sldSz cx="12191365" cy="6858000"/>
+  <p:notesSz cx="6858000" cy="12191365"/>
   <p:defaultTextStyle>
     <a:lvl1pPr marL="0" algn="l" defTabSz="914400" rtl="0" eaLnBrk="1" latinLnBrk="0" hangingPunct="1">
       <a:defRPr sz="1800" kern="1200">
@@ -197,7 +197,6 @@
           <a:p>
             <a:fld id="{5282F153-3F37-0F45-9E97-73ACFA13230C}" type="datetimeFigureOut">
               <a:rPr lang="en-US"/>
-              <a:t>7/23/19</a:t>
             </a:fld>
             <a:endParaRPr lang="en-US"/>
           </a:p>
@@ -264,6 +263,7 @@
               <a:rPr lang="en-US"/>
               <a:t>Click to edit Master text styles</a:t>
             </a:r>
+            <a:endParaRPr lang="en-US"/>
           </a:p>
           <a:p>
             <a:pPr lvl="1"/>
@@ -271,6 +271,7 @@
               <a:rPr lang="en-US"/>
               <a:t>Second level</a:t>
             </a:r>
+            <a:endParaRPr lang="en-US"/>
           </a:p>
           <a:p>
             <a:pPr lvl="2"/>
@@ -278,6 +279,7 @@
               <a:rPr lang="en-US"/>
               <a:t>Third level</a:t>
             </a:r>
+            <a:endParaRPr lang="en-US"/>
           </a:p>
           <a:p>
             <a:pPr lvl="3"/>
@@ -285,6 +287,7 @@
               <a:rPr lang="en-US"/>
               <a:t>Fourth level</a:t>
             </a:r>
+            <a:endParaRPr lang="en-US"/>
           </a:p>
           <a:p>
             <a:pPr lvl="4"/>
@@ -292,6 +295,7 @@
               <a:rPr lang="en-US"/>
               <a:t>Fifth level</a:t>
             </a:r>
+            <a:endParaRPr lang="en-US"/>
           </a:p>
         </p:txBody>
       </p:sp>
@@ -355,18 +359,12 @@
           <a:p>
             <a:fld id="{CE5E9CC1-C706-0F49-92D6-E571CC5EEA8F}" type="slidenum">
               <a:rPr lang="en-US"/>
-              <a:t>‹#›</a:t>
             </a:fld>
             <a:endParaRPr lang="en-US"/>
           </a:p>
         </p:txBody>
       </p:sp>
     </p:spTree>
-    <p:extLst>
-      <p:ext uri="{BB962C8B-B14F-4D97-AF65-F5344CB8AC3E}">
-        <p14:creationId xmlns:p14="http://schemas.microsoft.com/office/powerpoint/2010/main" val="1024086991"/>
-      </p:ext>
-    </p:extLst>
   </p:cSld>
   <p:clrMap bg1="lt1" tx1="dk1" bg2="lt2" tx2="dk2" accent1="accent1" accent2="accent2" accent3="accent3" accent4="accent4" accent5="accent5" accent6="accent6" hlink="hlink" folHlink="folHlink"/>
   <p:notesStyle>
@@ -508,10 +506,6 @@
           <a:bodyPr/>
           <a:lstStyle/>
           <a:p>
-            <a:r>
-              <a:rPr lang="en-US" dirty="0"/>
-              <a:t/>
-            </a:r>
             <a:endParaRPr lang="en-US" dirty="0"/>
           </a:p>
         </p:txBody>
@@ -533,18 +527,12 @@
           <a:p>
             <a:fld id="{F7021451-1387-4CA6-816F-3879F97B5CBC}" type="slidenum">
               <a:rPr lang="en-US"/>
-              <a:t>1</a:t>
             </a:fld>
             <a:endParaRPr lang="en-US"/>
           </a:p>
         </p:txBody>
       </p:sp>
     </p:spTree>
-    <p:extLst>
-      <p:ext uri="{BB962C8B-B14F-4D97-AF65-F5344CB8AC3E}">
-        <p14:creationId xmlns:p14="http://schemas.microsoft.com/office/powerpoint/2010/main" val="1024086991"/>
-      </p:ext>
-    </p:extLst>
   </p:cSld>
   <p:clrMapOvr>
     <a:masterClrMapping/>
@@ -596,10 +584,6 @@
           <a:bodyPr/>
           <a:lstStyle/>
           <a:p>
-            <a:r>
-              <a:rPr lang="en-US" dirty="0"/>
-              <a:t/>
-            </a:r>
             <a:endParaRPr lang="en-US" dirty="0"/>
           </a:p>
         </p:txBody>
@@ -621,18 +605,12 @@
           <a:p>
             <a:fld id="{F7021451-1387-4CA6-816F-3879F97B5CBC}" type="slidenum">
               <a:rPr lang="en-US"/>
-              <a:t>2</a:t>
             </a:fld>
             <a:endParaRPr lang="en-US"/>
           </a:p>
         </p:txBody>
       </p:sp>
     </p:spTree>
-    <p:extLst>
-      <p:ext uri="{BB962C8B-B14F-4D97-AF65-F5344CB8AC3E}">
-        <p14:creationId xmlns:p14="http://schemas.microsoft.com/office/powerpoint/2010/main" val="1024086991"/>
-      </p:ext>
-    </p:extLst>
   </p:cSld>
   <p:clrMapOvr>
     <a:masterClrMapping/>
@@ -684,10 +662,6 @@
           <a:bodyPr/>
           <a:lstStyle/>
           <a:p>
-            <a:r>
-              <a:rPr lang="en-US" dirty="0"/>
-              <a:t/>
-            </a:r>
             <a:endParaRPr lang="en-US" dirty="0"/>
           </a:p>
         </p:txBody>
@@ -709,18 +683,12 @@
           <a:p>
             <a:fld id="{F7021451-1387-4CA6-816F-3879F97B5CBC}" type="slidenum">
               <a:rPr lang="en-US"/>
-              <a:t>3</a:t>
             </a:fld>
             <a:endParaRPr lang="en-US"/>
           </a:p>
         </p:txBody>
       </p:sp>
     </p:spTree>
-    <p:extLst>
-      <p:ext uri="{BB962C8B-B14F-4D97-AF65-F5344CB8AC3E}">
-        <p14:creationId xmlns:p14="http://schemas.microsoft.com/office/powerpoint/2010/main" val="1024086991"/>
-      </p:ext>
-    </p:extLst>
   </p:cSld>
   <p:clrMapOvr>
     <a:masterClrMapping/>
@@ -772,10 +740,6 @@
           <a:bodyPr/>
           <a:lstStyle/>
           <a:p>
-            <a:r>
-              <a:rPr lang="en-US" dirty="0"/>
-              <a:t/>
-            </a:r>
             <a:endParaRPr lang="en-US" dirty="0"/>
           </a:p>
         </p:txBody>
@@ -797,18 +761,12 @@
           <a:p>
             <a:fld id="{F7021451-1387-4CA6-816F-3879F97B5CBC}" type="slidenum">
               <a:rPr lang="en-US"/>
-              <a:t>4</a:t>
             </a:fld>
             <a:endParaRPr lang="en-US"/>
           </a:p>
         </p:txBody>
       </p:sp>
     </p:spTree>
-    <p:extLst>
-      <p:ext uri="{BB962C8B-B14F-4D97-AF65-F5344CB8AC3E}">
-        <p14:creationId xmlns:p14="http://schemas.microsoft.com/office/powerpoint/2010/main" val="1024086991"/>
-      </p:ext>
-    </p:extLst>
   </p:cSld>
   <p:clrMapOvr>
     <a:masterClrMapping/>
@@ -860,10 +818,6 @@
           <a:bodyPr/>
           <a:lstStyle/>
           <a:p>
-            <a:r>
-              <a:rPr lang="en-US" dirty="0"/>
-              <a:t/>
-            </a:r>
             <a:endParaRPr lang="en-US" dirty="0"/>
           </a:p>
         </p:txBody>
@@ -885,18 +839,12 @@
           <a:p>
             <a:fld id="{F7021451-1387-4CA6-816F-3879F97B5CBC}" type="slidenum">
               <a:rPr lang="en-US"/>
-              <a:t>5</a:t>
             </a:fld>
             <a:endParaRPr lang="en-US"/>
           </a:p>
         </p:txBody>
       </p:sp>
     </p:spTree>
-    <p:extLst>
-      <p:ext uri="{BB962C8B-B14F-4D97-AF65-F5344CB8AC3E}">
-        <p14:creationId xmlns:p14="http://schemas.microsoft.com/office/powerpoint/2010/main" val="1024086991"/>
-      </p:ext>
-    </p:extLst>
   </p:cSld>
   <p:clrMapOvr>
     <a:masterClrMapping/>
@@ -948,10 +896,6 @@
           <a:bodyPr/>
           <a:lstStyle/>
           <a:p>
-            <a:r>
-              <a:rPr lang="en-US" dirty="0"/>
-              <a:t/>
-            </a:r>
             <a:endParaRPr lang="en-US" dirty="0"/>
           </a:p>
         </p:txBody>
@@ -973,18 +917,12 @@
           <a:p>
             <a:fld id="{F7021451-1387-4CA6-816F-3879F97B5CBC}" type="slidenum">
               <a:rPr lang="en-US"/>
-              <a:t>6</a:t>
             </a:fld>
             <a:endParaRPr lang="en-US"/>
           </a:p>
         </p:txBody>
       </p:sp>
     </p:spTree>
-    <p:extLst>
-      <p:ext uri="{BB962C8B-B14F-4D97-AF65-F5344CB8AC3E}">
-        <p14:creationId xmlns:p14="http://schemas.microsoft.com/office/powerpoint/2010/main" val="1024086991"/>
-      </p:ext>
-    </p:extLst>
   </p:cSld>
   <p:clrMapOvr>
     <a:masterClrMapping/>
@@ -1036,10 +974,6 @@
           <a:bodyPr/>
           <a:lstStyle/>
           <a:p>
-            <a:r>
-              <a:rPr lang="en-US" dirty="0"/>
-              <a:t/>
-            </a:r>
             <a:endParaRPr lang="en-US" dirty="0"/>
           </a:p>
         </p:txBody>
@@ -1061,18 +995,12 @@
           <a:p>
             <a:fld id="{F7021451-1387-4CA6-816F-3879F97B5CBC}" type="slidenum">
               <a:rPr lang="en-US"/>
-              <a:t>7</a:t>
             </a:fld>
             <a:endParaRPr lang="en-US"/>
           </a:p>
         </p:txBody>
       </p:sp>
     </p:spTree>
-    <p:extLst>
-      <p:ext uri="{BB962C8B-B14F-4D97-AF65-F5344CB8AC3E}">
-        <p14:creationId xmlns:p14="http://schemas.microsoft.com/office/powerpoint/2010/main" val="1024086991"/>
-      </p:ext>
-    </p:extLst>
   </p:cSld>
   <p:clrMapOvr>
     <a:masterClrMapping/>
@@ -1124,10 +1052,6 @@
           <a:bodyPr/>
           <a:lstStyle/>
           <a:p>
-            <a:r>
-              <a:rPr lang="en-US" dirty="0"/>
-              <a:t/>
-            </a:r>
             <a:endParaRPr lang="en-US" dirty="0"/>
           </a:p>
         </p:txBody>
@@ -1149,18 +1073,12 @@
           <a:p>
             <a:fld id="{F7021451-1387-4CA6-816F-3879F97B5CBC}" type="slidenum">
               <a:rPr lang="en-US"/>
-              <a:t>8</a:t>
             </a:fld>
             <a:endParaRPr lang="en-US"/>
           </a:p>
         </p:txBody>
       </p:sp>
     </p:spTree>
-    <p:extLst>
-      <p:ext uri="{BB962C8B-B14F-4D97-AF65-F5344CB8AC3E}">
-        <p14:creationId xmlns:p14="http://schemas.microsoft.com/office/powerpoint/2010/main" val="1024086991"/>
-      </p:ext>
-    </p:extLst>
   </p:cSld>
   <p:clrMapOvr>
     <a:masterClrMapping/>
@@ -1212,10 +1130,6 @@
           <a:bodyPr/>
           <a:lstStyle/>
           <a:p>
-            <a:r>
-              <a:rPr lang="en-US" dirty="0"/>
-              <a:t/>
-            </a:r>
             <a:endParaRPr lang="en-US" dirty="0"/>
           </a:p>
         </p:txBody>
@@ -1237,18 +1151,12 @@
           <a:p>
             <a:fld id="{F7021451-1387-4CA6-816F-3879F97B5CBC}" type="slidenum">
               <a:rPr lang="en-US"/>
-              <a:t>9</a:t>
             </a:fld>
             <a:endParaRPr lang="en-US"/>
           </a:p>
         </p:txBody>
       </p:sp>
     </p:spTree>
-    <p:extLst>
-      <p:ext uri="{BB962C8B-B14F-4D97-AF65-F5344CB8AC3E}">
-        <p14:creationId xmlns:p14="http://schemas.microsoft.com/office/powerpoint/2010/main" val="1024086991"/>
-      </p:ext>
-    </p:extLst>
   </p:cSld>
   <p:clrMapOvr>
     <a:masterClrMapping/>
@@ -1289,6 +1197,11 @@
 <file path=ppt/slideMasters/slideMaster1.xml><?xml version="1.0" encoding="utf-8"?>
 <p:sldMaster xmlns:a="http://schemas.openxmlformats.org/drawingml/2006/main" xmlns:r="http://schemas.openxmlformats.org/officeDocument/2006/relationships" xmlns:p="http://schemas.openxmlformats.org/presentationml/2006/main">
   <p:cSld>
+    <p:bg>
+      <p:bgRef idx="1001">
+        <a:schemeClr val="bg1"/>
+      </p:bgRef>
+    </p:bg>
     <p:spTree>
       <p:nvGrpSpPr>
         <p:cNvPr id="1" name=""/>
@@ -1332,7 +1245,7 @@
         <a:spcBef>
           <a:spcPct val="20000"/>
         </a:spcBef>
-        <a:buFont typeface="Arial" pitchFamily="34" charset="0"/>
+        <a:buFont typeface="Arial" panose="020B0604020202020204" pitchFamily="34" charset="0"/>
         <a:buChar char="•"/>
         <a:defRPr sz="3200" kern="1200">
           <a:solidFill>
@@ -1347,7 +1260,7 @@
         <a:spcBef>
           <a:spcPct val="20000"/>
         </a:spcBef>
-        <a:buFont typeface="Arial" pitchFamily="34" charset="0"/>
+        <a:buFont typeface="Arial" panose="020B0604020202020204" pitchFamily="34" charset="0"/>
         <a:buChar char="–"/>
         <a:defRPr sz="2800" kern="1200">
           <a:solidFill>
@@ -1362,7 +1275,7 @@
         <a:spcBef>
           <a:spcPct val="20000"/>
         </a:spcBef>
-        <a:buFont typeface="Arial" pitchFamily="34" charset="0"/>
+        <a:buFont typeface="Arial" panose="020B0604020202020204" pitchFamily="34" charset="0"/>
         <a:buChar char="•"/>
         <a:defRPr sz="2400" kern="1200">
           <a:solidFill>
@@ -1377,7 +1290,7 @@
         <a:spcBef>
           <a:spcPct val="20000"/>
         </a:spcBef>
-        <a:buFont typeface="Arial" pitchFamily="34" charset="0"/>
+        <a:buFont typeface="Arial" panose="020B0604020202020204" pitchFamily="34" charset="0"/>
         <a:buChar char="–"/>
         <a:defRPr sz="2000" kern="1200">
           <a:solidFill>
@@ -1392,7 +1305,7 @@
         <a:spcBef>
           <a:spcPct val="20000"/>
         </a:spcBef>
-        <a:buFont typeface="Arial" pitchFamily="34" charset="0"/>
+        <a:buFont typeface="Arial" panose="020B0604020202020204" pitchFamily="34" charset="0"/>
         <a:buChar char="»"/>
         <a:defRPr sz="2000" kern="1200">
           <a:solidFill>
@@ -1407,7 +1320,7 @@
         <a:spcBef>
           <a:spcPct val="20000"/>
         </a:spcBef>
-        <a:buFont typeface="Arial" pitchFamily="34" charset="0"/>
+        <a:buFont typeface="Arial" panose="020B0604020202020204" pitchFamily="34" charset="0"/>
         <a:buChar char="•"/>
         <a:defRPr sz="2000" kern="1200">
           <a:solidFill>
@@ -1422,7 +1335,7 @@
         <a:spcBef>
           <a:spcPct val="20000"/>
         </a:spcBef>
-        <a:buFont typeface="Arial" pitchFamily="34" charset="0"/>
+        <a:buFont typeface="Arial" panose="020B0604020202020204" pitchFamily="34" charset="0"/>
         <a:buChar char="•"/>
         <a:defRPr sz="2000" kern="1200">
           <a:solidFill>
@@ -1437,7 +1350,7 @@
         <a:spcBef>
           <a:spcPct val="20000"/>
         </a:spcBef>
-        <a:buFont typeface="Arial" pitchFamily="34" charset="0"/>
+        <a:buFont typeface="Arial" panose="020B0604020202020204" pitchFamily="34" charset="0"/>
         <a:buChar char="•"/>
         <a:defRPr sz="2000" kern="1200">
           <a:solidFill>
@@ -1452,7 +1365,7 @@
         <a:spcBef>
           <a:spcPct val="20000"/>
         </a:spcBef>
-        <a:buFont typeface="Arial" pitchFamily="34" charset="0"/>
+        <a:buFont typeface="Arial" panose="020B0604020202020204" pitchFamily="34" charset="0"/>
         <a:buChar char="•"/>
         <a:defRPr sz="2000" kern="1200">
           <a:solidFill>
@@ -1565,7 +1478,7 @@
 
 <file path=ppt/slides/slide1.xml><?xml version="1.0" encoding="utf-8"?>
 <p:sld xmlns:a="http://schemas.openxmlformats.org/drawingml/2006/main" xmlns:r="http://schemas.openxmlformats.org/officeDocument/2006/relationships" xmlns:p="http://schemas.openxmlformats.org/presentationml/2006/main">
-  <p:cSld name="Slide 1">
+  <p:cSld>
     <p:bg>
       <p:bgPr>
         <a:blipFill dpi="0" rotWithShape="1">
@@ -1609,13 +1522,12 @@
             <a:avLst/>
           </a:prstGeom>
           <a:noFill/>
-          <a:ln/>
         </p:spPr>
         <p:txBody>
           <a:bodyPr wrap="square" rtlCol="0" anchor="ctr"/>
           <a:lstStyle/>
           <a:p>
-            <a:pPr algn="r" indent="0" marL="0">
+            <a:pPr marL="0" indent="0" algn="r">
               <a:buNone/>
             </a:pPr>
             <a:r>
@@ -1623,9 +1535,9 @@
                 <a:solidFill>
                   <a:srgbClr val="8A9099"/>
                 </a:solidFill>
-                <a:latin typeface="微软雅黑" pitchFamily="34" charset="0"/>
-                <a:ea typeface="微软雅黑" pitchFamily="34" charset="-122"/>
-                <a:cs typeface="微软雅黑" pitchFamily="34" charset="-120"/>
+                <a:latin typeface="微软雅黑" panose="020B0503020204020204" pitchFamily="34" charset="-122"/>
+                <a:ea typeface="微软雅黑" panose="020B0503020204020204" pitchFamily="34" charset="-122"/>
+                <a:cs typeface="微软雅黑" panose="020B0503020204020204" pitchFamily="34" charset="-120"/>
               </a:rPr>
               <a:t>1 / 9</a:t>
             </a:r>
@@ -1648,13 +1560,12 @@
             <a:avLst/>
           </a:prstGeom>
           <a:noFill/>
-          <a:ln/>
         </p:spPr>
         <p:txBody>
           <a:bodyPr wrap="square" rtlCol="0" anchor="ctr"/>
           <a:lstStyle/>
           <a:p>
-            <a:pPr algn="ctr" indent="0" marL="0">
+            <a:pPr marL="0" indent="0" algn="ctr">
               <a:buNone/>
             </a:pPr>
             <a:r>
@@ -1662,9 +1573,9 @@
                 <a:solidFill>
                   <a:srgbClr val="1F4E9C"/>
                 </a:solidFill>
-                <a:latin typeface="微软雅黑" pitchFamily="34" charset="0"/>
-                <a:ea typeface="微软雅黑" pitchFamily="34" charset="-122"/>
-                <a:cs typeface="微软雅黑" pitchFamily="34" charset="-120"/>
+                <a:latin typeface="微软雅黑" panose="020B0503020204020204" pitchFamily="34" charset="-122"/>
+                <a:ea typeface="微软雅黑" panose="020B0503020204020204" pitchFamily="34" charset="-122"/>
+                <a:cs typeface="微软雅黑" panose="020B0503020204020204" pitchFamily="34" charset="-120"/>
               </a:rPr>
               <a:t>重邮考研802 数据结构</a:t>
             </a:r>
@@ -1687,13 +1598,12 @@
             <a:avLst/>
           </a:prstGeom>
           <a:noFill/>
-          <a:ln/>
         </p:spPr>
         <p:txBody>
           <a:bodyPr wrap="square" rtlCol="0" anchor="ctr"/>
           <a:lstStyle/>
           <a:p>
-            <a:pPr algn="ctr" indent="0" marL="0">
+            <a:pPr marL="0" indent="0" algn="ctr">
               <a:buNone/>
             </a:pPr>
             <a:r>
@@ -1701,9 +1611,9 @@
                 <a:solidFill>
                   <a:srgbClr val="1F2329"/>
                 </a:solidFill>
-                <a:latin typeface="微软雅黑" pitchFamily="34" charset="0"/>
-                <a:ea typeface="微软雅黑" pitchFamily="34" charset="-122"/>
-                <a:cs typeface="微软雅黑" pitchFamily="34" charset="-120"/>
+                <a:latin typeface="微软雅黑" panose="020B0503020204020204" pitchFamily="34" charset="-122"/>
+                <a:ea typeface="微软雅黑" panose="020B0503020204020204" pitchFamily="34" charset="-122"/>
+                <a:cs typeface="微软雅黑" panose="020B0503020204020204" pitchFamily="34" charset="-120"/>
               </a:rPr>
               <a:t>习题集题目勾画 · 第7章 图</a:t>
             </a:r>
@@ -1726,13 +1636,12 @@
             <a:avLst/>
           </a:prstGeom>
           <a:noFill/>
-          <a:ln/>
         </p:spPr>
         <p:txBody>
           <a:bodyPr wrap="square" rtlCol="0" anchor="ctr"/>
           <a:lstStyle/>
           <a:p>
-            <a:pPr algn="ctr" indent="0" marL="0">
+            <a:pPr marL="0" indent="0" algn="ctr">
               <a:buNone/>
             </a:pPr>
             <a:r>
@@ -1740,9 +1649,9 @@
                 <a:solidFill>
                   <a:srgbClr val="1F2329"/>
                 </a:solidFill>
-                <a:latin typeface="微软雅黑" pitchFamily="34" charset="0"/>
-                <a:ea typeface="微软雅黑" pitchFamily="34" charset="-122"/>
-                <a:cs typeface="微软雅黑" pitchFamily="34" charset="-120"/>
+                <a:latin typeface="微软雅黑" panose="020B0503020204020204" pitchFamily="34" charset="-122"/>
+                <a:ea typeface="微软雅黑" panose="020B0503020204020204" pitchFamily="34" charset="-122"/>
+                <a:cs typeface="微软雅黑" panose="020B0503020204020204" pitchFamily="34" charset="-120"/>
               </a:rPr>
               <a:t>严蔚敏《数据结构题集（第2版）》</a:t>
             </a:r>
@@ -1765,13 +1674,12 @@
             <a:avLst/>
           </a:prstGeom>
           <a:noFill/>
-          <a:ln/>
         </p:spPr>
         <p:txBody>
           <a:bodyPr wrap="square" rtlCol="0" anchor="ctr"/>
           <a:lstStyle/>
           <a:p>
-            <a:pPr algn="ctr" indent="0" marL="0">
+            <a:pPr marL="0" indent="0" algn="ctr">
               <a:buNone/>
             </a:pPr>
             <a:r>
@@ -1779,9 +1687,9 @@
                 <a:solidFill>
                   <a:srgbClr val="8A9099"/>
                 </a:solidFill>
-                <a:latin typeface="微软雅黑" pitchFamily="34" charset="0"/>
-                <a:ea typeface="微软雅黑" pitchFamily="34" charset="-122"/>
-                <a:cs typeface="微软雅黑" pitchFamily="34" charset="-120"/>
+                <a:latin typeface="微软雅黑" panose="020B0503020204020204" pitchFamily="34" charset="-122"/>
+                <a:ea typeface="微软雅黑" panose="020B0503020204020204" pitchFamily="34" charset="-122"/>
+                <a:cs typeface="微软雅黑" panose="020B0503020204020204" pitchFamily="34" charset="-120"/>
               </a:rPr>
               <a:t>依据：802考情与2020—2026真题 · 主讲：牙膏学长</a:t>
             </a:r>
@@ -1799,7 +1707,7 @@
 
 <file path=ppt/slides/slide2.xml><?xml version="1.0" encoding="utf-8"?>
 <p:sld xmlns:a="http://schemas.openxmlformats.org/drawingml/2006/main" xmlns:r="http://schemas.openxmlformats.org/officeDocument/2006/relationships" xmlns:p="http://schemas.openxmlformats.org/presentationml/2006/main">
-  <p:cSld name="Slide 2">
+  <p:cSld>
     <p:bg>
       <p:bgPr>
         <a:blipFill dpi="0" rotWithShape="1">
@@ -1843,13 +1751,12 @@
             <a:avLst/>
           </a:prstGeom>
           <a:noFill/>
-          <a:ln/>
         </p:spPr>
         <p:txBody>
           <a:bodyPr wrap="square" rtlCol="0" anchor="ctr"/>
           <a:lstStyle/>
           <a:p>
-            <a:pPr algn="r" indent="0" marL="0">
+            <a:pPr marL="0" indent="0" algn="r">
               <a:buNone/>
             </a:pPr>
             <a:r>
@@ -1857,9 +1764,9 @@
                 <a:solidFill>
                   <a:srgbClr val="8A9099"/>
                 </a:solidFill>
-                <a:latin typeface="微软雅黑" pitchFamily="34" charset="0"/>
-                <a:ea typeface="微软雅黑" pitchFamily="34" charset="-122"/>
-                <a:cs typeface="微软雅黑" pitchFamily="34" charset="-120"/>
+                <a:latin typeface="微软雅黑" panose="020B0503020204020204" pitchFamily="34" charset="-122"/>
+                <a:ea typeface="微软雅黑" panose="020B0503020204020204" pitchFamily="34" charset="-122"/>
+                <a:cs typeface="微软雅黑" panose="020B0503020204020204" pitchFamily="34" charset="-120"/>
               </a:rPr>
               <a:t>2 / 9</a:t>
             </a:r>
@@ -1882,13 +1789,12 @@
             <a:avLst/>
           </a:prstGeom>
           <a:noFill/>
-          <a:ln/>
         </p:spPr>
         <p:txBody>
           <a:bodyPr wrap="square" rtlCol="0" anchor="ctr"/>
           <a:lstStyle/>
           <a:p>
-            <a:pPr algn="l" indent="0" marL="0">
+            <a:pPr marL="0" indent="0" algn="l">
               <a:buNone/>
             </a:pPr>
             <a:r>
@@ -1896,9 +1802,9 @@
                 <a:solidFill>
                   <a:srgbClr val="1F4E9C"/>
                 </a:solidFill>
-                <a:latin typeface="微软雅黑" pitchFamily="34" charset="0"/>
-                <a:ea typeface="微软雅黑" pitchFamily="34" charset="-122"/>
-                <a:cs typeface="微软雅黑" pitchFamily="34" charset="-120"/>
+                <a:latin typeface="微软雅黑" panose="020B0503020204020204" pitchFamily="34" charset="-122"/>
+                <a:ea typeface="微软雅黑" panose="020B0503020204020204" pitchFamily="34" charset="-122"/>
+                <a:cs typeface="微软雅黑" panose="020B0503020204020204" pitchFamily="34" charset="-120"/>
               </a:rPr>
               <a:t>本章勾画总览</a:t>
             </a:r>
@@ -1921,13 +1827,12 @@
             <a:avLst/>
           </a:prstGeom>
           <a:noFill/>
-          <a:ln/>
         </p:spPr>
         <p:txBody>
           <a:bodyPr wrap="square" rtlCol="0" anchor="ctr"/>
           <a:lstStyle/>
           <a:p>
-            <a:pPr algn="l" indent="0" marL="0">
+            <a:pPr marL="0" indent="0" algn="l">
               <a:buNone/>
             </a:pPr>
             <a:r>
@@ -1935,9 +1840,9 @@
                 <a:solidFill>
                   <a:srgbClr val="1F2329"/>
                 </a:solidFill>
-                <a:latin typeface="微软雅黑" pitchFamily="34" charset="0"/>
-                <a:ea typeface="微软雅黑" pitchFamily="34" charset="-122"/>
-                <a:cs typeface="微软雅黑" pitchFamily="34" charset="-120"/>
+                <a:latin typeface="微软雅黑" panose="020B0503020204020204" pitchFamily="34" charset="-122"/>
+                <a:ea typeface="微软雅黑" panose="020B0503020204020204" pitchFamily="34" charset="-122"/>
+                <a:cs typeface="微软雅黑" panose="020B0503020204020204" pitchFamily="34" charset="-120"/>
               </a:rPr>
               <a:t>第7章三档题量与用法</a:t>
             </a:r>
@@ -1947,21 +1852,15 @@
       </p:sp>
       <p:graphicFrame>
         <p:nvGraphicFramePr>
-          <p:cNvPr id="3" name="Table 0"/>
+          <p:cNvPr id="5" name="Table 0"/>
           <p:cNvGraphicFramePr>
             <a:graphicFrameLocks noGrp="1"/>
           </p:cNvGraphicFramePr>
-          <p:nvPr>
-            <p:extLst>
-              <p:ext uri="{D42A27DB-BD31-4B8C-83A1-F6EECF244321}">
-                <p14:modId xmlns:p14="http://schemas.microsoft.com/office/powerpoint/2010/main" val="1579011935"/>
-              </p:ext>
-            </p:extLst>
-          </p:nvPr>
+          <p:nvPr/>
         </p:nvGraphicFramePr>
         <p:xfrm>
           <a:off x="822960" y="2395728"/>
-          <a:ext cx="10545775" cy="914400"/>
+          <a:ext cx="10545776" cy="1682496"/>
         </p:xfrm>
         <a:graphic>
           <a:graphicData uri="http://schemas.openxmlformats.org/drawingml/2006/table">
@@ -1979,7 +1878,7 @@
                     <a:bodyPr/>
                     <a:lstStyle/>
                     <a:p>
-                      <a:pPr algn="ctr" indent="0" marL="0">
+                      <a:pPr marL="0" indent="0" algn="ctr">
                         <a:buNone/>
                       </a:pPr>
                       <a:r>
@@ -1987,20 +1886,20 @@
                           <a:solidFill>
                             <a:srgbClr val="1F4E9C"/>
                           </a:solidFill>
-                          <a:latin typeface="微软雅黑" pitchFamily="34" charset="0"/>
-                          <a:ea typeface="微软雅黑" pitchFamily="34" charset="-122"/>
-                          <a:cs typeface="微软雅黑" pitchFamily="34" charset="-120"/>
+                          <a:latin typeface="微软雅黑" panose="020B0503020204020204" pitchFamily="34" charset="-122"/>
+                          <a:ea typeface="微软雅黑" panose="020B0503020204020204" pitchFamily="34" charset="-122"/>
+                          <a:cs typeface="微软雅黑" panose="020B0503020204020204" pitchFamily="34" charset="-120"/>
                         </a:rPr>
                         <a:t>方向</a:t>
                       </a:r>
                       <a:endParaRPr lang="en-US" sz="1500" dirty="0">
-                        <a:latin typeface="微软雅黑" charset="0"/>
-                        <a:ea typeface="微软雅黑" charset="0"/>
-                        <a:cs typeface="微软雅黑" charset="0"/>
+                        <a:latin typeface="微软雅黑" panose="020B0503020204020204" pitchFamily="34" charset="-122"/>
+                        <a:ea typeface="微软雅黑" panose="020B0503020204020204" pitchFamily="34" charset="-122"/>
+                        <a:cs typeface="微软雅黑" panose="020B0503020204020204" pitchFamily="34" charset="-122"/>
                       </a:endParaRPr>
                     </a:p>
                   </a:txBody>
-                  <a:tcPr marL="91440" marR="91440" marT="45720" marB="45720" anchor="ctr">
+                  <a:tcPr anchor="ctr">
                     <a:lnL w="9525" cap="flat" cmpd="sng" algn="ctr">
                       <a:solidFill>
                         <a:srgbClr val="D8DBE0"/>
@@ -2047,7 +1946,7 @@
                     <a:bodyPr/>
                     <a:lstStyle/>
                     <a:p>
-                      <a:pPr algn="ctr" indent="0" marL="0">
+                      <a:pPr marL="0" indent="0" algn="ctr">
                         <a:buNone/>
                       </a:pPr>
                       <a:r>
@@ -2055,20 +1954,20 @@
                           <a:solidFill>
                             <a:srgbClr val="1F4E9C"/>
                           </a:solidFill>
-                          <a:latin typeface="微软雅黑" pitchFamily="34" charset="0"/>
-                          <a:ea typeface="微软雅黑" pitchFamily="34" charset="-122"/>
-                          <a:cs typeface="微软雅黑" pitchFamily="34" charset="-120"/>
+                          <a:latin typeface="微软雅黑" panose="020B0503020204020204" pitchFamily="34" charset="-122"/>
+                          <a:ea typeface="微软雅黑" panose="020B0503020204020204" pitchFamily="34" charset="-122"/>
+                          <a:cs typeface="微软雅黑" panose="020B0503020204020204" pitchFamily="34" charset="-120"/>
                         </a:rPr>
                         <a:t>题数</a:t>
                       </a:r>
                       <a:endParaRPr lang="en-US" sz="1500" dirty="0">
-                        <a:latin typeface="微软雅黑" charset="0"/>
-                        <a:ea typeface="微软雅黑" charset="0"/>
-                        <a:cs typeface="微软雅黑" charset="0"/>
+                        <a:latin typeface="微软雅黑" panose="020B0503020204020204" pitchFamily="34" charset="-122"/>
+                        <a:ea typeface="微软雅黑" panose="020B0503020204020204" pitchFamily="34" charset="-122"/>
+                        <a:cs typeface="微软雅黑" panose="020B0503020204020204" pitchFamily="34" charset="-122"/>
                       </a:endParaRPr>
                     </a:p>
                   </a:txBody>
-                  <a:tcPr marL="91440" marR="91440" marT="45720" marB="45720" anchor="ctr">
+                  <a:tcPr anchor="ctr">
                     <a:lnL w="9525" cap="flat" cmpd="sng" algn="ctr">
                       <a:solidFill>
                         <a:srgbClr val="D8DBE0"/>
@@ -2115,7 +2014,7 @@
                     <a:bodyPr/>
                     <a:lstStyle/>
                     <a:p>
-                      <a:pPr algn="ctr" indent="0" marL="0">
+                      <a:pPr marL="0" indent="0" algn="ctr">
                         <a:buNone/>
                       </a:pPr>
                       <a:r>
@@ -2123,20 +2022,20 @@
                           <a:solidFill>
                             <a:srgbClr val="1F4E9C"/>
                           </a:solidFill>
-                          <a:latin typeface="微软雅黑" pitchFamily="34" charset="0"/>
-                          <a:ea typeface="微软雅黑" pitchFamily="34" charset="-122"/>
-                          <a:cs typeface="微软雅黑" pitchFamily="34" charset="-120"/>
+                          <a:latin typeface="微软雅黑" panose="020B0503020204020204" pitchFamily="34" charset="-122"/>
+                          <a:ea typeface="微软雅黑" panose="020B0503020204020204" pitchFamily="34" charset="-122"/>
+                          <a:cs typeface="微软雅黑" panose="020B0503020204020204" pitchFamily="34" charset="-120"/>
                         </a:rPr>
                         <a:t>占比</a:t>
                       </a:r>
                       <a:endParaRPr lang="en-US" sz="1500" dirty="0">
-                        <a:latin typeface="微软雅黑" charset="0"/>
-                        <a:ea typeface="微软雅黑" charset="0"/>
-                        <a:cs typeface="微软雅黑" charset="0"/>
+                        <a:latin typeface="微软雅黑" panose="020B0503020204020204" pitchFamily="34" charset="-122"/>
+                        <a:ea typeface="微软雅黑" panose="020B0503020204020204" pitchFamily="34" charset="-122"/>
+                        <a:cs typeface="微软雅黑" panose="020B0503020204020204" pitchFamily="34" charset="-122"/>
                       </a:endParaRPr>
                     </a:p>
                   </a:txBody>
-                  <a:tcPr marL="91440" marR="91440" marT="45720" marB="45720" anchor="ctr">
+                  <a:tcPr anchor="ctr">
                     <a:lnL w="9525" cap="flat" cmpd="sng" algn="ctr">
                       <a:solidFill>
                         <a:srgbClr val="D8DBE0"/>
@@ -2183,7 +2082,7 @@
                     <a:bodyPr/>
                     <a:lstStyle/>
                     <a:p>
-                      <a:pPr algn="ctr" indent="0" marL="0">
+                      <a:pPr marL="0" indent="0" algn="ctr">
                         <a:buNone/>
                       </a:pPr>
                       <a:r>
@@ -2191,20 +2090,20 @@
                           <a:solidFill>
                             <a:srgbClr val="1F4E9C"/>
                           </a:solidFill>
-                          <a:latin typeface="微软雅黑" pitchFamily="34" charset="0"/>
-                          <a:ea typeface="微软雅黑" pitchFamily="34" charset="-122"/>
-                          <a:cs typeface="微软雅黑" pitchFamily="34" charset="-120"/>
+                          <a:latin typeface="微软雅黑" panose="020B0503020204020204" pitchFamily="34" charset="-122"/>
+                          <a:ea typeface="微软雅黑" panose="020B0503020204020204" pitchFamily="34" charset="-122"/>
+                          <a:cs typeface="微软雅黑" panose="020B0503020204020204" pitchFamily="34" charset="-120"/>
                         </a:rPr>
                         <a:t>定位</a:t>
                       </a:r>
                       <a:endParaRPr lang="en-US" sz="1500" dirty="0">
-                        <a:latin typeface="微软雅黑" charset="0"/>
-                        <a:ea typeface="微软雅黑" charset="0"/>
-                        <a:cs typeface="微软雅黑" charset="0"/>
+                        <a:latin typeface="微软雅黑" panose="020B0503020204020204" pitchFamily="34" charset="-122"/>
+                        <a:ea typeface="微软雅黑" panose="020B0503020204020204" pitchFamily="34" charset="-122"/>
+                        <a:cs typeface="微软雅黑" panose="020B0503020204020204" pitchFamily="34" charset="-122"/>
                       </a:endParaRPr>
                     </a:p>
                   </a:txBody>
-                  <a:tcPr marL="91440" marR="91440" marT="45720" marB="45720" anchor="ctr">
+                  <a:tcPr anchor="ctr">
                     <a:lnL w="9525" cap="flat" cmpd="sng" algn="ctr">
                       <a:solidFill>
                         <a:srgbClr val="D8DBE0"/>
@@ -2253,7 +2152,7 @@
                     <a:bodyPr/>
                     <a:lstStyle/>
                     <a:p>
-                      <a:pPr algn="ctr" indent="0" marL="0">
+                      <a:pPr marL="0" indent="0" algn="ctr">
                         <a:buNone/>
                       </a:pPr>
                       <a:r>
@@ -2261,20 +2160,20 @@
                           <a:solidFill>
                             <a:srgbClr val="1F2329"/>
                           </a:solidFill>
-                          <a:latin typeface="微软雅黑" pitchFamily="34" charset="0"/>
-                          <a:ea typeface="微软雅黑" pitchFamily="34" charset="-122"/>
-                          <a:cs typeface="微软雅黑" pitchFamily="34" charset="-120"/>
+                          <a:latin typeface="微软雅黑" panose="020B0503020204020204" pitchFamily="34" charset="-122"/>
+                          <a:ea typeface="微软雅黑" panose="020B0503020204020204" pitchFamily="34" charset="-122"/>
+                          <a:cs typeface="微软雅黑" panose="020B0503020204020204" pitchFamily="34" charset="-120"/>
                         </a:rPr>
                         <a:t>有价值必做</a:t>
                       </a:r>
                       <a:endParaRPr lang="en-US" sz="1500" dirty="0">
-                        <a:latin typeface="微软雅黑" charset="0"/>
-                        <a:ea typeface="微软雅黑" charset="0"/>
-                        <a:cs typeface="微软雅黑" charset="0"/>
+                        <a:latin typeface="微软雅黑" panose="020B0503020204020204" pitchFamily="34" charset="-122"/>
+                        <a:ea typeface="微软雅黑" panose="020B0503020204020204" pitchFamily="34" charset="-122"/>
+                        <a:cs typeface="微软雅黑" panose="020B0503020204020204" pitchFamily="34" charset="-122"/>
                       </a:endParaRPr>
                     </a:p>
                   </a:txBody>
-                  <a:tcPr marL="91440" marR="91440" marT="45720" marB="45720" anchor="ctr">
+                  <a:tcPr anchor="ctr">
                     <a:lnL w="9525" cap="flat" cmpd="sng" algn="ctr">
                       <a:solidFill>
                         <a:srgbClr val="D8DBE0"/>
@@ -2321,7 +2220,7 @@
                     <a:bodyPr/>
                     <a:lstStyle/>
                     <a:p>
-                      <a:pPr algn="ctr" indent="0" marL="0">
+                      <a:pPr marL="0" indent="0" algn="ctr">
                         <a:buNone/>
                       </a:pPr>
                       <a:r>
@@ -2329,20 +2228,20 @@
                           <a:solidFill>
                             <a:srgbClr val="1F2329"/>
                           </a:solidFill>
-                          <a:latin typeface="微软雅黑" pitchFamily="34" charset="0"/>
-                          <a:ea typeface="微软雅黑" pitchFamily="34" charset="-122"/>
-                          <a:cs typeface="微软雅黑" pitchFamily="34" charset="-120"/>
+                          <a:latin typeface="微软雅黑" panose="020B0503020204020204" pitchFamily="34" charset="-122"/>
+                          <a:ea typeface="微软雅黑" panose="020B0503020204020204" pitchFamily="34" charset="-122"/>
+                          <a:cs typeface="微软雅黑" panose="020B0503020204020204" pitchFamily="34" charset="-120"/>
                         </a:rPr>
                         <a:t>19</a:t>
                       </a:r>
                       <a:endParaRPr lang="en-US" sz="1500" dirty="0">
-                        <a:latin typeface="微软雅黑" charset="0"/>
-                        <a:ea typeface="微软雅黑" charset="0"/>
-                        <a:cs typeface="微软雅黑" charset="0"/>
+                        <a:latin typeface="微软雅黑" panose="020B0503020204020204" pitchFamily="34" charset="-122"/>
+                        <a:ea typeface="微软雅黑" panose="020B0503020204020204" pitchFamily="34" charset="-122"/>
+                        <a:cs typeface="微软雅黑" panose="020B0503020204020204" pitchFamily="34" charset="-122"/>
                       </a:endParaRPr>
                     </a:p>
                   </a:txBody>
-                  <a:tcPr marL="91440" marR="91440" marT="45720" marB="45720" anchor="ctr">
+                  <a:tcPr anchor="ctr">
                     <a:lnL w="9525" cap="flat" cmpd="sng" algn="ctr">
                       <a:solidFill>
                         <a:srgbClr val="D8DBE0"/>
@@ -2389,7 +2288,7 @@
                     <a:bodyPr/>
                     <a:lstStyle/>
                     <a:p>
-                      <a:pPr algn="ctr" indent="0" marL="0">
+                      <a:pPr marL="0" indent="0" algn="ctr">
                         <a:buNone/>
                       </a:pPr>
                       <a:r>
@@ -2397,20 +2296,20 @@
                           <a:solidFill>
                             <a:srgbClr val="1F2329"/>
                           </a:solidFill>
-                          <a:latin typeface="微软雅黑" pitchFamily="34" charset="0"/>
-                          <a:ea typeface="微软雅黑" pitchFamily="34" charset="-122"/>
-                          <a:cs typeface="微软雅黑" pitchFamily="34" charset="-120"/>
+                          <a:latin typeface="微软雅黑" panose="020B0503020204020204" pitchFamily="34" charset="-122"/>
+                          <a:ea typeface="微软雅黑" panose="020B0503020204020204" pitchFamily="34" charset="-122"/>
+                          <a:cs typeface="微软雅黑" panose="020B0503020204020204" pitchFamily="34" charset="-120"/>
                         </a:rPr>
                         <a:t>25%</a:t>
                       </a:r>
                       <a:endParaRPr lang="en-US" sz="1500" dirty="0">
-                        <a:latin typeface="微软雅黑" charset="0"/>
-                        <a:ea typeface="微软雅黑" charset="0"/>
-                        <a:cs typeface="微软雅黑" charset="0"/>
+                        <a:latin typeface="微软雅黑" panose="020B0503020204020204" pitchFamily="34" charset="-122"/>
+                        <a:ea typeface="微软雅黑" panose="020B0503020204020204" pitchFamily="34" charset="-122"/>
+                        <a:cs typeface="微软雅黑" panose="020B0503020204020204" pitchFamily="34" charset="-122"/>
                       </a:endParaRPr>
                     </a:p>
                   </a:txBody>
-                  <a:tcPr marL="91440" marR="91440" marT="45720" marB="45720" anchor="ctr">
+                  <a:tcPr anchor="ctr">
                     <a:lnL w="9525" cap="flat" cmpd="sng" algn="ctr">
                       <a:solidFill>
                         <a:srgbClr val="D8DBE0"/>
@@ -2457,7 +2356,7 @@
                     <a:bodyPr/>
                     <a:lstStyle/>
                     <a:p>
-                      <a:pPr algn="ctr" indent="0" marL="0">
+                      <a:pPr marL="0" indent="0" algn="ctr">
                         <a:buNone/>
                       </a:pPr>
                       <a:r>
@@ -2465,20 +2364,20 @@
                           <a:solidFill>
                             <a:srgbClr val="1F2329"/>
                           </a:solidFill>
-                          <a:latin typeface="微软雅黑" pitchFamily="34" charset="0"/>
-                          <a:ea typeface="微软雅黑" pitchFamily="34" charset="-122"/>
-                          <a:cs typeface="微软雅黑" pitchFamily="34" charset="-120"/>
+                          <a:latin typeface="微软雅黑" panose="020B0503020204020204" pitchFamily="34" charset="-122"/>
+                          <a:ea typeface="微软雅黑" panose="020B0503020204020204" pitchFamily="34" charset="-122"/>
+                          <a:cs typeface="微软雅黑" panose="020B0503020204020204" pitchFamily="34" charset="-120"/>
                         </a:rPr>
                         <a:t>对应真题题型，逐题精做</a:t>
                       </a:r>
                       <a:endParaRPr lang="en-US" sz="1500" dirty="0">
-                        <a:latin typeface="微软雅黑" charset="0"/>
-                        <a:ea typeface="微软雅黑" charset="0"/>
-                        <a:cs typeface="微软雅黑" charset="0"/>
+                        <a:latin typeface="微软雅黑" panose="020B0503020204020204" pitchFamily="34" charset="-122"/>
+                        <a:ea typeface="微软雅黑" panose="020B0503020204020204" pitchFamily="34" charset="-122"/>
+                        <a:cs typeface="微软雅黑" panose="020B0503020204020204" pitchFamily="34" charset="-122"/>
                       </a:endParaRPr>
                     </a:p>
                   </a:txBody>
-                  <a:tcPr marL="91440" marR="91440" marT="45720" marB="45720" anchor="ctr">
+                  <a:tcPr anchor="ctr">
                     <a:lnL w="9525" cap="flat" cmpd="sng" algn="ctr">
                       <a:solidFill>
                         <a:srgbClr val="D8DBE0"/>
@@ -2527,7 +2426,7 @@
                     <a:bodyPr/>
                     <a:lstStyle/>
                     <a:p>
-                      <a:pPr algn="ctr" indent="0" marL="0">
+                      <a:pPr marL="0" indent="0" algn="ctr">
                         <a:buNone/>
                       </a:pPr>
                       <a:r>
@@ -2535,20 +2434,20 @@
                           <a:solidFill>
                             <a:srgbClr val="1F2329"/>
                           </a:solidFill>
-                          <a:latin typeface="微软雅黑" pitchFamily="34" charset="0"/>
-                          <a:ea typeface="微软雅黑" pitchFamily="34" charset="-122"/>
-                          <a:cs typeface="微软雅黑" pitchFamily="34" charset="-120"/>
+                          <a:latin typeface="微软雅黑" panose="020B0503020204020204" pitchFamily="34" charset="-122"/>
+                          <a:ea typeface="微软雅黑" panose="020B0503020204020204" pitchFamily="34" charset="-122"/>
+                          <a:cs typeface="微软雅黑" panose="020B0503020204020204" pitchFamily="34" charset="-120"/>
                         </a:rPr>
                         <a:t>可做可不做</a:t>
                       </a:r>
                       <a:endParaRPr lang="en-US" sz="1500" dirty="0">
-                        <a:latin typeface="微软雅黑" charset="0"/>
-                        <a:ea typeface="微软雅黑" charset="0"/>
-                        <a:cs typeface="微软雅黑" charset="0"/>
+                        <a:latin typeface="微软雅黑" panose="020B0503020204020204" pitchFamily="34" charset="-122"/>
+                        <a:ea typeface="微软雅黑" panose="020B0503020204020204" pitchFamily="34" charset="-122"/>
+                        <a:cs typeface="微软雅黑" panose="020B0503020204020204" pitchFamily="34" charset="-122"/>
                       </a:endParaRPr>
                     </a:p>
                   </a:txBody>
-                  <a:tcPr marL="91440" marR="91440" marT="45720" marB="45720" anchor="ctr">
+                  <a:tcPr anchor="ctr">
                     <a:lnL w="9525" cap="flat" cmpd="sng" algn="ctr">
                       <a:solidFill>
                         <a:srgbClr val="D8DBE0"/>
@@ -2595,7 +2494,7 @@
                     <a:bodyPr/>
                     <a:lstStyle/>
                     <a:p>
-                      <a:pPr algn="ctr" indent="0" marL="0">
+                      <a:pPr marL="0" indent="0" algn="ctr">
                         <a:buNone/>
                       </a:pPr>
                       <a:r>
@@ -2603,20 +2502,20 @@
                           <a:solidFill>
                             <a:srgbClr val="1F2329"/>
                           </a:solidFill>
-                          <a:latin typeface="微软雅黑" pitchFamily="34" charset="0"/>
-                          <a:ea typeface="微软雅黑" pitchFamily="34" charset="-122"/>
-                          <a:cs typeface="微软雅黑" pitchFamily="34" charset="-120"/>
+                          <a:latin typeface="微软雅黑" panose="020B0503020204020204" pitchFamily="34" charset="-122"/>
+                          <a:ea typeface="微软雅黑" panose="020B0503020204020204" pitchFamily="34" charset="-122"/>
+                          <a:cs typeface="微软雅黑" panose="020B0503020204020204" pitchFamily="34" charset="-120"/>
                         </a:rPr>
                         <a:t>46</a:t>
                       </a:r>
                       <a:endParaRPr lang="en-US" sz="1500" dirty="0">
-                        <a:latin typeface="微软雅黑" charset="0"/>
-                        <a:ea typeface="微软雅黑" charset="0"/>
-                        <a:cs typeface="微软雅黑" charset="0"/>
+                        <a:latin typeface="微软雅黑" panose="020B0503020204020204" pitchFamily="34" charset="-122"/>
+                        <a:ea typeface="微软雅黑" panose="020B0503020204020204" pitchFamily="34" charset="-122"/>
+                        <a:cs typeface="微软雅黑" panose="020B0503020204020204" pitchFamily="34" charset="-122"/>
                       </a:endParaRPr>
                     </a:p>
                   </a:txBody>
-                  <a:tcPr marL="91440" marR="91440" marT="45720" marB="45720" anchor="ctr">
+                  <a:tcPr anchor="ctr">
                     <a:lnL w="9525" cap="flat" cmpd="sng" algn="ctr">
                       <a:solidFill>
                         <a:srgbClr val="D8DBE0"/>
@@ -2663,7 +2562,7 @@
                     <a:bodyPr/>
                     <a:lstStyle/>
                     <a:p>
-                      <a:pPr algn="ctr" indent="0" marL="0">
+                      <a:pPr marL="0" indent="0" algn="ctr">
                         <a:buNone/>
                       </a:pPr>
                       <a:r>
@@ -2671,20 +2570,20 @@
                           <a:solidFill>
                             <a:srgbClr val="1F2329"/>
                           </a:solidFill>
-                          <a:latin typeface="微软雅黑" pitchFamily="34" charset="0"/>
-                          <a:ea typeface="微软雅黑" pitchFamily="34" charset="-122"/>
-                          <a:cs typeface="微软雅黑" pitchFamily="34" charset="-120"/>
+                          <a:latin typeface="微软雅黑" panose="020B0503020204020204" pitchFamily="34" charset="-122"/>
+                          <a:ea typeface="微软雅黑" panose="020B0503020204020204" pitchFamily="34" charset="-122"/>
+                          <a:cs typeface="微软雅黑" panose="020B0503020204020204" pitchFamily="34" charset="-120"/>
                         </a:rPr>
                         <a:t>61%</a:t>
                       </a:r>
                       <a:endParaRPr lang="en-US" sz="1500" dirty="0">
-                        <a:latin typeface="微软雅黑" charset="0"/>
-                        <a:ea typeface="微软雅黑" charset="0"/>
-                        <a:cs typeface="微软雅黑" charset="0"/>
+                        <a:latin typeface="微软雅黑" panose="020B0503020204020204" pitchFamily="34" charset="-122"/>
+                        <a:ea typeface="微软雅黑" panose="020B0503020204020204" pitchFamily="34" charset="-122"/>
+                        <a:cs typeface="微软雅黑" panose="020B0503020204020204" pitchFamily="34" charset="-122"/>
                       </a:endParaRPr>
                     </a:p>
                   </a:txBody>
-                  <a:tcPr marL="91440" marR="91440" marT="45720" marB="45720" anchor="ctr">
+                  <a:tcPr anchor="ctr">
                     <a:lnL w="9525" cap="flat" cmpd="sng" algn="ctr">
                       <a:solidFill>
                         <a:srgbClr val="D8DBE0"/>
@@ -2731,7 +2630,7 @@
                     <a:bodyPr/>
                     <a:lstStyle/>
                     <a:p>
-                      <a:pPr algn="ctr" indent="0" marL="0">
+                      <a:pPr marL="0" indent="0" algn="ctr">
                         <a:buNone/>
                       </a:pPr>
                       <a:r>
@@ -2739,20 +2638,20 @@
                           <a:solidFill>
                             <a:srgbClr val="1F2329"/>
                           </a:solidFill>
-                          <a:latin typeface="微软雅黑" pitchFamily="34" charset="0"/>
-                          <a:ea typeface="微软雅黑" pitchFamily="34" charset="-122"/>
-                          <a:cs typeface="微软雅黑" pitchFamily="34" charset="-120"/>
+                          <a:latin typeface="微软雅黑" panose="020B0503020204020204" pitchFamily="34" charset="-122"/>
+                          <a:ea typeface="微软雅黑" panose="020B0503020204020204" pitchFamily="34" charset="-122"/>
+                          <a:cs typeface="微软雅黑" panose="020B0503020204020204" pitchFamily="34" charset="-120"/>
                         </a:rPr>
                         <a:t>在纲内、考频低，限时巩固</a:t>
                       </a:r>
                       <a:endParaRPr lang="en-US" sz="1500" dirty="0">
-                        <a:latin typeface="微软雅黑" charset="0"/>
-                        <a:ea typeface="微软雅黑" charset="0"/>
-                        <a:cs typeface="微软雅黑" charset="0"/>
+                        <a:latin typeface="微软雅黑" panose="020B0503020204020204" pitchFamily="34" charset="-122"/>
+                        <a:ea typeface="微软雅黑" panose="020B0503020204020204" pitchFamily="34" charset="-122"/>
+                        <a:cs typeface="微软雅黑" panose="020B0503020204020204" pitchFamily="34" charset="-122"/>
                       </a:endParaRPr>
                     </a:p>
                   </a:txBody>
-                  <a:tcPr marL="91440" marR="91440" marT="45720" marB="45720" anchor="ctr">
+                  <a:tcPr anchor="ctr">
                     <a:lnL w="9525" cap="flat" cmpd="sng" algn="ctr">
                       <a:solidFill>
                         <a:srgbClr val="D8DBE0"/>
@@ -2801,7 +2700,7 @@
                     <a:bodyPr/>
                     <a:lstStyle/>
                     <a:p>
-                      <a:pPr algn="ctr" indent="0" marL="0">
+                      <a:pPr marL="0" indent="0" algn="ctr">
                         <a:buNone/>
                       </a:pPr>
                       <a:r>
@@ -2809,20 +2708,20 @@
                           <a:solidFill>
                             <a:srgbClr val="1F2329"/>
                           </a:solidFill>
-                          <a:latin typeface="微软雅黑" pitchFamily="34" charset="0"/>
-                          <a:ea typeface="微软雅黑" pitchFamily="34" charset="-122"/>
-                          <a:cs typeface="微软雅黑" pitchFamily="34" charset="-120"/>
+                          <a:latin typeface="微软雅黑" panose="020B0503020204020204" pitchFamily="34" charset="-122"/>
+                          <a:ea typeface="微软雅黑" panose="020B0503020204020204" pitchFamily="34" charset="-122"/>
+                          <a:cs typeface="微软雅黑" panose="020B0503020204020204" pitchFamily="34" charset="-120"/>
                         </a:rPr>
                         <a:t>完全不做</a:t>
                       </a:r>
                       <a:endParaRPr lang="en-US" sz="1500" dirty="0">
-                        <a:latin typeface="微软雅黑" charset="0"/>
-                        <a:ea typeface="微软雅黑" charset="0"/>
-                        <a:cs typeface="微软雅黑" charset="0"/>
+                        <a:latin typeface="微软雅黑" panose="020B0503020204020204" pitchFamily="34" charset="-122"/>
+                        <a:ea typeface="微软雅黑" panose="020B0503020204020204" pitchFamily="34" charset="-122"/>
+                        <a:cs typeface="微软雅黑" panose="020B0503020204020204" pitchFamily="34" charset="-122"/>
                       </a:endParaRPr>
                     </a:p>
                   </a:txBody>
-                  <a:tcPr marL="91440" marR="91440" marT="45720" marB="45720" anchor="ctr">
+                  <a:tcPr anchor="ctr">
                     <a:lnL w="9525" cap="flat" cmpd="sng" algn="ctr">
                       <a:solidFill>
                         <a:srgbClr val="D8DBE0"/>
@@ -2869,7 +2768,7 @@
                     <a:bodyPr/>
                     <a:lstStyle/>
                     <a:p>
-                      <a:pPr algn="ctr" indent="0" marL="0">
+                      <a:pPr marL="0" indent="0" algn="ctr">
                         <a:buNone/>
                       </a:pPr>
                       <a:r>
@@ -2877,20 +2776,20 @@
                           <a:solidFill>
                             <a:srgbClr val="1F2329"/>
                           </a:solidFill>
-                          <a:latin typeface="微软雅黑" pitchFamily="34" charset="0"/>
-                          <a:ea typeface="微软雅黑" pitchFamily="34" charset="-122"/>
-                          <a:cs typeface="微软雅黑" pitchFamily="34" charset="-120"/>
+                          <a:latin typeface="微软雅黑" panose="020B0503020204020204" pitchFamily="34" charset="-122"/>
+                          <a:ea typeface="微软雅黑" panose="020B0503020204020204" pitchFamily="34" charset="-122"/>
+                          <a:cs typeface="微软雅黑" panose="020B0503020204020204" pitchFamily="34" charset="-120"/>
                         </a:rPr>
                         <a:t>10</a:t>
                       </a:r>
                       <a:endParaRPr lang="en-US" sz="1500" dirty="0">
-                        <a:latin typeface="微软雅黑" charset="0"/>
-                        <a:ea typeface="微软雅黑" charset="0"/>
-                        <a:cs typeface="微软雅黑" charset="0"/>
+                        <a:latin typeface="微软雅黑" panose="020B0503020204020204" pitchFamily="34" charset="-122"/>
+                        <a:ea typeface="微软雅黑" panose="020B0503020204020204" pitchFamily="34" charset="-122"/>
+                        <a:cs typeface="微软雅黑" panose="020B0503020204020204" pitchFamily="34" charset="-122"/>
                       </a:endParaRPr>
                     </a:p>
                   </a:txBody>
-                  <a:tcPr marL="91440" marR="91440" marT="45720" marB="45720" anchor="ctr">
+                  <a:tcPr anchor="ctr">
                     <a:lnL w="9525" cap="flat" cmpd="sng" algn="ctr">
                       <a:solidFill>
                         <a:srgbClr val="D8DBE0"/>
@@ -2937,7 +2836,7 @@
                     <a:bodyPr/>
                     <a:lstStyle/>
                     <a:p>
-                      <a:pPr algn="ctr" indent="0" marL="0">
+                      <a:pPr marL="0" indent="0" algn="ctr">
                         <a:buNone/>
                       </a:pPr>
                       <a:r>
@@ -2945,20 +2844,20 @@
                           <a:solidFill>
                             <a:srgbClr val="1F2329"/>
                           </a:solidFill>
-                          <a:latin typeface="微软雅黑" pitchFamily="34" charset="0"/>
-                          <a:ea typeface="微软雅黑" pitchFamily="34" charset="-122"/>
-                          <a:cs typeface="微软雅黑" pitchFamily="34" charset="-120"/>
+                          <a:latin typeface="微软雅黑" panose="020B0503020204020204" pitchFamily="34" charset="-122"/>
+                          <a:ea typeface="微软雅黑" panose="020B0503020204020204" pitchFamily="34" charset="-122"/>
+                          <a:cs typeface="微软雅黑" panose="020B0503020204020204" pitchFamily="34" charset="-120"/>
                         </a:rPr>
                         <a:t>13%</a:t>
                       </a:r>
                       <a:endParaRPr lang="en-US" sz="1500" dirty="0">
-                        <a:latin typeface="微软雅黑" charset="0"/>
-                        <a:ea typeface="微软雅黑" charset="0"/>
-                        <a:cs typeface="微软雅黑" charset="0"/>
+                        <a:latin typeface="微软雅黑" panose="020B0503020204020204" pitchFamily="34" charset="-122"/>
+                        <a:ea typeface="微软雅黑" panose="020B0503020204020204" pitchFamily="34" charset="-122"/>
+                        <a:cs typeface="微软雅黑" panose="020B0503020204020204" pitchFamily="34" charset="-122"/>
                       </a:endParaRPr>
                     </a:p>
                   </a:txBody>
-                  <a:tcPr marL="91440" marR="91440" marT="45720" marB="45720" anchor="ctr">
+                  <a:tcPr anchor="ctr">
                     <a:lnL w="9525" cap="flat" cmpd="sng" algn="ctr">
                       <a:solidFill>
                         <a:srgbClr val="D8DBE0"/>
@@ -3005,7 +2904,7 @@
                     <a:bodyPr/>
                     <a:lstStyle/>
                     <a:p>
-                      <a:pPr algn="ctr" indent="0" marL="0">
+                      <a:pPr marL="0" indent="0" algn="ctr">
                         <a:buNone/>
                       </a:pPr>
                       <a:r>
@@ -3013,20 +2912,20 @@
                           <a:solidFill>
                             <a:srgbClr val="1F2329"/>
                           </a:solidFill>
-                          <a:latin typeface="微软雅黑" pitchFamily="34" charset="0"/>
-                          <a:ea typeface="微软雅黑" pitchFamily="34" charset="-122"/>
-                          <a:cs typeface="微软雅黑" pitchFamily="34" charset="-120"/>
+                          <a:latin typeface="微软雅黑" panose="020B0503020204020204" pitchFamily="34" charset="-122"/>
+                          <a:ea typeface="微软雅黑" panose="020B0503020204020204" pitchFamily="34" charset="-122"/>
+                          <a:cs typeface="微软雅黑" panose="020B0503020204020204" pitchFamily="34" charset="-120"/>
                         </a:rPr>
                         <a:t>超纲或无对应题型，直接跳过</a:t>
                       </a:r>
                       <a:endParaRPr lang="en-US" sz="1500" dirty="0">
-                        <a:latin typeface="微软雅黑" charset="0"/>
-                        <a:ea typeface="微软雅黑" charset="0"/>
-                        <a:cs typeface="微软雅黑" charset="0"/>
+                        <a:latin typeface="微软雅黑" panose="020B0503020204020204" pitchFamily="34" charset="-122"/>
+                        <a:ea typeface="微软雅黑" panose="020B0503020204020204" pitchFamily="34" charset="-122"/>
+                        <a:cs typeface="微软雅黑" panose="020B0503020204020204" pitchFamily="34" charset="-122"/>
                       </a:endParaRPr>
                     </a:p>
                   </a:txBody>
-                  <a:tcPr marL="91440" marR="91440" marT="45720" marB="45720" anchor="ctr">
+                  <a:tcPr anchor="ctr">
                     <a:lnL w="9525" cap="flat" cmpd="sng" algn="ctr">
                       <a:solidFill>
                         <a:srgbClr val="D8DBE0"/>
@@ -3088,13 +2987,12 @@
             <a:avLst/>
           </a:prstGeom>
           <a:noFill/>
-          <a:ln/>
         </p:spPr>
         <p:txBody>
           <a:bodyPr wrap="square" rtlCol="0" anchor="t"/>
           <a:lstStyle/>
           <a:p>
-            <a:pPr algn="l" indent="0" marL="0">
+            <a:pPr marL="0" indent="0" algn="l">
               <a:buNone/>
             </a:pPr>
             <a:r>
@@ -3102,9 +3000,9 @@
                 <a:solidFill>
                   <a:srgbClr val="8A9099"/>
                 </a:solidFill>
-                <a:latin typeface="微软雅黑" pitchFamily="34" charset="0"/>
-                <a:ea typeface="微软雅黑" pitchFamily="34" charset="-122"/>
-                <a:cs typeface="微软雅黑" pitchFamily="34" charset="-120"/>
+                <a:latin typeface="微软雅黑" panose="020B0503020204020204" pitchFamily="34" charset="-122"/>
+                <a:ea typeface="微软雅黑" panose="020B0503020204020204" pitchFamily="34" charset="-122"/>
+                <a:cs typeface="微软雅黑" panose="020B0503020204020204" pitchFamily="34" charset="-120"/>
               </a:rPr>
               <a:t>题号口径：选N＝本章单项选择题第N题，答N＝解答题第N题，算N＝算法设计题第N题；页码为题集PDF页（书页＝PDF页−9）。</a:t>
             </a:r>
@@ -3122,7 +3020,7 @@
 
 <file path=ppt/slides/slide3.xml><?xml version="1.0" encoding="utf-8"?>
 <p:sld xmlns:a="http://schemas.openxmlformats.org/drawingml/2006/main" xmlns:r="http://schemas.openxmlformats.org/officeDocument/2006/relationships" xmlns:p="http://schemas.openxmlformats.org/presentationml/2006/main">
-  <p:cSld name="Slide 3">
+  <p:cSld>
     <p:bg>
       <p:bgPr>
         <a:blipFill dpi="0" rotWithShape="1">
@@ -3166,13 +3064,12 @@
             <a:avLst/>
           </a:prstGeom>
           <a:noFill/>
-          <a:ln/>
         </p:spPr>
         <p:txBody>
           <a:bodyPr wrap="square" rtlCol="0" anchor="ctr"/>
           <a:lstStyle/>
           <a:p>
-            <a:pPr algn="r" indent="0" marL="0">
+            <a:pPr marL="0" indent="0" algn="r">
               <a:buNone/>
             </a:pPr>
             <a:r>
@@ -3180,9 +3077,9 @@
                 <a:solidFill>
                   <a:srgbClr val="8A9099"/>
                 </a:solidFill>
-                <a:latin typeface="微软雅黑" pitchFamily="34" charset="0"/>
-                <a:ea typeface="微软雅黑" pitchFamily="34" charset="-122"/>
-                <a:cs typeface="微软雅黑" pitchFamily="34" charset="-120"/>
+                <a:latin typeface="微软雅黑" panose="020B0503020204020204" pitchFamily="34" charset="-122"/>
+                <a:ea typeface="微软雅黑" panose="020B0503020204020204" pitchFamily="34" charset="-122"/>
+                <a:cs typeface="微软雅黑" panose="020B0503020204020204" pitchFamily="34" charset="-120"/>
               </a:rPr>
               <a:t>3 / 9</a:t>
             </a:r>
@@ -3205,13 +3102,12 @@
             <a:avLst/>
           </a:prstGeom>
           <a:noFill/>
-          <a:ln/>
         </p:spPr>
         <p:txBody>
           <a:bodyPr wrap="square" rtlCol="0" anchor="ctr"/>
           <a:lstStyle/>
           <a:p>
-            <a:pPr algn="l" indent="0" marL="0">
+            <a:pPr marL="0" indent="0" algn="l">
               <a:buNone/>
             </a:pPr>
             <a:r>
@@ -3219,9 +3115,9 @@
                 <a:solidFill>
                   <a:srgbClr val="1F4E9C"/>
                 </a:solidFill>
-                <a:latin typeface="微软雅黑" pitchFamily="34" charset="0"/>
-                <a:ea typeface="微软雅黑" pitchFamily="34" charset="-122"/>
-                <a:cs typeface="微软雅黑" pitchFamily="34" charset="-120"/>
+                <a:latin typeface="微软雅黑" panose="020B0503020204020204" pitchFamily="34" charset="-122"/>
+                <a:ea typeface="微软雅黑" panose="020B0503020204020204" pitchFamily="34" charset="-122"/>
+                <a:cs typeface="微软雅黑" panose="020B0503020204020204" pitchFamily="34" charset="-120"/>
               </a:rPr>
               <a:t>有价值必做</a:t>
             </a:r>
@@ -3244,13 +3140,12 @@
             <a:avLst/>
           </a:prstGeom>
           <a:noFill/>
-          <a:ln/>
         </p:spPr>
         <p:txBody>
           <a:bodyPr wrap="square" rtlCol="0" anchor="ctr"/>
           <a:lstStyle/>
           <a:p>
-            <a:pPr algn="l" indent="0" marL="0">
+            <a:pPr marL="0" indent="0" algn="l">
               <a:buNone/>
             </a:pPr>
             <a:r>
@@ -3258,9 +3153,9 @@
                 <a:solidFill>
                   <a:srgbClr val="1F2329"/>
                 </a:solidFill>
-                <a:latin typeface="微软雅黑" pitchFamily="34" charset="0"/>
-                <a:ea typeface="微软雅黑" pitchFamily="34" charset="-122"/>
-                <a:cs typeface="微软雅黑" pitchFamily="34" charset="-120"/>
+                <a:latin typeface="微软雅黑" panose="020B0503020204020204" pitchFamily="34" charset="-122"/>
+                <a:ea typeface="微软雅黑" panose="020B0503020204020204" pitchFamily="34" charset="-122"/>
+                <a:cs typeface="微软雅黑" panose="020B0503020204020204" pitchFamily="34" charset="-120"/>
               </a:rPr>
               <a:t>必做题（1/4）</a:t>
             </a:r>
@@ -3270,21 +3165,15 @@
       </p:sp>
       <p:graphicFrame>
         <p:nvGraphicFramePr>
-          <p:cNvPr id="4" name="Table 0"/>
+          <p:cNvPr id="5" name="Table 0"/>
           <p:cNvGraphicFramePr>
             <a:graphicFrameLocks noGrp="1"/>
           </p:cNvGraphicFramePr>
-          <p:nvPr>
-            <p:extLst>
-              <p:ext uri="{D42A27DB-BD31-4B8C-83A1-F6EECF244321}">
-                <p14:modId xmlns:p14="http://schemas.microsoft.com/office/powerpoint/2010/main" val="1579011935"/>
-              </p:ext>
-            </p:extLst>
-          </p:nvPr>
+          <p:nvPr/>
         </p:nvGraphicFramePr>
         <p:xfrm>
           <a:off x="822960" y="2395728"/>
-          <a:ext cx="10545775" cy="914400"/>
+          <a:ext cx="10545775" cy="2523744"/>
         </p:xfrm>
         <a:graphic>
           <a:graphicData uri="http://schemas.openxmlformats.org/drawingml/2006/table">
@@ -3301,7 +3190,7 @@
                     <a:bodyPr/>
                     <a:lstStyle/>
                     <a:p>
-                      <a:pPr algn="l" indent="0" marL="0">
+                      <a:pPr marL="0" indent="0" algn="l">
                         <a:buNone/>
                       </a:pPr>
                       <a:r>
@@ -3309,20 +3198,20 @@
                           <a:solidFill>
                             <a:srgbClr val="1F4E9C"/>
                           </a:solidFill>
-                          <a:latin typeface="微软雅黑" pitchFamily="34" charset="0"/>
-                          <a:ea typeface="微软雅黑" pitchFamily="34" charset="-122"/>
-                          <a:cs typeface="微软雅黑" pitchFamily="34" charset="-120"/>
+                          <a:latin typeface="微软雅黑" panose="020B0503020204020204" pitchFamily="34" charset="-122"/>
+                          <a:ea typeface="微软雅黑" panose="020B0503020204020204" pitchFamily="34" charset="-122"/>
+                          <a:cs typeface="微软雅黑" panose="020B0503020204020204" pitchFamily="34" charset="-120"/>
                         </a:rPr>
                         <a:t>题号</a:t>
                       </a:r>
                       <a:endParaRPr lang="en-US" sz="1500" dirty="0">
-                        <a:latin typeface="微软雅黑" charset="0"/>
-                        <a:ea typeface="微软雅黑" charset="0"/>
-                        <a:cs typeface="微软雅黑" charset="0"/>
+                        <a:latin typeface="微软雅黑" panose="020B0503020204020204" pitchFamily="34" charset="-122"/>
+                        <a:ea typeface="微软雅黑" panose="020B0503020204020204" pitchFamily="34" charset="-122"/>
+                        <a:cs typeface="微软雅黑" panose="020B0503020204020204" pitchFamily="34" charset="-122"/>
                       </a:endParaRPr>
                     </a:p>
                   </a:txBody>
-                  <a:tcPr marL="91440" marR="91440" marT="45720" marB="45720" anchor="ctr">
+                  <a:tcPr anchor="ctr">
                     <a:lnL w="9525" cap="flat" cmpd="sng" algn="ctr">
                       <a:solidFill>
                         <a:srgbClr val="D8DBE0"/>
@@ -3369,7 +3258,7 @@
                     <a:bodyPr/>
                     <a:lstStyle/>
                     <a:p>
-                      <a:pPr algn="l" indent="0" marL="0">
+                      <a:pPr marL="0" indent="0" algn="l">
                         <a:buNone/>
                       </a:pPr>
                       <a:r>
@@ -3377,20 +3266,20 @@
                           <a:solidFill>
                             <a:srgbClr val="1F4E9C"/>
                           </a:solidFill>
-                          <a:latin typeface="微软雅黑" pitchFamily="34" charset="0"/>
-                          <a:ea typeface="微软雅黑" pitchFamily="34" charset="-122"/>
-                          <a:cs typeface="微软雅黑" pitchFamily="34" charset="-120"/>
+                          <a:latin typeface="微软雅黑" panose="020B0503020204020204" pitchFamily="34" charset="-122"/>
+                          <a:ea typeface="微软雅黑" panose="020B0503020204020204" pitchFamily="34" charset="-122"/>
+                          <a:cs typeface="微软雅黑" panose="020B0503020204020204" pitchFamily="34" charset="-120"/>
                         </a:rPr>
                         <a:t>考点</a:t>
                       </a:r>
                       <a:endParaRPr lang="en-US" sz="1500" dirty="0">
-                        <a:latin typeface="微软雅黑" charset="0"/>
-                        <a:ea typeface="微软雅黑" charset="0"/>
-                        <a:cs typeface="微软雅黑" charset="0"/>
+                        <a:latin typeface="微软雅黑" panose="020B0503020204020204" pitchFamily="34" charset="-122"/>
+                        <a:ea typeface="微软雅黑" panose="020B0503020204020204" pitchFamily="34" charset="-122"/>
+                        <a:cs typeface="微软雅黑" panose="020B0503020204020204" pitchFamily="34" charset="-122"/>
                       </a:endParaRPr>
                     </a:p>
                   </a:txBody>
-                  <a:tcPr marL="91440" marR="91440" marT="45720" marB="45720" anchor="ctr">
+                  <a:tcPr anchor="ctr">
                     <a:lnL w="9525" cap="flat" cmpd="sng" algn="ctr">
                       <a:solidFill>
                         <a:srgbClr val="D8DBE0"/>
@@ -3437,7 +3326,7 @@
                     <a:bodyPr/>
                     <a:lstStyle/>
                     <a:p>
-                      <a:pPr algn="l" indent="0" marL="0">
+                      <a:pPr marL="0" indent="0" algn="l">
                         <a:buNone/>
                       </a:pPr>
                       <a:r>
@@ -3445,20 +3334,20 @@
                           <a:solidFill>
                             <a:srgbClr val="1F4E9C"/>
                           </a:solidFill>
-                          <a:latin typeface="微软雅黑" pitchFamily="34" charset="0"/>
-                          <a:ea typeface="微软雅黑" pitchFamily="34" charset="-122"/>
-                          <a:cs typeface="微软雅黑" pitchFamily="34" charset="-120"/>
+                          <a:latin typeface="微软雅黑" panose="020B0503020204020204" pitchFamily="34" charset="-122"/>
+                          <a:ea typeface="微软雅黑" panose="020B0503020204020204" pitchFamily="34" charset="-122"/>
+                          <a:cs typeface="微软雅黑" panose="020B0503020204020204" pitchFamily="34" charset="-120"/>
                         </a:rPr>
                         <a:t>价值</a:t>
                       </a:r>
                       <a:endParaRPr lang="en-US" sz="1500" dirty="0">
-                        <a:latin typeface="微软雅黑" charset="0"/>
-                        <a:ea typeface="微软雅黑" charset="0"/>
-                        <a:cs typeface="微软雅黑" charset="0"/>
+                        <a:latin typeface="微软雅黑" panose="020B0503020204020204" pitchFamily="34" charset="-122"/>
+                        <a:ea typeface="微软雅黑" panose="020B0503020204020204" pitchFamily="34" charset="-122"/>
+                        <a:cs typeface="微软雅黑" panose="020B0503020204020204" pitchFamily="34" charset="-122"/>
                       </a:endParaRPr>
                     </a:p>
                   </a:txBody>
-                  <a:tcPr marL="91440" marR="91440" marT="45720" marB="45720" anchor="ctr">
+                  <a:tcPr anchor="ctr">
                     <a:lnL w="9525" cap="flat" cmpd="sng" algn="ctr">
                       <a:solidFill>
                         <a:srgbClr val="D8DBE0"/>
@@ -3507,7 +3396,7 @@
                     <a:bodyPr/>
                     <a:lstStyle/>
                     <a:p>
-                      <a:pPr algn="l" indent="0" marL="0">
+                      <a:pPr marL="0" indent="0" algn="l">
                         <a:buNone/>
                       </a:pPr>
                       <a:r>
@@ -3515,20 +3404,20 @@
                           <a:solidFill>
                             <a:srgbClr val="1F2329"/>
                           </a:solidFill>
-                          <a:latin typeface="微软雅黑" pitchFamily="34" charset="0"/>
-                          <a:ea typeface="微软雅黑" pitchFamily="34" charset="-122"/>
-                          <a:cs typeface="微软雅黑" pitchFamily="34" charset="-120"/>
+                          <a:latin typeface="微软雅黑" panose="020B0503020204020204" pitchFamily="34" charset="-122"/>
+                          <a:ea typeface="微软雅黑" panose="020B0503020204020204" pitchFamily="34" charset="-122"/>
+                          <a:cs typeface="微软雅黑" panose="020B0503020204020204" pitchFamily="34" charset="-120"/>
                         </a:rPr>
                         <a:t>7选1</a:t>
                       </a:r>
                       <a:endParaRPr lang="en-US" sz="1500" dirty="0">
-                        <a:latin typeface="微软雅黑" charset="0"/>
-                        <a:ea typeface="微软雅黑" charset="0"/>
-                        <a:cs typeface="微软雅黑" charset="0"/>
+                        <a:latin typeface="微软雅黑" panose="020B0503020204020204" pitchFamily="34" charset="-122"/>
+                        <a:ea typeface="微软雅黑" panose="020B0503020204020204" pitchFamily="34" charset="-122"/>
+                        <a:cs typeface="微软雅黑" panose="020B0503020204020204" pitchFamily="34" charset="-122"/>
                       </a:endParaRPr>
                     </a:p>
                   </a:txBody>
-                  <a:tcPr marL="91440" marR="91440" marT="45720" marB="45720" anchor="ctr">
+                  <a:tcPr anchor="ctr">
                     <a:lnL w="9525" cap="flat" cmpd="sng" algn="ctr">
                       <a:solidFill>
                         <a:srgbClr val="D8DBE0"/>
@@ -3575,7 +3464,7 @@
                     <a:bodyPr/>
                     <a:lstStyle/>
                     <a:p>
-                      <a:pPr algn="l" indent="0" marL="0">
+                      <a:pPr marL="0" indent="0" algn="l">
                         <a:buNone/>
                       </a:pPr>
                       <a:r>
@@ -3583,20 +3472,20 @@
                           <a:solidFill>
                             <a:srgbClr val="1F2329"/>
                           </a:solidFill>
-                          <a:latin typeface="微软雅黑" pitchFamily="34" charset="0"/>
-                          <a:ea typeface="微软雅黑" pitchFamily="34" charset="-122"/>
-                          <a:cs typeface="微软雅黑" pitchFamily="34" charset="-120"/>
+                          <a:latin typeface="微软雅黑" panose="020B0503020204020204" pitchFamily="34" charset="-122"/>
+                          <a:ea typeface="微软雅黑" panose="020B0503020204020204" pitchFamily="34" charset="-122"/>
+                          <a:cs typeface="微软雅黑" panose="020B0503020204020204" pitchFamily="34" charset="-120"/>
                         </a:rPr>
                         <a:t>完全图边数</a:t>
                       </a:r>
                       <a:endParaRPr lang="en-US" sz="1500" dirty="0">
-                        <a:latin typeface="微软雅黑" charset="0"/>
-                        <a:ea typeface="微软雅黑" charset="0"/>
-                        <a:cs typeface="微软雅黑" charset="0"/>
+                        <a:latin typeface="微软雅黑" panose="020B0503020204020204" pitchFamily="34" charset="-122"/>
+                        <a:ea typeface="微软雅黑" panose="020B0503020204020204" pitchFamily="34" charset="-122"/>
+                        <a:cs typeface="微软雅黑" panose="020B0503020204020204" pitchFamily="34" charset="-122"/>
                       </a:endParaRPr>
                     </a:p>
                   </a:txBody>
-                  <a:tcPr marL="91440" marR="91440" marT="45720" marB="45720" anchor="ctr">
+                  <a:tcPr anchor="ctr">
                     <a:lnL w="9525" cap="flat" cmpd="sng" algn="ctr">
                       <a:solidFill>
                         <a:srgbClr val="D8DBE0"/>
@@ -3643,7 +3532,7 @@
                     <a:bodyPr/>
                     <a:lstStyle/>
                     <a:p>
-                      <a:pPr algn="l" indent="0" marL="0">
+                      <a:pPr marL="0" indent="0" algn="l">
                         <a:buNone/>
                       </a:pPr>
                       <a:r>
@@ -3651,20 +3540,20 @@
                           <a:solidFill>
                             <a:srgbClr val="1F2329"/>
                           </a:solidFill>
-                          <a:latin typeface="微软雅黑" pitchFamily="34" charset="0"/>
-                          <a:ea typeface="微软雅黑" pitchFamily="34" charset="-122"/>
-                          <a:cs typeface="微软雅黑" pitchFamily="34" charset="-120"/>
+                          <a:latin typeface="微软雅黑" panose="020B0503020204020204" pitchFamily="34" charset="-122"/>
+                          <a:ea typeface="微软雅黑" panose="020B0503020204020204" pitchFamily="34" charset="-122"/>
+                          <a:cs typeface="微软雅黑" panose="020B0503020204020204" pitchFamily="34" charset="-120"/>
                         </a:rPr>
                         <a:t>n顶点有向完全图边数n(n-1)，图基本公式</a:t>
                       </a:r>
                       <a:endParaRPr lang="en-US" sz="1500" dirty="0">
-                        <a:latin typeface="微软雅黑" charset="0"/>
-                        <a:ea typeface="微软雅黑" charset="0"/>
-                        <a:cs typeface="微软雅黑" charset="0"/>
+                        <a:latin typeface="微软雅黑" panose="020B0503020204020204" pitchFamily="34" charset="-122"/>
+                        <a:ea typeface="微软雅黑" panose="020B0503020204020204" pitchFamily="34" charset="-122"/>
+                        <a:cs typeface="微软雅黑" panose="020B0503020204020204" pitchFamily="34" charset="-122"/>
                       </a:endParaRPr>
                     </a:p>
                   </a:txBody>
-                  <a:tcPr marL="91440" marR="91440" marT="45720" marB="45720" anchor="ctr">
+                  <a:tcPr anchor="ctr">
                     <a:lnL w="9525" cap="flat" cmpd="sng" algn="ctr">
                       <a:solidFill>
                         <a:srgbClr val="D8DBE0"/>
@@ -3713,7 +3602,7 @@
                     <a:bodyPr/>
                     <a:lstStyle/>
                     <a:p>
-                      <a:pPr algn="l" indent="0" marL="0">
+                      <a:pPr marL="0" indent="0" algn="l">
                         <a:buNone/>
                       </a:pPr>
                       <a:r>
@@ -3721,20 +3610,20 @@
                           <a:solidFill>
                             <a:srgbClr val="1F2329"/>
                           </a:solidFill>
-                          <a:latin typeface="微软雅黑" pitchFamily="34" charset="0"/>
-                          <a:ea typeface="微软雅黑" pitchFamily="34" charset="-122"/>
-                          <a:cs typeface="微软雅黑" pitchFamily="34" charset="-120"/>
+                          <a:latin typeface="微软雅黑" panose="020B0503020204020204" pitchFamily="34" charset="-122"/>
+                          <a:ea typeface="微软雅黑" panose="020B0503020204020204" pitchFamily="34" charset="-122"/>
+                          <a:cs typeface="微软雅黑" panose="020B0503020204020204" pitchFamily="34" charset="-120"/>
                         </a:rPr>
                         <a:t>7选8</a:t>
                       </a:r>
                       <a:endParaRPr lang="en-US" sz="1500" dirty="0">
-                        <a:latin typeface="微软雅黑" charset="0"/>
-                        <a:ea typeface="微软雅黑" charset="0"/>
-                        <a:cs typeface="微软雅黑" charset="0"/>
+                        <a:latin typeface="微软雅黑" panose="020B0503020204020204" pitchFamily="34" charset="-122"/>
+                        <a:ea typeface="微软雅黑" panose="020B0503020204020204" pitchFamily="34" charset="-122"/>
+                        <a:cs typeface="微软雅黑" panose="020B0503020204020204" pitchFamily="34" charset="-122"/>
                       </a:endParaRPr>
                     </a:p>
                   </a:txBody>
-                  <a:tcPr marL="91440" marR="91440" marT="45720" marB="45720" anchor="ctr">
+                  <a:tcPr anchor="ctr">
                     <a:lnL w="9525" cap="flat" cmpd="sng" algn="ctr">
                       <a:solidFill>
                         <a:srgbClr val="D8DBE0"/>
@@ -3781,7 +3670,7 @@
                     <a:bodyPr/>
                     <a:lstStyle/>
                     <a:p>
-                      <a:pPr algn="l" indent="0" marL="0">
+                      <a:pPr marL="0" indent="0" algn="l">
                         <a:buNone/>
                       </a:pPr>
                       <a:r>
@@ -3789,20 +3678,20 @@
                           <a:solidFill>
                             <a:srgbClr val="1F2329"/>
                           </a:solidFill>
-                          <a:latin typeface="微软雅黑" pitchFamily="34" charset="0"/>
-                          <a:ea typeface="微软雅黑" pitchFamily="34" charset="-122"/>
-                          <a:cs typeface="微软雅黑" pitchFamily="34" charset="-120"/>
+                          <a:latin typeface="微软雅黑" panose="020B0503020204020204" pitchFamily="34" charset="-122"/>
+                          <a:ea typeface="微软雅黑" panose="020B0503020204020204" pitchFamily="34" charset="-122"/>
+                          <a:cs typeface="微软雅黑" panose="020B0503020204020204" pitchFamily="34" charset="-120"/>
                         </a:rPr>
                         <a:t>强连通最少边</a:t>
                       </a:r>
                       <a:endParaRPr lang="en-US" sz="1500" dirty="0">
-                        <a:latin typeface="微软雅黑" charset="0"/>
-                        <a:ea typeface="微软雅黑" charset="0"/>
-                        <a:cs typeface="微软雅黑" charset="0"/>
+                        <a:latin typeface="微软雅黑" panose="020B0503020204020204" pitchFamily="34" charset="-122"/>
+                        <a:ea typeface="微软雅黑" panose="020B0503020204020204" pitchFamily="34" charset="-122"/>
+                        <a:cs typeface="微软雅黑" panose="020B0503020204020204" pitchFamily="34" charset="-122"/>
                       </a:endParaRPr>
                     </a:p>
                   </a:txBody>
-                  <a:tcPr marL="91440" marR="91440" marT="45720" marB="45720" anchor="ctr">
+                  <a:tcPr anchor="ctr">
                     <a:lnL w="9525" cap="flat" cmpd="sng" algn="ctr">
                       <a:solidFill>
                         <a:srgbClr val="D8DBE0"/>
@@ -3849,7 +3738,7 @@
                     <a:bodyPr/>
                     <a:lstStyle/>
                     <a:p>
-                      <a:pPr algn="l" indent="0" marL="0">
+                      <a:pPr marL="0" indent="0" algn="l">
                         <a:buNone/>
                       </a:pPr>
                       <a:r>
@@ -3857,20 +3746,20 @@
                           <a:solidFill>
                             <a:srgbClr val="1F2329"/>
                           </a:solidFill>
-                          <a:latin typeface="微软雅黑" pitchFamily="34" charset="0"/>
-                          <a:ea typeface="微软雅黑" pitchFamily="34" charset="-122"/>
-                          <a:cs typeface="微软雅黑" pitchFamily="34" charset="-120"/>
+                          <a:latin typeface="微软雅黑" panose="020B0503020204020204" pitchFamily="34" charset="-122"/>
+                          <a:ea typeface="微软雅黑" panose="020B0503020204020204" pitchFamily="34" charset="-122"/>
+                          <a:cs typeface="微软雅黑" panose="020B0503020204020204" pitchFamily="34" charset="-120"/>
                         </a:rPr>
                         <a:t>n顶点强连通至少n条边，2026填空10原题</a:t>
                       </a:r>
                       <a:endParaRPr lang="en-US" sz="1500" dirty="0">
-                        <a:latin typeface="微软雅黑" charset="0"/>
-                        <a:ea typeface="微软雅黑" charset="0"/>
-                        <a:cs typeface="微软雅黑" charset="0"/>
+                        <a:latin typeface="微软雅黑" panose="020B0503020204020204" pitchFamily="34" charset="-122"/>
+                        <a:ea typeface="微软雅黑" panose="020B0503020204020204" pitchFamily="34" charset="-122"/>
+                        <a:cs typeface="微软雅黑" panose="020B0503020204020204" pitchFamily="34" charset="-122"/>
                       </a:endParaRPr>
                     </a:p>
                   </a:txBody>
-                  <a:tcPr marL="91440" marR="91440" marT="45720" marB="45720" anchor="ctr">
+                  <a:tcPr anchor="ctr">
                     <a:lnL w="9525" cap="flat" cmpd="sng" algn="ctr">
                       <a:solidFill>
                         <a:srgbClr val="D8DBE0"/>
@@ -3919,7 +3808,7 @@
                     <a:bodyPr/>
                     <a:lstStyle/>
                     <a:p>
-                      <a:pPr algn="l" indent="0" marL="0">
+                      <a:pPr marL="0" indent="0" algn="l">
                         <a:buNone/>
                       </a:pPr>
                       <a:r>
@@ -3927,20 +3816,20 @@
                           <a:solidFill>
                             <a:srgbClr val="1F2329"/>
                           </a:solidFill>
-                          <a:latin typeface="微软雅黑" pitchFamily="34" charset="0"/>
-                          <a:ea typeface="微软雅黑" pitchFamily="34" charset="-122"/>
-                          <a:cs typeface="微软雅黑" pitchFamily="34" charset="-120"/>
+                          <a:latin typeface="微软雅黑" panose="020B0503020204020204" pitchFamily="34" charset="-122"/>
+                          <a:ea typeface="微软雅黑" panose="020B0503020204020204" pitchFamily="34" charset="-122"/>
+                          <a:cs typeface="微软雅黑" panose="020B0503020204020204" pitchFamily="34" charset="-120"/>
                         </a:rPr>
                         <a:t>7选21</a:t>
                       </a:r>
                       <a:endParaRPr lang="en-US" sz="1500" dirty="0">
-                        <a:latin typeface="微软雅黑" charset="0"/>
-                        <a:ea typeface="微软雅黑" charset="0"/>
-                        <a:cs typeface="微软雅黑" charset="0"/>
+                        <a:latin typeface="微软雅黑" panose="020B0503020204020204" pitchFamily="34" charset="-122"/>
+                        <a:ea typeface="微软雅黑" panose="020B0503020204020204" pitchFamily="34" charset="-122"/>
+                        <a:cs typeface="微软雅黑" panose="020B0503020204020204" pitchFamily="34" charset="-122"/>
                       </a:endParaRPr>
                     </a:p>
                   </a:txBody>
-                  <a:tcPr marL="91440" marR="91440" marT="45720" marB="45720" anchor="ctr">
+                  <a:tcPr anchor="ctr">
                     <a:lnL w="9525" cap="flat" cmpd="sng" algn="ctr">
                       <a:solidFill>
                         <a:srgbClr val="D8DBE0"/>
@@ -3987,7 +3876,7 @@
                     <a:bodyPr/>
                     <a:lstStyle/>
                     <a:p>
-                      <a:pPr algn="l" indent="0" marL="0">
+                      <a:pPr marL="0" indent="0" algn="l">
                         <a:buNone/>
                       </a:pPr>
                       <a:r>
@@ -3995,20 +3884,20 @@
                           <a:solidFill>
                             <a:srgbClr val="1F2329"/>
                           </a:solidFill>
-                          <a:latin typeface="微软雅黑" pitchFamily="34" charset="0"/>
-                          <a:ea typeface="微软雅黑" pitchFamily="34" charset="-122"/>
-                          <a:cs typeface="微软雅黑" pitchFamily="34" charset="-120"/>
+                          <a:latin typeface="微软雅黑" panose="020B0503020204020204" pitchFamily="34" charset="-122"/>
+                          <a:ea typeface="微软雅黑" panose="020B0503020204020204" pitchFamily="34" charset="-122"/>
+                          <a:cs typeface="微软雅黑" panose="020B0503020204020204" pitchFamily="34" charset="-120"/>
                         </a:rPr>
                         <a:t>DFS序列判断</a:t>
                       </a:r>
                       <a:endParaRPr lang="en-US" sz="1500" dirty="0">
-                        <a:latin typeface="微软雅黑" charset="0"/>
-                        <a:ea typeface="微软雅黑" charset="0"/>
-                        <a:cs typeface="微软雅黑" charset="0"/>
+                        <a:latin typeface="微软雅黑" panose="020B0503020204020204" pitchFamily="34" charset="-122"/>
+                        <a:ea typeface="微软雅黑" panose="020B0503020204020204" pitchFamily="34" charset="-122"/>
+                        <a:cs typeface="微软雅黑" panose="020B0503020204020204" pitchFamily="34" charset="-122"/>
                       </a:endParaRPr>
                     </a:p>
                   </a:txBody>
-                  <a:tcPr marL="91440" marR="91440" marT="45720" marB="45720" anchor="ctr">
+                  <a:tcPr anchor="ctr">
                     <a:lnL w="9525" cap="flat" cmpd="sng" algn="ctr">
                       <a:solidFill>
                         <a:srgbClr val="D8DBE0"/>
@@ -4055,7 +3944,7 @@
                     <a:bodyPr/>
                     <a:lstStyle/>
                     <a:p>
-                      <a:pPr algn="l" indent="0" marL="0">
+                      <a:pPr marL="0" indent="0" algn="l">
                         <a:buNone/>
                       </a:pPr>
                       <a:r>
@@ -4063,20 +3952,20 @@
                           <a:solidFill>
                             <a:srgbClr val="1F2329"/>
                           </a:solidFill>
-                          <a:latin typeface="微软雅黑" pitchFamily="34" charset="0"/>
-                          <a:ea typeface="微软雅黑" pitchFamily="34" charset="-122"/>
-                          <a:cs typeface="微软雅黑" pitchFamily="34" charset="-120"/>
+                          <a:latin typeface="微软雅黑" panose="020B0503020204020204" pitchFamily="34" charset="-122"/>
+                          <a:ea typeface="微软雅黑" panose="020B0503020204020204" pitchFamily="34" charset="-122"/>
+                          <a:cs typeface="微软雅黑" panose="020B0503020204020204" pitchFamily="34" charset="-120"/>
                         </a:rPr>
                         <a:t>给图判非DFS序列，2025综合5(1)（写DFS序列）前置</a:t>
                       </a:r>
                       <a:endParaRPr lang="en-US" sz="1500" dirty="0">
-                        <a:latin typeface="微软雅黑" charset="0"/>
-                        <a:ea typeface="微软雅黑" charset="0"/>
-                        <a:cs typeface="微软雅黑" charset="0"/>
+                        <a:latin typeface="微软雅黑" panose="020B0503020204020204" pitchFamily="34" charset="-122"/>
+                        <a:ea typeface="微软雅黑" panose="020B0503020204020204" pitchFamily="34" charset="-122"/>
+                        <a:cs typeface="微软雅黑" panose="020B0503020204020204" pitchFamily="34" charset="-122"/>
                       </a:endParaRPr>
                     </a:p>
                   </a:txBody>
-                  <a:tcPr marL="91440" marR="91440" marT="45720" marB="45720" anchor="ctr">
+                  <a:tcPr anchor="ctr">
                     <a:lnL w="9525" cap="flat" cmpd="sng" algn="ctr">
                       <a:solidFill>
                         <a:srgbClr val="D8DBE0"/>
@@ -4125,7 +4014,7 @@
                     <a:bodyPr/>
                     <a:lstStyle/>
                     <a:p>
-                      <a:pPr algn="l" indent="0" marL="0">
+                      <a:pPr marL="0" indent="0" algn="l">
                         <a:buNone/>
                       </a:pPr>
                       <a:r>
@@ -4133,20 +4022,20 @@
                           <a:solidFill>
                             <a:srgbClr val="1F2329"/>
                           </a:solidFill>
-                          <a:latin typeface="微软雅黑" pitchFamily="34" charset="0"/>
-                          <a:ea typeface="微软雅黑" pitchFamily="34" charset="-122"/>
-                          <a:cs typeface="微软雅黑" pitchFamily="34" charset="-120"/>
+                          <a:latin typeface="微软雅黑" panose="020B0503020204020204" pitchFamily="34" charset="-122"/>
+                          <a:ea typeface="微软雅黑" panose="020B0503020204020204" pitchFamily="34" charset="-122"/>
+                          <a:cs typeface="微软雅黑" panose="020B0503020204020204" pitchFamily="34" charset="-120"/>
                         </a:rPr>
                         <a:t>7选22</a:t>
                       </a:r>
                       <a:endParaRPr lang="en-US" sz="1500" dirty="0">
-                        <a:latin typeface="微软雅黑" charset="0"/>
-                        <a:ea typeface="微软雅黑" charset="0"/>
-                        <a:cs typeface="微软雅黑" charset="0"/>
+                        <a:latin typeface="微软雅黑" panose="020B0503020204020204" pitchFamily="34" charset="-122"/>
+                        <a:ea typeface="微软雅黑" panose="020B0503020204020204" pitchFamily="34" charset="-122"/>
+                        <a:cs typeface="微软雅黑" panose="020B0503020204020204" pitchFamily="34" charset="-122"/>
                       </a:endParaRPr>
                     </a:p>
                   </a:txBody>
-                  <a:tcPr marL="91440" marR="91440" marT="45720" marB="45720" anchor="ctr">
+                  <a:tcPr anchor="ctr">
                     <a:lnL w="9525" cap="flat" cmpd="sng" algn="ctr">
                       <a:solidFill>
                         <a:srgbClr val="D8DBE0"/>
@@ -4193,7 +4082,7 @@
                     <a:bodyPr/>
                     <a:lstStyle/>
                     <a:p>
-                      <a:pPr algn="l" indent="0" marL="0">
+                      <a:pPr marL="0" indent="0" algn="l">
                         <a:buNone/>
                       </a:pPr>
                       <a:r>
@@ -4201,20 +4090,20 @@
                           <a:solidFill>
                             <a:srgbClr val="1F2329"/>
                           </a:solidFill>
-                          <a:latin typeface="微软雅黑" pitchFamily="34" charset="0"/>
-                          <a:ea typeface="微软雅黑" pitchFamily="34" charset="-122"/>
-                          <a:cs typeface="微软雅黑" pitchFamily="34" charset="-120"/>
+                          <a:latin typeface="微软雅黑" panose="020B0503020204020204" pitchFamily="34" charset="-122"/>
+                          <a:ea typeface="微软雅黑" panose="020B0503020204020204" pitchFamily="34" charset="-122"/>
+                          <a:cs typeface="微软雅黑" panose="020B0503020204020204" pitchFamily="34" charset="-120"/>
                         </a:rPr>
                         <a:t>BFS序列判断</a:t>
                       </a:r>
                       <a:endParaRPr lang="en-US" sz="1500" dirty="0">
-                        <a:latin typeface="微软雅黑" charset="0"/>
-                        <a:ea typeface="微软雅黑" charset="0"/>
-                        <a:cs typeface="微软雅黑" charset="0"/>
+                        <a:latin typeface="微软雅黑" panose="020B0503020204020204" pitchFamily="34" charset="-122"/>
+                        <a:ea typeface="微软雅黑" panose="020B0503020204020204" pitchFamily="34" charset="-122"/>
+                        <a:cs typeface="微软雅黑" panose="020B0503020204020204" pitchFamily="34" charset="-122"/>
                       </a:endParaRPr>
                     </a:p>
                   </a:txBody>
-                  <a:tcPr marL="91440" marR="91440" marT="45720" marB="45720" anchor="ctr">
+                  <a:tcPr anchor="ctr">
                     <a:lnL w="9525" cap="flat" cmpd="sng" algn="ctr">
                       <a:solidFill>
                         <a:srgbClr val="D8DBE0"/>
@@ -4261,7 +4150,7 @@
                     <a:bodyPr/>
                     <a:lstStyle/>
                     <a:p>
-                      <a:pPr algn="l" indent="0" marL="0">
+                      <a:pPr marL="0" indent="0" algn="l">
                         <a:buNone/>
                       </a:pPr>
                       <a:r>
@@ -4269,20 +4158,20 @@
                           <a:solidFill>
                             <a:srgbClr val="1F2329"/>
                           </a:solidFill>
-                          <a:latin typeface="微软雅黑" pitchFamily="34" charset="0"/>
-                          <a:ea typeface="微软雅黑" pitchFamily="34" charset="-122"/>
-                          <a:cs typeface="微软雅黑" pitchFamily="34" charset="-120"/>
+                          <a:latin typeface="微软雅黑" panose="020B0503020204020204" pitchFamily="34" charset="-122"/>
+                          <a:ea typeface="微软雅黑" panose="020B0503020204020204" pitchFamily="34" charset="-122"/>
+                          <a:cs typeface="微软雅黑" panose="020B0503020204020204" pitchFamily="34" charset="-120"/>
                         </a:rPr>
                         <a:t>给图判BFS序列，2025综合5(1)同型</a:t>
                       </a:r>
                       <a:endParaRPr lang="en-US" sz="1500" dirty="0">
-                        <a:latin typeface="微软雅黑" charset="0"/>
-                        <a:ea typeface="微软雅黑" charset="0"/>
-                        <a:cs typeface="微软雅黑" charset="0"/>
+                        <a:latin typeface="微软雅黑" panose="020B0503020204020204" pitchFamily="34" charset="-122"/>
+                        <a:ea typeface="微软雅黑" panose="020B0503020204020204" pitchFamily="34" charset="-122"/>
+                        <a:cs typeface="微软雅黑" panose="020B0503020204020204" pitchFamily="34" charset="-122"/>
                       </a:endParaRPr>
                     </a:p>
                   </a:txBody>
-                  <a:tcPr marL="91440" marR="91440" marT="45720" marB="45720" anchor="ctr">
+                  <a:tcPr anchor="ctr">
                     <a:lnL w="9525" cap="flat" cmpd="sng" algn="ctr">
                       <a:solidFill>
                         <a:srgbClr val="D8DBE0"/>
@@ -4331,7 +4220,7 @@
                     <a:bodyPr/>
                     <a:lstStyle/>
                     <a:p>
-                      <a:pPr algn="l" indent="0" marL="0">
+                      <a:pPr marL="0" indent="0" algn="l">
                         <a:buNone/>
                       </a:pPr>
                       <a:r>
@@ -4339,20 +4228,20 @@
                           <a:solidFill>
                             <a:srgbClr val="1F2329"/>
                           </a:solidFill>
-                          <a:latin typeface="微软雅黑" pitchFamily="34" charset="0"/>
-                          <a:ea typeface="微软雅黑" pitchFamily="34" charset="-122"/>
-                          <a:cs typeface="微软雅黑" pitchFamily="34" charset="-120"/>
+                          <a:latin typeface="微软雅黑" panose="020B0503020204020204" pitchFamily="34" charset="-122"/>
+                          <a:ea typeface="微软雅黑" panose="020B0503020204020204" pitchFamily="34" charset="-122"/>
+                          <a:cs typeface="微软雅黑" panose="020B0503020204020204" pitchFamily="34" charset="-120"/>
                         </a:rPr>
                         <a:t>7选25</a:t>
                       </a:r>
                       <a:endParaRPr lang="en-US" sz="1500" dirty="0">
-                        <a:latin typeface="微软雅黑" charset="0"/>
-                        <a:ea typeface="微软雅黑" charset="0"/>
-                        <a:cs typeface="微软雅黑" charset="0"/>
+                        <a:latin typeface="微软雅黑" panose="020B0503020204020204" pitchFamily="34" charset="-122"/>
+                        <a:ea typeface="微软雅黑" panose="020B0503020204020204" pitchFamily="34" charset="-122"/>
+                        <a:cs typeface="微软雅黑" panose="020B0503020204020204" pitchFamily="34" charset="-122"/>
                       </a:endParaRPr>
                     </a:p>
                   </a:txBody>
-                  <a:tcPr marL="91440" marR="91440" marT="45720" marB="45720" anchor="ctr">
+                  <a:tcPr anchor="ctr">
                     <a:lnL w="9525" cap="flat" cmpd="sng" algn="ctr">
                       <a:solidFill>
                         <a:srgbClr val="D8DBE0"/>
@@ -4399,7 +4288,7 @@
                     <a:bodyPr/>
                     <a:lstStyle/>
                     <a:p>
-                      <a:pPr algn="l" indent="0" marL="0">
+                      <a:pPr marL="0" indent="0" algn="l">
                         <a:buNone/>
                       </a:pPr>
                       <a:r>
@@ -4407,20 +4296,20 @@
                           <a:solidFill>
                             <a:srgbClr val="1F2329"/>
                           </a:solidFill>
-                          <a:latin typeface="微软雅黑" pitchFamily="34" charset="0"/>
-                          <a:ea typeface="微软雅黑" pitchFamily="34" charset="-122"/>
-                          <a:cs typeface="微软雅黑" pitchFamily="34" charset="-120"/>
+                          <a:latin typeface="微软雅黑" panose="020B0503020204020204" pitchFamily="34" charset="-122"/>
+                          <a:ea typeface="微软雅黑" panose="020B0503020204020204" pitchFamily="34" charset="-122"/>
+                          <a:cs typeface="微软雅黑" panose="020B0503020204020204" pitchFamily="34" charset="-120"/>
                         </a:rPr>
                         <a:t>最小生成树权值</a:t>
                       </a:r>
                       <a:endParaRPr lang="en-US" sz="1500" dirty="0">
-                        <a:latin typeface="微软雅黑" charset="0"/>
-                        <a:ea typeface="微软雅黑" charset="0"/>
-                        <a:cs typeface="微软雅黑" charset="0"/>
+                        <a:latin typeface="微软雅黑" panose="020B0503020204020204" pitchFamily="34" charset="-122"/>
+                        <a:ea typeface="微软雅黑" panose="020B0503020204020204" pitchFamily="34" charset="-122"/>
+                        <a:cs typeface="微软雅黑" panose="020B0503020204020204" pitchFamily="34" charset="-122"/>
                       </a:endParaRPr>
                     </a:p>
                   </a:txBody>
-                  <a:tcPr marL="91440" marR="91440" marT="45720" marB="45720" anchor="ctr">
+                  <a:tcPr anchor="ctr">
                     <a:lnL w="9525" cap="flat" cmpd="sng" algn="ctr">
                       <a:solidFill>
                         <a:srgbClr val="D8DBE0"/>
@@ -4467,7 +4356,7 @@
                     <a:bodyPr/>
                     <a:lstStyle/>
                     <a:p>
-                      <a:pPr algn="l" indent="0" marL="0">
+                      <a:pPr marL="0" indent="0" algn="l">
                         <a:buNone/>
                       </a:pPr>
                       <a:r>
@@ -4475,20 +4364,20 @@
                           <a:solidFill>
                             <a:srgbClr val="1F2329"/>
                           </a:solidFill>
-                          <a:latin typeface="微软雅黑" pitchFamily="34" charset="0"/>
-                          <a:ea typeface="微软雅黑" pitchFamily="34" charset="-122"/>
-                          <a:cs typeface="微软雅黑" pitchFamily="34" charset="-120"/>
+                          <a:latin typeface="微软雅黑" panose="020B0503020204020204" pitchFamily="34" charset="-122"/>
+                          <a:ea typeface="微软雅黑" panose="020B0503020204020204" pitchFamily="34" charset="-122"/>
+                          <a:cs typeface="微软雅黑" panose="020B0503020204020204" pitchFamily="34" charset="-120"/>
                         </a:rPr>
                         <a:t>给图求MST权，2025综合5(2)(3)</a:t>
                       </a:r>
                       <a:endParaRPr lang="en-US" sz="1500" dirty="0">
-                        <a:latin typeface="微软雅黑" charset="0"/>
-                        <a:ea typeface="微软雅黑" charset="0"/>
-                        <a:cs typeface="微软雅黑" charset="0"/>
+                        <a:latin typeface="微软雅黑" panose="020B0503020204020204" pitchFamily="34" charset="-122"/>
+                        <a:ea typeface="微软雅黑" panose="020B0503020204020204" pitchFamily="34" charset="-122"/>
+                        <a:cs typeface="微软雅黑" panose="020B0503020204020204" pitchFamily="34" charset="-122"/>
                       </a:endParaRPr>
                     </a:p>
                   </a:txBody>
-                  <a:tcPr marL="91440" marR="91440" marT="45720" marB="45720" anchor="ctr">
+                  <a:tcPr anchor="ctr">
                     <a:lnL w="9525" cap="flat" cmpd="sng" algn="ctr">
                       <a:solidFill>
                         <a:srgbClr val="D8DBE0"/>
@@ -4545,7 +4434,7 @@
 
 <file path=ppt/slides/slide4.xml><?xml version="1.0" encoding="utf-8"?>
 <p:sld xmlns:a="http://schemas.openxmlformats.org/drawingml/2006/main" xmlns:r="http://schemas.openxmlformats.org/officeDocument/2006/relationships" xmlns:p="http://schemas.openxmlformats.org/presentationml/2006/main">
-  <p:cSld name="Slide 4">
+  <p:cSld>
     <p:bg>
       <p:bgPr>
         <a:blipFill dpi="0" rotWithShape="1">
@@ -4589,13 +4478,12 @@
             <a:avLst/>
           </a:prstGeom>
           <a:noFill/>
-          <a:ln/>
         </p:spPr>
         <p:txBody>
           <a:bodyPr wrap="square" rtlCol="0" anchor="ctr"/>
           <a:lstStyle/>
           <a:p>
-            <a:pPr algn="r" indent="0" marL="0">
+            <a:pPr marL="0" indent="0" algn="r">
               <a:buNone/>
             </a:pPr>
             <a:r>
@@ -4603,9 +4491,9 @@
                 <a:solidFill>
                   <a:srgbClr val="8A9099"/>
                 </a:solidFill>
-                <a:latin typeface="微软雅黑" pitchFamily="34" charset="0"/>
-                <a:ea typeface="微软雅黑" pitchFamily="34" charset="-122"/>
-                <a:cs typeface="微软雅黑" pitchFamily="34" charset="-120"/>
+                <a:latin typeface="微软雅黑" panose="020B0503020204020204" pitchFamily="34" charset="-122"/>
+                <a:ea typeface="微软雅黑" panose="020B0503020204020204" pitchFamily="34" charset="-122"/>
+                <a:cs typeface="微软雅黑" panose="020B0503020204020204" pitchFamily="34" charset="-120"/>
               </a:rPr>
               <a:t>4 / 9</a:t>
             </a:r>
@@ -4628,13 +4516,12 @@
             <a:avLst/>
           </a:prstGeom>
           <a:noFill/>
-          <a:ln/>
         </p:spPr>
         <p:txBody>
           <a:bodyPr wrap="square" rtlCol="0" anchor="ctr"/>
           <a:lstStyle/>
           <a:p>
-            <a:pPr algn="l" indent="0" marL="0">
+            <a:pPr marL="0" indent="0" algn="l">
               <a:buNone/>
             </a:pPr>
             <a:r>
@@ -4642,9 +4529,9 @@
                 <a:solidFill>
                   <a:srgbClr val="1F4E9C"/>
                 </a:solidFill>
-                <a:latin typeface="微软雅黑" pitchFamily="34" charset="0"/>
-                <a:ea typeface="微软雅黑" pitchFamily="34" charset="-122"/>
-                <a:cs typeface="微软雅黑" pitchFamily="34" charset="-120"/>
+                <a:latin typeface="微软雅黑" panose="020B0503020204020204" pitchFamily="34" charset="-122"/>
+                <a:ea typeface="微软雅黑" panose="020B0503020204020204" pitchFamily="34" charset="-122"/>
+                <a:cs typeface="微软雅黑" panose="020B0503020204020204" pitchFamily="34" charset="-120"/>
               </a:rPr>
               <a:t>有价值必做</a:t>
             </a:r>
@@ -4667,13 +4554,12 @@
             <a:avLst/>
           </a:prstGeom>
           <a:noFill/>
-          <a:ln/>
         </p:spPr>
         <p:txBody>
           <a:bodyPr wrap="square" rtlCol="0" anchor="ctr"/>
           <a:lstStyle/>
           <a:p>
-            <a:pPr algn="l" indent="0" marL="0">
+            <a:pPr marL="0" indent="0" algn="l">
               <a:buNone/>
             </a:pPr>
             <a:r>
@@ -4681,9 +4567,9 @@
                 <a:solidFill>
                   <a:srgbClr val="1F2329"/>
                 </a:solidFill>
-                <a:latin typeface="微软雅黑" pitchFamily="34" charset="0"/>
-                <a:ea typeface="微软雅黑" pitchFamily="34" charset="-122"/>
-                <a:cs typeface="微软雅黑" pitchFamily="34" charset="-120"/>
+                <a:latin typeface="微软雅黑" panose="020B0503020204020204" pitchFamily="34" charset="-122"/>
+                <a:ea typeface="微软雅黑" panose="020B0503020204020204" pitchFamily="34" charset="-122"/>
+                <a:cs typeface="微软雅黑" panose="020B0503020204020204" pitchFamily="34" charset="-120"/>
               </a:rPr>
               <a:t>必做题（2/4）</a:t>
             </a:r>
@@ -4697,17 +4583,11 @@
           <p:cNvGraphicFramePr>
             <a:graphicFrameLocks noGrp="1"/>
           </p:cNvGraphicFramePr>
-          <p:nvPr>
-            <p:extLst>
-              <p:ext uri="{D42A27DB-BD31-4B8C-83A1-F6EECF244321}">
-                <p14:modId xmlns:p14="http://schemas.microsoft.com/office/powerpoint/2010/main" val="1579011935"/>
-              </p:ext>
-            </p:extLst>
-          </p:nvPr>
+          <p:nvPr/>
         </p:nvGraphicFramePr>
         <p:xfrm>
           <a:off x="822960" y="2395728"/>
-          <a:ext cx="10545775" cy="914400"/>
+          <a:ext cx="10545775" cy="2523744"/>
         </p:xfrm>
         <a:graphic>
           <a:graphicData uri="http://schemas.openxmlformats.org/drawingml/2006/table">
@@ -4724,7 +4604,7 @@
                     <a:bodyPr/>
                     <a:lstStyle/>
                     <a:p>
-                      <a:pPr algn="l" indent="0" marL="0">
+                      <a:pPr marL="0" indent="0" algn="l">
                         <a:buNone/>
                       </a:pPr>
                       <a:r>
@@ -4732,20 +4612,20 @@
                           <a:solidFill>
                             <a:srgbClr val="1F4E9C"/>
                           </a:solidFill>
-                          <a:latin typeface="微软雅黑" pitchFamily="34" charset="0"/>
-                          <a:ea typeface="微软雅黑" pitchFamily="34" charset="-122"/>
-                          <a:cs typeface="微软雅黑" pitchFamily="34" charset="-120"/>
+                          <a:latin typeface="微软雅黑" panose="020B0503020204020204" pitchFamily="34" charset="-122"/>
+                          <a:ea typeface="微软雅黑" panose="020B0503020204020204" pitchFamily="34" charset="-122"/>
+                          <a:cs typeface="微软雅黑" panose="020B0503020204020204" pitchFamily="34" charset="-120"/>
                         </a:rPr>
                         <a:t>题号</a:t>
                       </a:r>
                       <a:endParaRPr lang="en-US" sz="1500" dirty="0">
-                        <a:latin typeface="微软雅黑" charset="0"/>
-                        <a:ea typeface="微软雅黑" charset="0"/>
-                        <a:cs typeface="微软雅黑" charset="0"/>
+                        <a:latin typeface="微软雅黑" panose="020B0503020204020204" pitchFamily="34" charset="-122"/>
+                        <a:ea typeface="微软雅黑" panose="020B0503020204020204" pitchFamily="34" charset="-122"/>
+                        <a:cs typeface="微软雅黑" panose="020B0503020204020204" pitchFamily="34" charset="-122"/>
                       </a:endParaRPr>
                     </a:p>
                   </a:txBody>
-                  <a:tcPr marL="91440" marR="91440" marT="45720" marB="45720" anchor="ctr">
+                  <a:tcPr anchor="ctr">
                     <a:lnL w="9525" cap="flat" cmpd="sng" algn="ctr">
                       <a:solidFill>
                         <a:srgbClr val="D8DBE0"/>
@@ -4792,7 +4672,7 @@
                     <a:bodyPr/>
                     <a:lstStyle/>
                     <a:p>
-                      <a:pPr algn="l" indent="0" marL="0">
+                      <a:pPr marL="0" indent="0" algn="l">
                         <a:buNone/>
                       </a:pPr>
                       <a:r>
@@ -4800,20 +4680,20 @@
                           <a:solidFill>
                             <a:srgbClr val="1F4E9C"/>
                           </a:solidFill>
-                          <a:latin typeface="微软雅黑" pitchFamily="34" charset="0"/>
-                          <a:ea typeface="微软雅黑" pitchFamily="34" charset="-122"/>
-                          <a:cs typeface="微软雅黑" pitchFamily="34" charset="-120"/>
+                          <a:latin typeface="微软雅黑" panose="020B0503020204020204" pitchFamily="34" charset="-122"/>
+                          <a:ea typeface="微软雅黑" panose="020B0503020204020204" pitchFamily="34" charset="-122"/>
+                          <a:cs typeface="微软雅黑" panose="020B0503020204020204" pitchFamily="34" charset="-120"/>
                         </a:rPr>
                         <a:t>考点</a:t>
                       </a:r>
                       <a:endParaRPr lang="en-US" sz="1500" dirty="0">
-                        <a:latin typeface="微软雅黑" charset="0"/>
-                        <a:ea typeface="微软雅黑" charset="0"/>
-                        <a:cs typeface="微软雅黑" charset="0"/>
+                        <a:latin typeface="微软雅黑" panose="020B0503020204020204" pitchFamily="34" charset="-122"/>
+                        <a:ea typeface="微软雅黑" panose="020B0503020204020204" pitchFamily="34" charset="-122"/>
+                        <a:cs typeface="微软雅黑" panose="020B0503020204020204" pitchFamily="34" charset="-122"/>
                       </a:endParaRPr>
                     </a:p>
                   </a:txBody>
-                  <a:tcPr marL="91440" marR="91440" marT="45720" marB="45720" anchor="ctr">
+                  <a:tcPr anchor="ctr">
                     <a:lnL w="9525" cap="flat" cmpd="sng" algn="ctr">
                       <a:solidFill>
                         <a:srgbClr val="D8DBE0"/>
@@ -4860,7 +4740,7 @@
                     <a:bodyPr/>
                     <a:lstStyle/>
                     <a:p>
-                      <a:pPr algn="l" indent="0" marL="0">
+                      <a:pPr marL="0" indent="0" algn="l">
                         <a:buNone/>
                       </a:pPr>
                       <a:r>
@@ -4868,20 +4748,20 @@
                           <a:solidFill>
                             <a:srgbClr val="1F4E9C"/>
                           </a:solidFill>
-                          <a:latin typeface="微软雅黑" pitchFamily="34" charset="0"/>
-                          <a:ea typeface="微软雅黑" pitchFamily="34" charset="-122"/>
-                          <a:cs typeface="微软雅黑" pitchFamily="34" charset="-120"/>
+                          <a:latin typeface="微软雅黑" panose="020B0503020204020204" pitchFamily="34" charset="-122"/>
+                          <a:ea typeface="微软雅黑" panose="020B0503020204020204" pitchFamily="34" charset="-122"/>
+                          <a:cs typeface="微软雅黑" panose="020B0503020204020204" pitchFamily="34" charset="-120"/>
                         </a:rPr>
                         <a:t>价值</a:t>
                       </a:r>
                       <a:endParaRPr lang="en-US" sz="1500" dirty="0">
-                        <a:latin typeface="微软雅黑" charset="0"/>
-                        <a:ea typeface="微软雅黑" charset="0"/>
-                        <a:cs typeface="微软雅黑" charset="0"/>
+                        <a:latin typeface="微软雅黑" panose="020B0503020204020204" pitchFamily="34" charset="-122"/>
+                        <a:ea typeface="微软雅黑" panose="020B0503020204020204" pitchFamily="34" charset="-122"/>
+                        <a:cs typeface="微软雅黑" panose="020B0503020204020204" pitchFamily="34" charset="-122"/>
                       </a:endParaRPr>
                     </a:p>
                   </a:txBody>
-                  <a:tcPr marL="91440" marR="91440" marT="45720" marB="45720" anchor="ctr">
+                  <a:tcPr anchor="ctr">
                     <a:lnL w="9525" cap="flat" cmpd="sng" algn="ctr">
                       <a:solidFill>
                         <a:srgbClr val="D8DBE0"/>
@@ -4930,7 +4810,7 @@
                     <a:bodyPr/>
                     <a:lstStyle/>
                     <a:p>
-                      <a:pPr algn="l" indent="0" marL="0">
+                      <a:pPr marL="0" indent="0" algn="l">
                         <a:buNone/>
                       </a:pPr>
                       <a:r>
@@ -4938,20 +4818,20 @@
                           <a:solidFill>
                             <a:srgbClr val="1F2329"/>
                           </a:solidFill>
-                          <a:latin typeface="微软雅黑" pitchFamily="34" charset="0"/>
-                          <a:ea typeface="微软雅黑" pitchFamily="34" charset="-122"/>
-                          <a:cs typeface="微软雅黑" pitchFamily="34" charset="-120"/>
+                          <a:latin typeface="微软雅黑" panose="020B0503020204020204" pitchFamily="34" charset="-122"/>
+                          <a:ea typeface="微软雅黑" panose="020B0503020204020204" pitchFamily="34" charset="-122"/>
+                          <a:cs typeface="微软雅黑" panose="020B0503020204020204" pitchFamily="34" charset="-120"/>
                         </a:rPr>
                         <a:t>7选27</a:t>
                       </a:r>
                       <a:endParaRPr lang="en-US" sz="1500" dirty="0">
-                        <a:latin typeface="微软雅黑" charset="0"/>
-                        <a:ea typeface="微软雅黑" charset="0"/>
-                        <a:cs typeface="微软雅黑" charset="0"/>
+                        <a:latin typeface="微软雅黑" panose="020B0503020204020204" pitchFamily="34" charset="-122"/>
+                        <a:ea typeface="微软雅黑" panose="020B0503020204020204" pitchFamily="34" charset="-122"/>
+                        <a:cs typeface="微软雅黑" panose="020B0503020204020204" pitchFamily="34" charset="-122"/>
                       </a:endParaRPr>
                     </a:p>
                   </a:txBody>
-                  <a:tcPr marL="91440" marR="91440" marT="45720" marB="45720" anchor="ctr">
+                  <a:tcPr anchor="ctr">
                     <a:lnL w="9525" cap="flat" cmpd="sng" algn="ctr">
                       <a:solidFill>
                         <a:srgbClr val="D8DBE0"/>
@@ -4998,7 +4878,7 @@
                     <a:bodyPr/>
                     <a:lstStyle/>
                     <a:p>
-                      <a:pPr algn="l" indent="0" marL="0">
+                      <a:pPr marL="0" indent="0" algn="l">
                         <a:buNone/>
                       </a:pPr>
                       <a:r>
@@ -5006,20 +4886,20 @@
                           <a:solidFill>
                             <a:srgbClr val="1F2329"/>
                           </a:solidFill>
-                          <a:latin typeface="微软雅黑" pitchFamily="34" charset="0"/>
-                          <a:ea typeface="微软雅黑" pitchFamily="34" charset="-122"/>
-                          <a:cs typeface="微软雅黑" pitchFamily="34" charset="-120"/>
+                          <a:latin typeface="微软雅黑" panose="020B0503020204020204" pitchFamily="34" charset="-122"/>
+                          <a:ea typeface="微软雅黑" panose="020B0503020204020204" pitchFamily="34" charset="-122"/>
+                          <a:cs typeface="微软雅黑" panose="020B0503020204020204" pitchFamily="34" charset="-120"/>
                         </a:rPr>
                         <a:t>最短路径手算</a:t>
                       </a:r>
                       <a:endParaRPr lang="en-US" sz="1500" dirty="0">
-                        <a:latin typeface="微软雅黑" charset="0"/>
-                        <a:ea typeface="微软雅黑" charset="0"/>
-                        <a:cs typeface="微软雅黑" charset="0"/>
+                        <a:latin typeface="微软雅黑" panose="020B0503020204020204" pitchFamily="34" charset="-122"/>
+                        <a:ea typeface="微软雅黑" panose="020B0503020204020204" pitchFamily="34" charset="-122"/>
+                        <a:cs typeface="微软雅黑" panose="020B0503020204020204" pitchFamily="34" charset="-122"/>
                       </a:endParaRPr>
                     </a:p>
                   </a:txBody>
-                  <a:tcPr marL="91440" marR="91440" marT="45720" marB="45720" anchor="ctr">
+                  <a:tcPr anchor="ctr">
                     <a:lnL w="9525" cap="flat" cmpd="sng" algn="ctr">
                       <a:solidFill>
                         <a:srgbClr val="D8DBE0"/>
@@ -5066,7 +4946,7 @@
                     <a:bodyPr/>
                     <a:lstStyle/>
                     <a:p>
-                      <a:pPr algn="l" indent="0" marL="0">
+                      <a:pPr marL="0" indent="0" algn="l">
                         <a:buNone/>
                       </a:pPr>
                       <a:r>
@@ -5074,20 +4954,20 @@
                           <a:solidFill>
                             <a:srgbClr val="1F2329"/>
                           </a:solidFill>
-                          <a:latin typeface="微软雅黑" pitchFamily="34" charset="0"/>
-                          <a:ea typeface="微软雅黑" pitchFamily="34" charset="-122"/>
-                          <a:cs typeface="微软雅黑" pitchFamily="34" charset="-120"/>
+                          <a:latin typeface="微软雅黑" panose="020B0503020204020204" pitchFamily="34" charset="-122"/>
+                          <a:ea typeface="微软雅黑" panose="020B0503020204020204" pitchFamily="34" charset="-122"/>
+                          <a:cs typeface="微软雅黑" panose="020B0503020204020204" pitchFamily="34" charset="-120"/>
                         </a:rPr>
                         <a:t>给图选最短路径，Dijkstra手算（2026综合21）前置</a:t>
                       </a:r>
                       <a:endParaRPr lang="en-US" sz="1500" dirty="0">
-                        <a:latin typeface="微软雅黑" charset="0"/>
-                        <a:ea typeface="微软雅黑" charset="0"/>
-                        <a:cs typeface="微软雅黑" charset="0"/>
+                        <a:latin typeface="微软雅黑" panose="020B0503020204020204" pitchFamily="34" charset="-122"/>
+                        <a:ea typeface="微软雅黑" panose="020B0503020204020204" pitchFamily="34" charset="-122"/>
+                        <a:cs typeface="微软雅黑" panose="020B0503020204020204" pitchFamily="34" charset="-122"/>
                       </a:endParaRPr>
                     </a:p>
                   </a:txBody>
-                  <a:tcPr marL="91440" marR="91440" marT="45720" marB="45720" anchor="ctr">
+                  <a:tcPr anchor="ctr">
                     <a:lnL w="9525" cap="flat" cmpd="sng" algn="ctr">
                       <a:solidFill>
                         <a:srgbClr val="D8DBE0"/>
@@ -5136,7 +5016,7 @@
                     <a:bodyPr/>
                     <a:lstStyle/>
                     <a:p>
-                      <a:pPr algn="l" indent="0" marL="0">
+                      <a:pPr marL="0" indent="0" algn="l">
                         <a:buNone/>
                       </a:pPr>
                       <a:r>
@@ -5144,20 +5024,20 @@
                           <a:solidFill>
                             <a:srgbClr val="1F2329"/>
                           </a:solidFill>
-                          <a:latin typeface="微软雅黑" pitchFamily="34" charset="0"/>
-                          <a:ea typeface="微软雅黑" pitchFamily="34" charset="-122"/>
-                          <a:cs typeface="微软雅黑" pitchFamily="34" charset="-120"/>
+                          <a:latin typeface="微软雅黑" panose="020B0503020204020204" pitchFamily="34" charset="-122"/>
+                          <a:ea typeface="微软雅黑" panose="020B0503020204020204" pitchFamily="34" charset="-122"/>
+                          <a:cs typeface="微软雅黑" panose="020B0503020204020204" pitchFamily="34" charset="-120"/>
                         </a:rPr>
                         <a:t>7选28</a:t>
                       </a:r>
                       <a:endParaRPr lang="en-US" sz="1500" dirty="0">
-                        <a:latin typeface="微软雅黑" charset="0"/>
-                        <a:ea typeface="微软雅黑" charset="0"/>
-                        <a:cs typeface="微软雅黑" charset="0"/>
+                        <a:latin typeface="微软雅黑" panose="020B0503020204020204" pitchFamily="34" charset="-122"/>
+                        <a:ea typeface="微软雅黑" panose="020B0503020204020204" pitchFamily="34" charset="-122"/>
+                        <a:cs typeface="微软雅黑" panose="020B0503020204020204" pitchFamily="34" charset="-122"/>
                       </a:endParaRPr>
                     </a:p>
                   </a:txBody>
-                  <a:tcPr marL="91440" marR="91440" marT="45720" marB="45720" anchor="ctr">
+                  <a:tcPr anchor="ctr">
                     <a:lnL w="9525" cap="flat" cmpd="sng" algn="ctr">
                       <a:solidFill>
                         <a:srgbClr val="D8DBE0"/>
@@ -5204,7 +5084,7 @@
                     <a:bodyPr/>
                     <a:lstStyle/>
                     <a:p>
-                      <a:pPr algn="l" indent="0" marL="0">
+                      <a:pPr marL="0" indent="0" algn="l">
                         <a:buNone/>
                       </a:pPr>
                       <a:r>
@@ -5212,20 +5092,20 @@
                           <a:solidFill>
                             <a:srgbClr val="1F2329"/>
                           </a:solidFill>
-                          <a:latin typeface="微软雅黑" pitchFamily="34" charset="0"/>
-                          <a:ea typeface="微软雅黑" pitchFamily="34" charset="-122"/>
-                          <a:cs typeface="微软雅黑" pitchFamily="34" charset="-120"/>
+                          <a:latin typeface="微软雅黑" panose="020B0503020204020204" pitchFamily="34" charset="-122"/>
+                          <a:ea typeface="微软雅黑" panose="020B0503020204020204" pitchFamily="34" charset="-122"/>
+                          <a:cs typeface="微软雅黑" panose="020B0503020204020204" pitchFamily="34" charset="-120"/>
                         </a:rPr>
                         <a:t>拓扑序列个数</a:t>
                       </a:r>
                       <a:endParaRPr lang="en-US" sz="1500" dirty="0">
-                        <a:latin typeface="微软雅黑" charset="0"/>
-                        <a:ea typeface="微软雅黑" charset="0"/>
-                        <a:cs typeface="微软雅黑" charset="0"/>
+                        <a:latin typeface="微软雅黑" panose="020B0503020204020204" pitchFamily="34" charset="-122"/>
+                        <a:ea typeface="微软雅黑" panose="020B0503020204020204" pitchFamily="34" charset="-122"/>
+                        <a:cs typeface="微软雅黑" panose="020B0503020204020204" pitchFamily="34" charset="-122"/>
                       </a:endParaRPr>
                     </a:p>
                   </a:txBody>
-                  <a:tcPr marL="91440" marR="91440" marT="45720" marB="45720" anchor="ctr">
+                  <a:tcPr anchor="ctr">
                     <a:lnL w="9525" cap="flat" cmpd="sng" algn="ctr">
                       <a:solidFill>
                         <a:srgbClr val="D8DBE0"/>
@@ -5272,7 +5152,7 @@
                     <a:bodyPr/>
                     <a:lstStyle/>
                     <a:p>
-                      <a:pPr algn="l" indent="0" marL="0">
+                      <a:pPr marL="0" indent="0" algn="l">
                         <a:buNone/>
                       </a:pPr>
                       <a:r>
@@ -5280,20 +5160,20 @@
                           <a:solidFill>
                             <a:srgbClr val="1F2329"/>
                           </a:solidFill>
-                          <a:latin typeface="微软雅黑" pitchFamily="34" charset="0"/>
-                          <a:ea typeface="微软雅黑" pitchFamily="34" charset="-122"/>
-                          <a:cs typeface="微软雅黑" pitchFamily="34" charset="-120"/>
+                          <a:latin typeface="微软雅黑" panose="020B0503020204020204" pitchFamily="34" charset="-122"/>
+                          <a:ea typeface="微软雅黑" panose="020B0503020204020204" pitchFamily="34" charset="-122"/>
+                          <a:cs typeface="微软雅黑" panose="020B0503020204020204" pitchFamily="34" charset="-120"/>
                         </a:rPr>
                         <a:t>给图数拓扑序列，拓扑排序高频（2026算法26验证拓扑序列）前置</a:t>
                       </a:r>
                       <a:endParaRPr lang="en-US" sz="1500" dirty="0">
-                        <a:latin typeface="微软雅黑" charset="0"/>
-                        <a:ea typeface="微软雅黑" charset="0"/>
-                        <a:cs typeface="微软雅黑" charset="0"/>
+                        <a:latin typeface="微软雅黑" panose="020B0503020204020204" pitchFamily="34" charset="-122"/>
+                        <a:ea typeface="微软雅黑" panose="020B0503020204020204" pitchFamily="34" charset="-122"/>
+                        <a:cs typeface="微软雅黑" panose="020B0503020204020204" pitchFamily="34" charset="-122"/>
                       </a:endParaRPr>
                     </a:p>
                   </a:txBody>
-                  <a:tcPr marL="91440" marR="91440" marT="45720" marB="45720" anchor="ctr">
+                  <a:tcPr anchor="ctr">
                     <a:lnL w="9525" cap="flat" cmpd="sng" algn="ctr">
                       <a:solidFill>
                         <a:srgbClr val="D8DBE0"/>
@@ -5342,7 +5222,7 @@
                     <a:bodyPr/>
                     <a:lstStyle/>
                     <a:p>
-                      <a:pPr algn="l" indent="0" marL="0">
+                      <a:pPr marL="0" indent="0" algn="l">
                         <a:buNone/>
                       </a:pPr>
                       <a:r>
@@ -5350,20 +5230,20 @@
                           <a:solidFill>
                             <a:srgbClr val="1F2329"/>
                           </a:solidFill>
-                          <a:latin typeface="微软雅黑" pitchFamily="34" charset="0"/>
-                          <a:ea typeface="微软雅黑" pitchFamily="34" charset="-122"/>
-                          <a:cs typeface="微软雅黑" pitchFamily="34" charset="-120"/>
+                          <a:latin typeface="微软雅黑" panose="020B0503020204020204" pitchFamily="34" charset="-122"/>
+                          <a:ea typeface="微软雅黑" panose="020B0503020204020204" pitchFamily="34" charset="-122"/>
+                          <a:cs typeface="微软雅黑" panose="020B0503020204020204" pitchFamily="34" charset="-120"/>
                         </a:rPr>
                         <a:t>7答4</a:t>
                       </a:r>
                       <a:endParaRPr lang="en-US" sz="1500" dirty="0">
-                        <a:latin typeface="微软雅黑" charset="0"/>
-                        <a:ea typeface="微软雅黑" charset="0"/>
-                        <a:cs typeface="微软雅黑" charset="0"/>
+                        <a:latin typeface="微软雅黑" panose="020B0503020204020204" pitchFamily="34" charset="-122"/>
+                        <a:ea typeface="微软雅黑" panose="020B0503020204020204" pitchFamily="34" charset="-122"/>
+                        <a:cs typeface="微软雅黑" panose="020B0503020204020204" pitchFamily="34" charset="-122"/>
                       </a:endParaRPr>
                     </a:p>
                   </a:txBody>
-                  <a:tcPr marL="91440" marR="91440" marT="45720" marB="45720" anchor="ctr">
+                  <a:tcPr anchor="ctr">
                     <a:lnL w="9525" cap="flat" cmpd="sng" algn="ctr">
                       <a:solidFill>
                         <a:srgbClr val="D8DBE0"/>
@@ -5410,7 +5290,7 @@
                     <a:bodyPr/>
                     <a:lstStyle/>
                     <a:p>
-                      <a:pPr algn="l" indent="0" marL="0">
+                      <a:pPr marL="0" indent="0" algn="l">
                         <a:buNone/>
                       </a:pPr>
                       <a:r>
@@ -5418,20 +5298,20 @@
                           <a:solidFill>
                             <a:srgbClr val="1F2329"/>
                           </a:solidFill>
-                          <a:latin typeface="微软雅黑" pitchFamily="34" charset="0"/>
-                          <a:ea typeface="微软雅黑" pitchFamily="34" charset="-122"/>
-                          <a:cs typeface="微软雅黑" pitchFamily="34" charset="-120"/>
+                          <a:latin typeface="微软雅黑" panose="020B0503020204020204" pitchFamily="34" charset="-122"/>
+                          <a:ea typeface="微软雅黑" panose="020B0503020204020204" pitchFamily="34" charset="-122"/>
+                          <a:cs typeface="微软雅黑" panose="020B0503020204020204" pitchFamily="34" charset="-120"/>
                         </a:rPr>
                         <a:t>广度优先生成森林</a:t>
                       </a:r>
                       <a:endParaRPr lang="en-US" sz="1500" dirty="0">
-                        <a:latin typeface="微软雅黑" charset="0"/>
-                        <a:ea typeface="微软雅黑" charset="0"/>
-                        <a:cs typeface="微软雅黑" charset="0"/>
+                        <a:latin typeface="微软雅黑" panose="020B0503020204020204" pitchFamily="34" charset="-122"/>
+                        <a:ea typeface="微软雅黑" panose="020B0503020204020204" pitchFamily="34" charset="-122"/>
+                        <a:cs typeface="微软雅黑" panose="020B0503020204020204" pitchFamily="34" charset="-122"/>
                       </a:endParaRPr>
                     </a:p>
                   </a:txBody>
-                  <a:tcPr marL="91440" marR="91440" marT="45720" marB="45720" anchor="ctr">
+                  <a:tcPr anchor="ctr">
                     <a:lnL w="9525" cap="flat" cmpd="sng" algn="ctr">
                       <a:solidFill>
                         <a:srgbClr val="D8DBE0"/>
@@ -5478,7 +5358,7 @@
                     <a:bodyPr/>
                     <a:lstStyle/>
                     <a:p>
-                      <a:pPr algn="l" indent="0" marL="0">
+                      <a:pPr marL="0" indent="0" algn="l">
                         <a:buNone/>
                       </a:pPr>
                       <a:r>
@@ -5486,20 +5366,20 @@
                           <a:solidFill>
                             <a:srgbClr val="1F2329"/>
                           </a:solidFill>
-                          <a:latin typeface="微软雅黑" pitchFamily="34" charset="0"/>
-                          <a:ea typeface="微软雅黑" pitchFamily="34" charset="-122"/>
-                          <a:cs typeface="微软雅黑" pitchFamily="34" charset="-120"/>
+                          <a:latin typeface="微软雅黑" panose="020B0503020204020204" pitchFamily="34" charset="-122"/>
+                          <a:ea typeface="微软雅黑" panose="020B0503020204020204" pitchFamily="34" charset="-122"/>
+                          <a:cs typeface="微软雅黑" panose="020B0503020204020204" pitchFamily="34" charset="-120"/>
                         </a:rPr>
                         <a:t>画BFS生成森林，生成树理解（2026阅读1 DFS生成树族）</a:t>
                       </a:r>
                       <a:endParaRPr lang="en-US" sz="1500" dirty="0">
-                        <a:latin typeface="微软雅黑" charset="0"/>
-                        <a:ea typeface="微软雅黑" charset="0"/>
-                        <a:cs typeface="微软雅黑" charset="0"/>
+                        <a:latin typeface="微软雅黑" panose="020B0503020204020204" pitchFamily="34" charset="-122"/>
+                        <a:ea typeface="微软雅黑" panose="020B0503020204020204" pitchFamily="34" charset="-122"/>
+                        <a:cs typeface="微软雅黑" panose="020B0503020204020204" pitchFamily="34" charset="-122"/>
                       </a:endParaRPr>
                     </a:p>
                   </a:txBody>
-                  <a:tcPr marL="91440" marR="91440" marT="45720" marB="45720" anchor="ctr">
+                  <a:tcPr anchor="ctr">
                     <a:lnL w="9525" cap="flat" cmpd="sng" algn="ctr">
                       <a:solidFill>
                         <a:srgbClr val="D8DBE0"/>
@@ -5548,7 +5428,7 @@
                     <a:bodyPr/>
                     <a:lstStyle/>
                     <a:p>
-                      <a:pPr algn="l" indent="0" marL="0">
+                      <a:pPr marL="0" indent="0" algn="l">
                         <a:buNone/>
                       </a:pPr>
                       <a:r>
@@ -5556,20 +5436,20 @@
                           <a:solidFill>
                             <a:srgbClr val="1F2329"/>
                           </a:solidFill>
-                          <a:latin typeface="微软雅黑" pitchFamily="34" charset="0"/>
-                          <a:ea typeface="微软雅黑" pitchFamily="34" charset="-122"/>
-                          <a:cs typeface="微软雅黑" pitchFamily="34" charset="-120"/>
+                          <a:latin typeface="微软雅黑" panose="020B0503020204020204" pitchFamily="34" charset="-122"/>
+                          <a:ea typeface="微软雅黑" panose="020B0503020204020204" pitchFamily="34" charset="-122"/>
+                          <a:cs typeface="微软雅黑" panose="020B0503020204020204" pitchFamily="34" charset="-120"/>
                         </a:rPr>
                         <a:t>7答5</a:t>
                       </a:r>
                       <a:endParaRPr lang="en-US" sz="1500" dirty="0">
-                        <a:latin typeface="微软雅黑" charset="0"/>
-                        <a:ea typeface="微软雅黑" charset="0"/>
-                        <a:cs typeface="微软雅黑" charset="0"/>
+                        <a:latin typeface="微软雅黑" panose="020B0503020204020204" pitchFamily="34" charset="-122"/>
+                        <a:ea typeface="微软雅黑" panose="020B0503020204020204" pitchFamily="34" charset="-122"/>
+                        <a:cs typeface="微软雅黑" panose="020B0503020204020204" pitchFamily="34" charset="-122"/>
                       </a:endParaRPr>
                     </a:p>
                   </a:txBody>
-                  <a:tcPr marL="91440" marR="91440" marT="45720" marB="45720" anchor="ctr">
+                  <a:tcPr anchor="ctr">
                     <a:lnL w="9525" cap="flat" cmpd="sng" algn="ctr">
                       <a:solidFill>
                         <a:srgbClr val="D8DBE0"/>
@@ -5616,7 +5496,7 @@
                     <a:bodyPr/>
                     <a:lstStyle/>
                     <a:p>
-                      <a:pPr algn="l" indent="0" marL="0">
+                      <a:pPr marL="0" indent="0" algn="l">
                         <a:buNone/>
                       </a:pPr>
                       <a:r>
@@ -5624,20 +5504,20 @@
                           <a:solidFill>
                             <a:srgbClr val="1F2329"/>
                           </a:solidFill>
-                          <a:latin typeface="微软雅黑" pitchFamily="34" charset="0"/>
-                          <a:ea typeface="微软雅黑" pitchFamily="34" charset="-122"/>
-                          <a:cs typeface="微软雅黑" pitchFamily="34" charset="-120"/>
+                          <a:latin typeface="微软雅黑" panose="020B0503020204020204" pitchFamily="34" charset="-122"/>
+                          <a:ea typeface="微软雅黑" panose="020B0503020204020204" pitchFamily="34" charset="-122"/>
+                          <a:cs typeface="微软雅黑" panose="020B0503020204020204" pitchFamily="34" charset="-120"/>
                         </a:rPr>
                         <a:t>DFS/BFS生成树</a:t>
                       </a:r>
                       <a:endParaRPr lang="en-US" sz="1500" dirty="0">
-                        <a:latin typeface="微软雅黑" charset="0"/>
-                        <a:ea typeface="微软雅黑" charset="0"/>
-                        <a:cs typeface="微软雅黑" charset="0"/>
+                        <a:latin typeface="微软雅黑" panose="020B0503020204020204" pitchFamily="34" charset="-122"/>
+                        <a:ea typeface="微软雅黑" panose="020B0503020204020204" pitchFamily="34" charset="-122"/>
+                        <a:cs typeface="微软雅黑" panose="020B0503020204020204" pitchFamily="34" charset="-122"/>
                       </a:endParaRPr>
                     </a:p>
                   </a:txBody>
-                  <a:tcPr marL="91440" marR="91440" marT="45720" marB="45720" anchor="ctr">
+                  <a:tcPr anchor="ctr">
                     <a:lnL w="9525" cap="flat" cmpd="sng" algn="ctr">
                       <a:solidFill>
                         <a:srgbClr val="D8DBE0"/>
@@ -5684,7 +5564,7 @@
                     <a:bodyPr/>
                     <a:lstStyle/>
                     <a:p>
-                      <a:pPr algn="l" indent="0" marL="0">
+                      <a:pPr marL="0" indent="0" algn="l">
                         <a:buNone/>
                       </a:pPr>
                       <a:r>
@@ -5692,20 +5572,20 @@
                           <a:solidFill>
                             <a:srgbClr val="1F2329"/>
                           </a:solidFill>
-                          <a:latin typeface="微软雅黑" pitchFamily="34" charset="0"/>
-                          <a:ea typeface="微软雅黑" pitchFamily="34" charset="-122"/>
-                          <a:cs typeface="微软雅黑" pitchFamily="34" charset="-120"/>
+                          <a:latin typeface="微软雅黑" panose="020B0503020204020204" pitchFamily="34" charset="-122"/>
+                          <a:ea typeface="微软雅黑" panose="020B0503020204020204" pitchFamily="34" charset="-122"/>
+                          <a:cs typeface="微软雅黑" panose="020B0503020204020204" pitchFamily="34" charset="-120"/>
                         </a:rPr>
                         <a:t>邻接矩阵画两种生成树，2026阅读1（DFS生成树代码）配套</a:t>
                       </a:r>
                       <a:endParaRPr lang="en-US" sz="1500" dirty="0">
-                        <a:latin typeface="微软雅黑" charset="0"/>
-                        <a:ea typeface="微软雅黑" charset="0"/>
-                        <a:cs typeface="微软雅黑" charset="0"/>
+                        <a:latin typeface="微软雅黑" panose="020B0503020204020204" pitchFamily="34" charset="-122"/>
+                        <a:ea typeface="微软雅黑" panose="020B0503020204020204" pitchFamily="34" charset="-122"/>
+                        <a:cs typeface="微软雅黑" panose="020B0503020204020204" pitchFamily="34" charset="-122"/>
                       </a:endParaRPr>
                     </a:p>
                   </a:txBody>
-                  <a:tcPr marL="91440" marR="91440" marT="45720" marB="45720" anchor="ctr">
+                  <a:tcPr anchor="ctr">
                     <a:lnL w="9525" cap="flat" cmpd="sng" algn="ctr">
                       <a:solidFill>
                         <a:srgbClr val="D8DBE0"/>
@@ -5754,7 +5634,7 @@
                     <a:bodyPr/>
                     <a:lstStyle/>
                     <a:p>
-                      <a:pPr algn="l" indent="0" marL="0">
+                      <a:pPr marL="0" indent="0" algn="l">
                         <a:buNone/>
                       </a:pPr>
                       <a:r>
@@ -5762,20 +5642,20 @@
                           <a:solidFill>
                             <a:srgbClr val="1F2329"/>
                           </a:solidFill>
-                          <a:latin typeface="微软雅黑" pitchFamily="34" charset="0"/>
-                          <a:ea typeface="微软雅黑" pitchFamily="34" charset="-122"/>
-                          <a:cs typeface="微软雅黑" pitchFamily="34" charset="-120"/>
+                          <a:latin typeface="微软雅黑" panose="020B0503020204020204" pitchFamily="34" charset="-122"/>
+                          <a:ea typeface="微软雅黑" panose="020B0503020204020204" pitchFamily="34" charset="-122"/>
+                          <a:cs typeface="微软雅黑" panose="020B0503020204020204" pitchFamily="34" charset="-120"/>
                         </a:rPr>
                         <a:t>7答7</a:t>
                       </a:r>
                       <a:endParaRPr lang="en-US" sz="1500" dirty="0">
-                        <a:latin typeface="微软雅黑" charset="0"/>
-                        <a:ea typeface="微软雅黑" charset="0"/>
-                        <a:cs typeface="微软雅黑" charset="0"/>
+                        <a:latin typeface="微软雅黑" panose="020B0503020204020204" pitchFamily="34" charset="-122"/>
+                        <a:ea typeface="微软雅黑" panose="020B0503020204020204" pitchFamily="34" charset="-122"/>
+                        <a:cs typeface="微软雅黑" panose="020B0503020204020204" pitchFamily="34" charset="-122"/>
                       </a:endParaRPr>
                     </a:p>
                   </a:txBody>
-                  <a:tcPr marL="91440" marR="91440" marT="45720" marB="45720" anchor="ctr">
+                  <a:tcPr anchor="ctr">
                     <a:lnL w="9525" cap="flat" cmpd="sng" algn="ctr">
                       <a:solidFill>
                         <a:srgbClr val="D8DBE0"/>
@@ -5822,7 +5702,7 @@
                     <a:bodyPr/>
                     <a:lstStyle/>
                     <a:p>
-                      <a:pPr algn="l" indent="0" marL="0">
+                      <a:pPr marL="0" indent="0" algn="l">
                         <a:buNone/>
                       </a:pPr>
                       <a:r>
@@ -5830,20 +5710,20 @@
                           <a:solidFill>
                             <a:srgbClr val="1F2329"/>
                           </a:solidFill>
-                          <a:latin typeface="微软雅黑" pitchFamily="34" charset="0"/>
-                          <a:ea typeface="微软雅黑" pitchFamily="34" charset="-122"/>
-                          <a:cs typeface="微软雅黑" pitchFamily="34" charset="-120"/>
+                          <a:latin typeface="微软雅黑" panose="020B0503020204020204" pitchFamily="34" charset="-122"/>
+                          <a:ea typeface="微软雅黑" panose="020B0503020204020204" pitchFamily="34" charset="-122"/>
+                          <a:cs typeface="微软雅黑" panose="020B0503020204020204" pitchFamily="34" charset="-120"/>
                         </a:rPr>
                         <a:t>最小生成树手算</a:t>
                       </a:r>
                       <a:endParaRPr lang="en-US" sz="1500" dirty="0">
-                        <a:latin typeface="微软雅黑" charset="0"/>
-                        <a:ea typeface="微软雅黑" charset="0"/>
-                        <a:cs typeface="微软雅黑" charset="0"/>
+                        <a:latin typeface="微软雅黑" panose="020B0503020204020204" pitchFamily="34" charset="-122"/>
+                        <a:ea typeface="微软雅黑" panose="020B0503020204020204" pitchFamily="34" charset="-122"/>
+                        <a:cs typeface="微软雅黑" panose="020B0503020204020204" pitchFamily="34" charset="-122"/>
                       </a:endParaRPr>
                     </a:p>
                   </a:txBody>
-                  <a:tcPr marL="91440" marR="91440" marT="45720" marB="45720" anchor="ctr">
+                  <a:tcPr anchor="ctr">
                     <a:lnL w="9525" cap="flat" cmpd="sng" algn="ctr">
                       <a:solidFill>
                         <a:srgbClr val="D8DBE0"/>
@@ -5890,7 +5770,7 @@
                     <a:bodyPr/>
                     <a:lstStyle/>
                     <a:p>
-                      <a:pPr algn="l" indent="0" marL="0">
+                      <a:pPr marL="0" indent="0" algn="l">
                         <a:buNone/>
                       </a:pPr>
                       <a:r>
@@ -5898,20 +5778,20 @@
                           <a:solidFill>
                             <a:srgbClr val="1F2329"/>
                           </a:solidFill>
-                          <a:latin typeface="微软雅黑" pitchFamily="34" charset="0"/>
-                          <a:ea typeface="微软雅黑" pitchFamily="34" charset="-122"/>
-                          <a:cs typeface="微软雅黑" pitchFamily="34" charset="-120"/>
+                          <a:latin typeface="微软雅黑" panose="020B0503020204020204" pitchFamily="34" charset="-122"/>
+                          <a:ea typeface="微软雅黑" panose="020B0503020204020204" pitchFamily="34" charset="-122"/>
+                          <a:cs typeface="微软雅黑" panose="020B0503020204020204" pitchFamily="34" charset="-120"/>
                         </a:rPr>
                         <a:t>无向带权图求MST（Prim/Kruskal过程）</a:t>
                       </a:r>
                       <a:endParaRPr lang="en-US" sz="1500" dirty="0">
-                        <a:latin typeface="微软雅黑" charset="0"/>
-                        <a:ea typeface="微软雅黑" charset="0"/>
-                        <a:cs typeface="微软雅黑" charset="0"/>
+                        <a:latin typeface="微软雅黑" panose="020B0503020204020204" pitchFamily="34" charset="-122"/>
+                        <a:ea typeface="微软雅黑" panose="020B0503020204020204" pitchFamily="34" charset="-122"/>
+                        <a:cs typeface="微软雅黑" panose="020B0503020204020204" pitchFamily="34" charset="-122"/>
                       </a:endParaRPr>
                     </a:p>
                   </a:txBody>
-                  <a:tcPr marL="91440" marR="91440" marT="45720" marB="45720" anchor="ctr">
+                  <a:tcPr anchor="ctr">
                     <a:lnL w="9525" cap="flat" cmpd="sng" algn="ctr">
                       <a:solidFill>
                         <a:srgbClr val="D8DBE0"/>
@@ -5968,7 +5848,7 @@
 
 <file path=ppt/slides/slide5.xml><?xml version="1.0" encoding="utf-8"?>
 <p:sld xmlns:a="http://schemas.openxmlformats.org/drawingml/2006/main" xmlns:r="http://schemas.openxmlformats.org/officeDocument/2006/relationships" xmlns:p="http://schemas.openxmlformats.org/presentationml/2006/main">
-  <p:cSld name="Slide 5">
+  <p:cSld>
     <p:bg>
       <p:bgPr>
         <a:blipFill dpi="0" rotWithShape="1">
@@ -6012,13 +5892,12 @@
             <a:avLst/>
           </a:prstGeom>
           <a:noFill/>
-          <a:ln/>
         </p:spPr>
         <p:txBody>
           <a:bodyPr wrap="square" rtlCol="0" anchor="ctr"/>
           <a:lstStyle/>
           <a:p>
-            <a:pPr algn="r" indent="0" marL="0">
+            <a:pPr marL="0" indent="0" algn="r">
               <a:buNone/>
             </a:pPr>
             <a:r>
@@ -6026,9 +5905,9 @@
                 <a:solidFill>
                   <a:srgbClr val="8A9099"/>
                 </a:solidFill>
-                <a:latin typeface="微软雅黑" pitchFamily="34" charset="0"/>
-                <a:ea typeface="微软雅黑" pitchFamily="34" charset="-122"/>
-                <a:cs typeface="微软雅黑" pitchFamily="34" charset="-120"/>
+                <a:latin typeface="微软雅黑" panose="020B0503020204020204" pitchFamily="34" charset="-122"/>
+                <a:ea typeface="微软雅黑" panose="020B0503020204020204" pitchFamily="34" charset="-122"/>
+                <a:cs typeface="微软雅黑" panose="020B0503020204020204" pitchFamily="34" charset="-120"/>
               </a:rPr>
               <a:t>5 / 9</a:t>
             </a:r>
@@ -6051,13 +5930,12 @@
             <a:avLst/>
           </a:prstGeom>
           <a:noFill/>
-          <a:ln/>
         </p:spPr>
         <p:txBody>
           <a:bodyPr wrap="square" rtlCol="0" anchor="ctr"/>
           <a:lstStyle/>
           <a:p>
-            <a:pPr algn="l" indent="0" marL="0">
+            <a:pPr marL="0" indent="0" algn="l">
               <a:buNone/>
             </a:pPr>
             <a:r>
@@ -6065,9 +5943,9 @@
                 <a:solidFill>
                   <a:srgbClr val="1F4E9C"/>
                 </a:solidFill>
-                <a:latin typeface="微软雅黑" pitchFamily="34" charset="0"/>
-                <a:ea typeface="微软雅黑" pitchFamily="34" charset="-122"/>
-                <a:cs typeface="微软雅黑" pitchFamily="34" charset="-120"/>
+                <a:latin typeface="微软雅黑" panose="020B0503020204020204" pitchFamily="34" charset="-122"/>
+                <a:ea typeface="微软雅黑" panose="020B0503020204020204" pitchFamily="34" charset="-122"/>
+                <a:cs typeface="微软雅黑" panose="020B0503020204020204" pitchFamily="34" charset="-120"/>
               </a:rPr>
               <a:t>有价值必做</a:t>
             </a:r>
@@ -6090,13 +5968,12 @@
             <a:avLst/>
           </a:prstGeom>
           <a:noFill/>
-          <a:ln/>
         </p:spPr>
         <p:txBody>
           <a:bodyPr wrap="square" rtlCol="0" anchor="ctr"/>
           <a:lstStyle/>
           <a:p>
-            <a:pPr algn="l" indent="0" marL="0">
+            <a:pPr marL="0" indent="0" algn="l">
               <a:buNone/>
             </a:pPr>
             <a:r>
@@ -6104,9 +5981,9 @@
                 <a:solidFill>
                   <a:srgbClr val="1F2329"/>
                 </a:solidFill>
-                <a:latin typeface="微软雅黑" pitchFamily="34" charset="0"/>
-                <a:ea typeface="微软雅黑" pitchFamily="34" charset="-122"/>
-                <a:cs typeface="微软雅黑" pitchFamily="34" charset="-120"/>
+                <a:latin typeface="微软雅黑" panose="020B0503020204020204" pitchFamily="34" charset="-122"/>
+                <a:ea typeface="微软雅黑" panose="020B0503020204020204" pitchFamily="34" charset="-122"/>
+                <a:cs typeface="微软雅黑" panose="020B0503020204020204" pitchFamily="34" charset="-120"/>
               </a:rPr>
               <a:t>必做题（3/4）</a:t>
             </a:r>
@@ -6120,17 +5997,11 @@
           <p:cNvGraphicFramePr>
             <a:graphicFrameLocks noGrp="1"/>
           </p:cNvGraphicFramePr>
-          <p:nvPr>
-            <p:extLst>
-              <p:ext uri="{D42A27DB-BD31-4B8C-83A1-F6EECF244321}">
-                <p14:modId xmlns:p14="http://schemas.microsoft.com/office/powerpoint/2010/main" val="1579011935"/>
-              </p:ext>
-            </p:extLst>
-          </p:nvPr>
+          <p:nvPr/>
         </p:nvGraphicFramePr>
         <p:xfrm>
           <a:off x="822960" y="2395728"/>
-          <a:ext cx="10545775" cy="914400"/>
+          <a:ext cx="10545775" cy="2523744"/>
         </p:xfrm>
         <a:graphic>
           <a:graphicData uri="http://schemas.openxmlformats.org/drawingml/2006/table">
@@ -6147,7 +6018,7 @@
                     <a:bodyPr/>
                     <a:lstStyle/>
                     <a:p>
-                      <a:pPr algn="l" indent="0" marL="0">
+                      <a:pPr marL="0" indent="0" algn="l">
                         <a:buNone/>
                       </a:pPr>
                       <a:r>
@@ -6155,20 +6026,20 @@
                           <a:solidFill>
                             <a:srgbClr val="1F4E9C"/>
                           </a:solidFill>
-                          <a:latin typeface="微软雅黑" pitchFamily="34" charset="0"/>
-                          <a:ea typeface="微软雅黑" pitchFamily="34" charset="-122"/>
-                          <a:cs typeface="微软雅黑" pitchFamily="34" charset="-120"/>
+                          <a:latin typeface="微软雅黑" panose="020B0503020204020204" pitchFamily="34" charset="-122"/>
+                          <a:ea typeface="微软雅黑" panose="020B0503020204020204" pitchFamily="34" charset="-122"/>
+                          <a:cs typeface="微软雅黑" panose="020B0503020204020204" pitchFamily="34" charset="-120"/>
                         </a:rPr>
                         <a:t>题号</a:t>
                       </a:r>
                       <a:endParaRPr lang="en-US" sz="1500" dirty="0">
-                        <a:latin typeface="微软雅黑" charset="0"/>
-                        <a:ea typeface="微软雅黑" charset="0"/>
-                        <a:cs typeface="微软雅黑" charset="0"/>
+                        <a:latin typeface="微软雅黑" panose="020B0503020204020204" pitchFamily="34" charset="-122"/>
+                        <a:ea typeface="微软雅黑" panose="020B0503020204020204" pitchFamily="34" charset="-122"/>
+                        <a:cs typeface="微软雅黑" panose="020B0503020204020204" pitchFamily="34" charset="-122"/>
                       </a:endParaRPr>
                     </a:p>
                   </a:txBody>
-                  <a:tcPr marL="91440" marR="91440" marT="45720" marB="45720" anchor="ctr">
+                  <a:tcPr anchor="ctr">
                     <a:lnL w="9525" cap="flat" cmpd="sng" algn="ctr">
                       <a:solidFill>
                         <a:srgbClr val="D8DBE0"/>
@@ -6215,7 +6086,7 @@
                     <a:bodyPr/>
                     <a:lstStyle/>
                     <a:p>
-                      <a:pPr algn="l" indent="0" marL="0">
+                      <a:pPr marL="0" indent="0" algn="l">
                         <a:buNone/>
                       </a:pPr>
                       <a:r>
@@ -6223,20 +6094,20 @@
                           <a:solidFill>
                             <a:srgbClr val="1F4E9C"/>
                           </a:solidFill>
-                          <a:latin typeface="微软雅黑" pitchFamily="34" charset="0"/>
-                          <a:ea typeface="微软雅黑" pitchFamily="34" charset="-122"/>
-                          <a:cs typeface="微软雅黑" pitchFamily="34" charset="-120"/>
+                          <a:latin typeface="微软雅黑" panose="020B0503020204020204" pitchFamily="34" charset="-122"/>
+                          <a:ea typeface="微软雅黑" panose="020B0503020204020204" pitchFamily="34" charset="-122"/>
+                          <a:cs typeface="微软雅黑" panose="020B0503020204020204" pitchFamily="34" charset="-120"/>
                         </a:rPr>
                         <a:t>考点</a:t>
                       </a:r>
                       <a:endParaRPr lang="en-US" sz="1500" dirty="0">
-                        <a:latin typeface="微软雅黑" charset="0"/>
-                        <a:ea typeface="微软雅黑" charset="0"/>
-                        <a:cs typeface="微软雅黑" charset="0"/>
+                        <a:latin typeface="微软雅黑" panose="020B0503020204020204" pitchFamily="34" charset="-122"/>
+                        <a:ea typeface="微软雅黑" panose="020B0503020204020204" pitchFamily="34" charset="-122"/>
+                        <a:cs typeface="微软雅黑" panose="020B0503020204020204" pitchFamily="34" charset="-122"/>
                       </a:endParaRPr>
                     </a:p>
                   </a:txBody>
-                  <a:tcPr marL="91440" marR="91440" marT="45720" marB="45720" anchor="ctr">
+                  <a:tcPr anchor="ctr">
                     <a:lnL w="9525" cap="flat" cmpd="sng" algn="ctr">
                       <a:solidFill>
                         <a:srgbClr val="D8DBE0"/>
@@ -6283,7 +6154,7 @@
                     <a:bodyPr/>
                     <a:lstStyle/>
                     <a:p>
-                      <a:pPr algn="l" indent="0" marL="0">
+                      <a:pPr marL="0" indent="0" algn="l">
                         <a:buNone/>
                       </a:pPr>
                       <a:r>
@@ -6291,20 +6162,20 @@
                           <a:solidFill>
                             <a:srgbClr val="1F4E9C"/>
                           </a:solidFill>
-                          <a:latin typeface="微软雅黑" pitchFamily="34" charset="0"/>
-                          <a:ea typeface="微软雅黑" pitchFamily="34" charset="-122"/>
-                          <a:cs typeface="微软雅黑" pitchFamily="34" charset="-120"/>
+                          <a:latin typeface="微软雅黑" panose="020B0503020204020204" pitchFamily="34" charset="-122"/>
+                          <a:ea typeface="微软雅黑" panose="020B0503020204020204" pitchFamily="34" charset="-122"/>
+                          <a:cs typeface="微软雅黑" panose="020B0503020204020204" pitchFamily="34" charset="-120"/>
                         </a:rPr>
                         <a:t>价值</a:t>
                       </a:r>
                       <a:endParaRPr lang="en-US" sz="1500" dirty="0">
-                        <a:latin typeface="微软雅黑" charset="0"/>
-                        <a:ea typeface="微软雅黑" charset="0"/>
-                        <a:cs typeface="微软雅黑" charset="0"/>
+                        <a:latin typeface="微软雅黑" panose="020B0503020204020204" pitchFamily="34" charset="-122"/>
+                        <a:ea typeface="微软雅黑" panose="020B0503020204020204" pitchFamily="34" charset="-122"/>
+                        <a:cs typeface="微软雅黑" panose="020B0503020204020204" pitchFamily="34" charset="-122"/>
                       </a:endParaRPr>
                     </a:p>
                   </a:txBody>
-                  <a:tcPr marL="91440" marR="91440" marT="45720" marB="45720" anchor="ctr">
+                  <a:tcPr anchor="ctr">
                     <a:lnL w="9525" cap="flat" cmpd="sng" algn="ctr">
                       <a:solidFill>
                         <a:srgbClr val="D8DBE0"/>
@@ -6353,7 +6224,7 @@
                     <a:bodyPr/>
                     <a:lstStyle/>
                     <a:p>
-                      <a:pPr algn="l" indent="0" marL="0">
+                      <a:pPr marL="0" indent="0" algn="l">
                         <a:buNone/>
                       </a:pPr>
                       <a:r>
@@ -6361,20 +6232,20 @@
                           <a:solidFill>
                             <a:srgbClr val="1F2329"/>
                           </a:solidFill>
-                          <a:latin typeface="微软雅黑" pitchFamily="34" charset="0"/>
-                          <a:ea typeface="微软雅黑" pitchFamily="34" charset="-122"/>
-                          <a:cs typeface="微软雅黑" pitchFamily="34" charset="-120"/>
+                          <a:latin typeface="微软雅黑" panose="020B0503020204020204" pitchFamily="34" charset="-122"/>
+                          <a:ea typeface="微软雅黑" panose="020B0503020204020204" pitchFamily="34" charset="-122"/>
+                          <a:cs typeface="微软雅黑" panose="020B0503020204020204" pitchFamily="34" charset="-120"/>
                         </a:rPr>
                         <a:t>7答9</a:t>
                       </a:r>
                       <a:endParaRPr lang="en-US" sz="1500" dirty="0">
-                        <a:latin typeface="微软雅黑" charset="0"/>
-                        <a:ea typeface="微软雅黑" charset="0"/>
-                        <a:cs typeface="微软雅黑" charset="0"/>
+                        <a:latin typeface="微软雅黑" panose="020B0503020204020204" pitchFamily="34" charset="-122"/>
+                        <a:ea typeface="微软雅黑" panose="020B0503020204020204" pitchFamily="34" charset="-122"/>
+                        <a:cs typeface="微软雅黑" panose="020B0503020204020204" pitchFamily="34" charset="-122"/>
                       </a:endParaRPr>
                     </a:p>
                   </a:txBody>
-                  <a:tcPr marL="91440" marR="91440" marT="45720" marB="45720" anchor="ctr">
+                  <a:tcPr anchor="ctr">
                     <a:lnL w="9525" cap="flat" cmpd="sng" algn="ctr">
                       <a:solidFill>
                         <a:srgbClr val="D8DBE0"/>
@@ -6421,7 +6292,7 @@
                     <a:bodyPr/>
                     <a:lstStyle/>
                     <a:p>
-                      <a:pPr algn="l" indent="0" marL="0">
+                      <a:pPr marL="0" indent="0" algn="l">
                         <a:buNone/>
                       </a:pPr>
                       <a:r>
@@ -6429,20 +6300,20 @@
                           <a:solidFill>
                             <a:srgbClr val="1F2329"/>
                           </a:solidFill>
-                          <a:latin typeface="微软雅黑" pitchFamily="34" charset="0"/>
-                          <a:ea typeface="微软雅黑" pitchFamily="34" charset="-122"/>
-                          <a:cs typeface="微软雅黑" pitchFamily="34" charset="-120"/>
+                          <a:latin typeface="微软雅黑" panose="020B0503020204020204" pitchFamily="34" charset="-122"/>
+                          <a:ea typeface="微软雅黑" panose="020B0503020204020204" pitchFamily="34" charset="-122"/>
+                          <a:cs typeface="微软雅黑" panose="020B0503020204020204" pitchFamily="34" charset="-120"/>
                         </a:rPr>
                         <a:t>全部拓扑序列</a:t>
                       </a:r>
                       <a:endParaRPr lang="en-US" sz="1500" dirty="0">
-                        <a:latin typeface="微软雅黑" charset="0"/>
-                        <a:ea typeface="微软雅黑" charset="0"/>
-                        <a:cs typeface="微软雅黑" charset="0"/>
+                        <a:latin typeface="微软雅黑" panose="020B0503020204020204" pitchFamily="34" charset="-122"/>
+                        <a:ea typeface="微软雅黑" panose="020B0503020204020204" pitchFamily="34" charset="-122"/>
+                        <a:cs typeface="微软雅黑" panose="020B0503020204020204" pitchFamily="34" charset="-122"/>
                       </a:endParaRPr>
                     </a:p>
                   </a:txBody>
-                  <a:tcPr marL="91440" marR="91440" marT="45720" marB="45720" anchor="ctr">
+                  <a:tcPr anchor="ctr">
                     <a:lnL w="9525" cap="flat" cmpd="sng" algn="ctr">
                       <a:solidFill>
                         <a:srgbClr val="D8DBE0"/>
@@ -6489,7 +6360,7 @@
                     <a:bodyPr/>
                     <a:lstStyle/>
                     <a:p>
-                      <a:pPr algn="l" indent="0" marL="0">
+                      <a:pPr marL="0" indent="0" algn="l">
                         <a:buNone/>
                       </a:pPr>
                       <a:r>
@@ -6497,20 +6368,20 @@
                           <a:solidFill>
                             <a:srgbClr val="1F2329"/>
                           </a:solidFill>
-                          <a:latin typeface="微软雅黑" pitchFamily="34" charset="0"/>
-                          <a:ea typeface="微软雅黑" pitchFamily="34" charset="-122"/>
-                          <a:cs typeface="微软雅黑" pitchFamily="34" charset="-120"/>
+                          <a:latin typeface="微软雅黑" panose="020B0503020204020204" pitchFamily="34" charset="-122"/>
+                          <a:ea typeface="微软雅黑" panose="020B0503020204020204" pitchFamily="34" charset="-122"/>
+                          <a:cs typeface="微软雅黑" panose="020B0503020204020204" pitchFamily="34" charset="-120"/>
                         </a:rPr>
                         <a:t>列全部拓扑有序序列，2026算法26（验证拓扑序列）直接训练</a:t>
                       </a:r>
                       <a:endParaRPr lang="en-US" sz="1500" dirty="0">
-                        <a:latin typeface="微软雅黑" charset="0"/>
-                        <a:ea typeface="微软雅黑" charset="0"/>
-                        <a:cs typeface="微软雅黑" charset="0"/>
+                        <a:latin typeface="微软雅黑" panose="020B0503020204020204" pitchFamily="34" charset="-122"/>
+                        <a:ea typeface="微软雅黑" panose="020B0503020204020204" pitchFamily="34" charset="-122"/>
+                        <a:cs typeface="微软雅黑" panose="020B0503020204020204" pitchFamily="34" charset="-122"/>
                       </a:endParaRPr>
                     </a:p>
                   </a:txBody>
-                  <a:tcPr marL="91440" marR="91440" marT="45720" marB="45720" anchor="ctr">
+                  <a:tcPr anchor="ctr">
                     <a:lnL w="9525" cap="flat" cmpd="sng" algn="ctr">
                       <a:solidFill>
                         <a:srgbClr val="D8DBE0"/>
@@ -6559,7 +6430,7 @@
                     <a:bodyPr/>
                     <a:lstStyle/>
                     <a:p>
-                      <a:pPr algn="l" indent="0" marL="0">
+                      <a:pPr marL="0" indent="0" algn="l">
                         <a:buNone/>
                       </a:pPr>
                       <a:r>
@@ -6567,20 +6438,20 @@
                           <a:solidFill>
                             <a:srgbClr val="1F2329"/>
                           </a:solidFill>
-                          <a:latin typeface="微软雅黑" pitchFamily="34" charset="0"/>
-                          <a:ea typeface="微软雅黑" pitchFamily="34" charset="-122"/>
-                          <a:cs typeface="微软雅黑" pitchFamily="34" charset="-120"/>
+                          <a:latin typeface="微软雅黑" panose="020B0503020204020204" pitchFamily="34" charset="-122"/>
+                          <a:ea typeface="微软雅黑" panose="020B0503020204020204" pitchFamily="34" charset="-122"/>
+                          <a:cs typeface="微软雅黑" panose="020B0503020204020204" pitchFamily="34" charset="-120"/>
                         </a:rPr>
                         <a:t>7答10</a:t>
                       </a:r>
                       <a:endParaRPr lang="en-US" sz="1500" dirty="0">
-                        <a:latin typeface="微软雅黑" charset="0"/>
-                        <a:ea typeface="微软雅黑" charset="0"/>
-                        <a:cs typeface="微软雅黑" charset="0"/>
+                        <a:latin typeface="微软雅黑" panose="020B0503020204020204" pitchFamily="34" charset="-122"/>
+                        <a:ea typeface="微软雅黑" panose="020B0503020204020204" pitchFamily="34" charset="-122"/>
+                        <a:cs typeface="微软雅黑" panose="020B0503020204020204" pitchFamily="34" charset="-122"/>
                       </a:endParaRPr>
                     </a:p>
                   </a:txBody>
-                  <a:tcPr marL="91440" marR="91440" marT="45720" marB="45720" anchor="ctr">
+                  <a:tcPr anchor="ctr">
                     <a:lnL w="9525" cap="flat" cmpd="sng" algn="ctr">
                       <a:solidFill>
                         <a:srgbClr val="D8DBE0"/>
@@ -6627,7 +6498,7 @@
                     <a:bodyPr/>
                     <a:lstStyle/>
                     <a:p>
-                      <a:pPr algn="l" indent="0" marL="0">
+                      <a:pPr marL="0" indent="0" algn="l">
                         <a:buNone/>
                       </a:pPr>
                       <a:r>
@@ -6635,20 +6506,20 @@
                           <a:solidFill>
                             <a:srgbClr val="1F2329"/>
                           </a:solidFill>
-                          <a:latin typeface="微软雅黑" pitchFamily="34" charset="0"/>
-                          <a:ea typeface="微软雅黑" pitchFamily="34" charset="-122"/>
-                          <a:cs typeface="微软雅黑" pitchFamily="34" charset="-120"/>
+                          <a:latin typeface="微软雅黑" panose="020B0503020204020204" pitchFamily="34" charset="-122"/>
+                          <a:ea typeface="微软雅黑" panose="020B0503020204020204" pitchFamily="34" charset="-122"/>
+                          <a:cs typeface="微软雅黑" panose="020B0503020204020204" pitchFamily="34" charset="-120"/>
                         </a:rPr>
                         <a:t>AOE关键路径</a:t>
                       </a:r>
                       <a:endParaRPr lang="en-US" sz="1500" dirty="0">
-                        <a:latin typeface="微软雅黑" charset="0"/>
-                        <a:ea typeface="微软雅黑" charset="0"/>
-                        <a:cs typeface="微软雅黑" charset="0"/>
+                        <a:latin typeface="微软雅黑" panose="020B0503020204020204" pitchFamily="34" charset="-122"/>
+                        <a:ea typeface="微软雅黑" panose="020B0503020204020204" pitchFamily="34" charset="-122"/>
+                        <a:cs typeface="微软雅黑" panose="020B0503020204020204" pitchFamily="34" charset="-122"/>
                       </a:endParaRPr>
                     </a:p>
                   </a:txBody>
-                  <a:tcPr marL="91440" marR="91440" marT="45720" marB="45720" anchor="ctr">
+                  <a:tcPr anchor="ctr">
                     <a:lnL w="9525" cap="flat" cmpd="sng" algn="ctr">
                       <a:solidFill>
                         <a:srgbClr val="D8DBE0"/>
@@ -6695,7 +6566,7 @@
                     <a:bodyPr/>
                     <a:lstStyle/>
                     <a:p>
-                      <a:pPr algn="l" indent="0" marL="0">
+                      <a:pPr marL="0" indent="0" algn="l">
                         <a:buNone/>
                       </a:pPr>
                       <a:r>
@@ -6703,20 +6574,20 @@
                           <a:solidFill>
                             <a:srgbClr val="1F2329"/>
                           </a:solidFill>
-                          <a:latin typeface="微软雅黑" pitchFamily="34" charset="0"/>
-                          <a:ea typeface="微软雅黑" pitchFamily="34" charset="-122"/>
-                          <a:cs typeface="微软雅黑" pitchFamily="34" charset="-120"/>
+                          <a:latin typeface="微软雅黑" panose="020B0503020204020204" pitchFamily="34" charset="-122"/>
+                          <a:ea typeface="微软雅黑" panose="020B0503020204020204" pitchFamily="34" charset="-122"/>
+                          <a:cs typeface="微软雅黑" panose="020B0503020204020204" pitchFamily="34" charset="-120"/>
                         </a:rPr>
                         <a:t>计算活动弧e/l与关键路径</a:t>
                       </a:r>
                       <a:endParaRPr lang="en-US" sz="1500" dirty="0">
-                        <a:latin typeface="微软雅黑" charset="0"/>
-                        <a:ea typeface="微软雅黑" charset="0"/>
-                        <a:cs typeface="微软雅黑" charset="0"/>
+                        <a:latin typeface="微软雅黑" panose="020B0503020204020204" pitchFamily="34" charset="-122"/>
+                        <a:ea typeface="微软雅黑" panose="020B0503020204020204" pitchFamily="34" charset="-122"/>
+                        <a:cs typeface="微软雅黑" panose="020B0503020204020204" pitchFamily="34" charset="-122"/>
                       </a:endParaRPr>
                     </a:p>
                   </a:txBody>
-                  <a:tcPr marL="91440" marR="91440" marT="45720" marB="45720" anchor="ctr">
+                  <a:tcPr anchor="ctr">
                     <a:lnL w="9525" cap="flat" cmpd="sng" algn="ctr">
                       <a:solidFill>
                         <a:srgbClr val="D8DBE0"/>
@@ -6765,7 +6636,7 @@
                     <a:bodyPr/>
                     <a:lstStyle/>
                     <a:p>
-                      <a:pPr algn="l" indent="0" marL="0">
+                      <a:pPr marL="0" indent="0" algn="l">
                         <a:buNone/>
                       </a:pPr>
                       <a:r>
@@ -6773,20 +6644,20 @@
                           <a:solidFill>
                             <a:srgbClr val="1F2329"/>
                           </a:solidFill>
-                          <a:latin typeface="微软雅黑" pitchFamily="34" charset="0"/>
-                          <a:ea typeface="微软雅黑" pitchFamily="34" charset="-122"/>
-                          <a:cs typeface="微软雅黑" pitchFamily="34" charset="-120"/>
+                          <a:latin typeface="微软雅黑" panose="020B0503020204020204" pitchFamily="34" charset="-122"/>
+                          <a:ea typeface="微软雅黑" panose="020B0503020204020204" pitchFamily="34" charset="-122"/>
+                          <a:cs typeface="微软雅黑" panose="020B0503020204020204" pitchFamily="34" charset="-120"/>
                         </a:rPr>
                         <a:t>7答11</a:t>
                       </a:r>
                       <a:endParaRPr lang="en-US" sz="1500" dirty="0">
-                        <a:latin typeface="微软雅黑" charset="0"/>
-                        <a:ea typeface="微软雅黑" charset="0"/>
-                        <a:cs typeface="微软雅黑" charset="0"/>
+                        <a:latin typeface="微软雅黑" panose="020B0503020204020204" pitchFamily="34" charset="-122"/>
+                        <a:ea typeface="微软雅黑" panose="020B0503020204020204" pitchFamily="34" charset="-122"/>
+                        <a:cs typeface="微软雅黑" panose="020B0503020204020204" pitchFamily="34" charset="-122"/>
                       </a:endParaRPr>
                     </a:p>
                   </a:txBody>
-                  <a:tcPr marL="91440" marR="91440" marT="45720" marB="45720" anchor="ctr">
+                  <a:tcPr anchor="ctr">
                     <a:lnL w="9525" cap="flat" cmpd="sng" algn="ctr">
                       <a:solidFill>
                         <a:srgbClr val="D8DBE0"/>
@@ -6833,7 +6704,7 @@
                     <a:bodyPr/>
                     <a:lstStyle/>
                     <a:p>
-                      <a:pPr algn="l" indent="0" marL="0">
+                      <a:pPr marL="0" indent="0" algn="l">
                         <a:buNone/>
                       </a:pPr>
                       <a:r>
@@ -6841,20 +6712,20 @@
                           <a:solidFill>
                             <a:srgbClr val="1F2329"/>
                           </a:solidFill>
-                          <a:latin typeface="微软雅黑" pitchFamily="34" charset="0"/>
-                          <a:ea typeface="微软雅黑" pitchFamily="34" charset="-122"/>
-                          <a:cs typeface="微软雅黑" pitchFamily="34" charset="-120"/>
+                          <a:latin typeface="微软雅黑" panose="020B0503020204020204" pitchFamily="34" charset="-122"/>
+                          <a:ea typeface="微软雅黑" panose="020B0503020204020204" pitchFamily="34" charset="-122"/>
+                          <a:cs typeface="微软雅黑" panose="020B0503020204020204" pitchFamily="34" charset="-120"/>
                         </a:rPr>
                         <a:t>Dijkstra过程</a:t>
                       </a:r>
                       <a:endParaRPr lang="en-US" sz="1500" dirty="0">
-                        <a:latin typeface="微软雅黑" charset="0"/>
-                        <a:ea typeface="微软雅黑" charset="0"/>
-                        <a:cs typeface="微软雅黑" charset="0"/>
+                        <a:latin typeface="微软雅黑" panose="020B0503020204020204" pitchFamily="34" charset="-122"/>
+                        <a:ea typeface="微软雅黑" panose="020B0503020204020204" pitchFamily="34" charset="-122"/>
+                        <a:cs typeface="微软雅黑" panose="020B0503020204020204" pitchFamily="34" charset="-122"/>
                       </a:endParaRPr>
                     </a:p>
                   </a:txBody>
-                  <a:tcPr marL="91440" marR="91440" marT="45720" marB="45720" anchor="ctr">
+                  <a:tcPr anchor="ctr">
                     <a:lnL w="9525" cap="flat" cmpd="sng" algn="ctr">
                       <a:solidFill>
                         <a:srgbClr val="D8DBE0"/>
@@ -6901,7 +6772,7 @@
                     <a:bodyPr/>
                     <a:lstStyle/>
                     <a:p>
-                      <a:pPr algn="l" indent="0" marL="0">
+                      <a:pPr marL="0" indent="0" algn="l">
                         <a:buNone/>
                       </a:pPr>
                       <a:r>
@@ -6909,20 +6780,20 @@
                           <a:solidFill>
                             <a:srgbClr val="1F2329"/>
                           </a:solidFill>
-                          <a:latin typeface="微软雅黑" pitchFamily="34" charset="0"/>
-                          <a:ea typeface="微软雅黑" pitchFamily="34" charset="-122"/>
-                          <a:cs typeface="微软雅黑" pitchFamily="34" charset="-120"/>
+                          <a:latin typeface="微软雅黑" panose="020B0503020204020204" pitchFamily="34" charset="-122"/>
+                          <a:ea typeface="微软雅黑" panose="020B0503020204020204" pitchFamily="34" charset="-122"/>
+                          <a:cs typeface="微软雅黑" panose="020B0503020204020204" pitchFamily="34" charset="-120"/>
                         </a:rPr>
                         <a:t>逐步状态表求最短路径，2026综合21原题（完成表格）</a:t>
                       </a:r>
                       <a:endParaRPr lang="en-US" sz="1500" dirty="0">
-                        <a:latin typeface="微软雅黑" charset="0"/>
-                        <a:ea typeface="微软雅黑" charset="0"/>
-                        <a:cs typeface="微软雅黑" charset="0"/>
+                        <a:latin typeface="微软雅黑" panose="020B0503020204020204" pitchFamily="34" charset="-122"/>
+                        <a:ea typeface="微软雅黑" panose="020B0503020204020204" pitchFamily="34" charset="-122"/>
+                        <a:cs typeface="微软雅黑" panose="020B0503020204020204" pitchFamily="34" charset="-122"/>
                       </a:endParaRPr>
                     </a:p>
                   </a:txBody>
-                  <a:tcPr marL="91440" marR="91440" marT="45720" marB="45720" anchor="ctr">
+                  <a:tcPr anchor="ctr">
                     <a:lnL w="9525" cap="flat" cmpd="sng" algn="ctr">
                       <a:solidFill>
                         <a:srgbClr val="D8DBE0"/>
@@ -6971,7 +6842,7 @@
                     <a:bodyPr/>
                     <a:lstStyle/>
                     <a:p>
-                      <a:pPr algn="l" indent="0" marL="0">
+                      <a:pPr marL="0" indent="0" algn="l">
                         <a:buNone/>
                       </a:pPr>
                       <a:r>
@@ -6979,20 +6850,20 @@
                           <a:solidFill>
                             <a:srgbClr val="1F2329"/>
                           </a:solidFill>
-                          <a:latin typeface="微软雅黑" pitchFamily="34" charset="0"/>
-                          <a:ea typeface="微软雅黑" pitchFamily="34" charset="-122"/>
-                          <a:cs typeface="微软雅黑" pitchFamily="34" charset="-120"/>
+                          <a:latin typeface="微软雅黑" panose="020B0503020204020204" pitchFamily="34" charset="-122"/>
+                          <a:ea typeface="微软雅黑" panose="020B0503020204020204" pitchFamily="34" charset="-122"/>
+                          <a:cs typeface="微软雅黑" panose="020B0503020204020204" pitchFamily="34" charset="-120"/>
                         </a:rPr>
                         <a:t>7答13</a:t>
                       </a:r>
                       <a:endParaRPr lang="en-US" sz="1500" dirty="0">
-                        <a:latin typeface="微软雅黑" charset="0"/>
-                        <a:ea typeface="微软雅黑" charset="0"/>
-                        <a:cs typeface="微软雅黑" charset="0"/>
+                        <a:latin typeface="微软雅黑" panose="020B0503020204020204" pitchFamily="34" charset="-122"/>
+                        <a:ea typeface="微软雅黑" panose="020B0503020204020204" pitchFamily="34" charset="-122"/>
+                        <a:cs typeface="微软雅黑" panose="020B0503020204020204" pitchFamily="34" charset="-122"/>
                       </a:endParaRPr>
                     </a:p>
                   </a:txBody>
-                  <a:tcPr marL="91440" marR="91440" marT="45720" marB="45720" anchor="ctr">
+                  <a:tcPr anchor="ctr">
                     <a:lnL w="9525" cap="flat" cmpd="sng" algn="ctr">
                       <a:solidFill>
                         <a:srgbClr val="D8DBE0"/>
@@ -7039,7 +6910,7 @@
                     <a:bodyPr/>
                     <a:lstStyle/>
                     <a:p>
-                      <a:pPr algn="l" indent="0" marL="0">
+                      <a:pPr marL="0" indent="0" algn="l">
                         <a:buNone/>
                       </a:pPr>
                       <a:r>
@@ -7047,20 +6918,20 @@
                           <a:solidFill>
                             <a:srgbClr val="1F2329"/>
                           </a:solidFill>
-                          <a:latin typeface="微软雅黑" pitchFamily="34" charset="0"/>
-                          <a:ea typeface="微软雅黑" pitchFamily="34" charset="-122"/>
-                          <a:cs typeface="微软雅黑" pitchFamily="34" charset="-120"/>
+                          <a:latin typeface="微软雅黑" panose="020B0503020204020204" pitchFamily="34" charset="-122"/>
+                          <a:ea typeface="微软雅黑" panose="020B0503020204020204" pitchFamily="34" charset="-122"/>
+                          <a:cs typeface="微软雅黑" panose="020B0503020204020204" pitchFamily="34" charset="-120"/>
                         </a:rPr>
                         <a:t>Floyd过程</a:t>
                       </a:r>
                       <a:endParaRPr lang="en-US" sz="1500" dirty="0">
-                        <a:latin typeface="微软雅黑" charset="0"/>
-                        <a:ea typeface="微软雅黑" charset="0"/>
-                        <a:cs typeface="微软雅黑" charset="0"/>
+                        <a:latin typeface="微软雅黑" panose="020B0503020204020204" pitchFamily="34" charset="-122"/>
+                        <a:ea typeface="微软雅黑" panose="020B0503020204020204" pitchFamily="34" charset="-122"/>
+                        <a:cs typeface="微软雅黑" panose="020B0503020204020204" pitchFamily="34" charset="-122"/>
                       </a:endParaRPr>
                     </a:p>
                   </a:txBody>
-                  <a:tcPr marL="91440" marR="91440" marT="45720" marB="45720" anchor="ctr">
+                  <a:tcPr anchor="ctr">
                     <a:lnL w="9525" cap="flat" cmpd="sng" algn="ctr">
                       <a:solidFill>
                         <a:srgbClr val="D8DBE0"/>
@@ -7107,7 +6978,7 @@
                     <a:bodyPr/>
                     <a:lstStyle/>
                     <a:p>
-                      <a:pPr algn="l" indent="0" marL="0">
+                      <a:pPr marL="0" indent="0" algn="l">
                         <a:buNone/>
                       </a:pPr>
                       <a:r>
@@ -7115,20 +6986,20 @@
                           <a:solidFill>
                             <a:srgbClr val="1F2329"/>
                           </a:solidFill>
-                          <a:latin typeface="微软雅黑" pitchFamily="34" charset="0"/>
-                          <a:ea typeface="微软雅黑" pitchFamily="34" charset="-122"/>
-                          <a:cs typeface="微软雅黑" pitchFamily="34" charset="-120"/>
+                          <a:latin typeface="微软雅黑" panose="020B0503020204020204" pitchFamily="34" charset="-122"/>
+                          <a:ea typeface="微软雅黑" panose="020B0503020204020204" pitchFamily="34" charset="-122"/>
+                          <a:cs typeface="微软雅黑" panose="020B0503020204020204" pitchFamily="34" charset="-120"/>
                         </a:rPr>
                         <a:t>求各对顶点最短路径，2024综合4原题</a:t>
                       </a:r>
                       <a:endParaRPr lang="en-US" sz="1500" dirty="0">
-                        <a:latin typeface="微软雅黑" charset="0"/>
-                        <a:ea typeface="微软雅黑" charset="0"/>
-                        <a:cs typeface="微软雅黑" charset="0"/>
+                        <a:latin typeface="微软雅黑" panose="020B0503020204020204" pitchFamily="34" charset="-122"/>
+                        <a:ea typeface="微软雅黑" panose="020B0503020204020204" pitchFamily="34" charset="-122"/>
+                        <a:cs typeface="微软雅黑" panose="020B0503020204020204" pitchFamily="34" charset="-122"/>
                       </a:endParaRPr>
                     </a:p>
                   </a:txBody>
-                  <a:tcPr marL="91440" marR="91440" marT="45720" marB="45720" anchor="ctr">
+                  <a:tcPr anchor="ctr">
                     <a:lnL w="9525" cap="flat" cmpd="sng" algn="ctr">
                       <a:solidFill>
                         <a:srgbClr val="D8DBE0"/>
@@ -7177,7 +7048,7 @@
                     <a:bodyPr/>
                     <a:lstStyle/>
                     <a:p>
-                      <a:pPr algn="l" indent="0" marL="0">
+                      <a:pPr marL="0" indent="0" algn="l">
                         <a:buNone/>
                       </a:pPr>
                       <a:r>
@@ -7185,20 +7056,20 @@
                           <a:solidFill>
                             <a:srgbClr val="1F2329"/>
                           </a:solidFill>
-                          <a:latin typeface="微软雅黑" pitchFamily="34" charset="0"/>
-                          <a:ea typeface="微软雅黑" pitchFamily="34" charset="-122"/>
-                          <a:cs typeface="微软雅黑" pitchFamily="34" charset="-120"/>
+                          <a:latin typeface="微软雅黑" panose="020B0503020204020204" pitchFamily="34" charset="-122"/>
+                          <a:ea typeface="微软雅黑" panose="020B0503020204020204" pitchFamily="34" charset="-122"/>
+                          <a:cs typeface="微软雅黑" panose="020B0503020204020204" pitchFamily="34" charset="-120"/>
                         </a:rPr>
                         <a:t>7算13</a:t>
                       </a:r>
                       <a:endParaRPr lang="en-US" sz="1500" dirty="0">
-                        <a:latin typeface="微软雅黑" charset="0"/>
-                        <a:ea typeface="微软雅黑" charset="0"/>
-                        <a:cs typeface="微软雅黑" charset="0"/>
+                        <a:latin typeface="微软雅黑" panose="020B0503020204020204" pitchFamily="34" charset="-122"/>
+                        <a:ea typeface="微软雅黑" panose="020B0503020204020204" pitchFamily="34" charset="-122"/>
+                        <a:cs typeface="微软雅黑" panose="020B0503020204020204" pitchFamily="34" charset="-122"/>
                       </a:endParaRPr>
                     </a:p>
                   </a:txBody>
-                  <a:tcPr marL="91440" marR="91440" marT="45720" marB="45720" anchor="ctr">
+                  <a:tcPr anchor="ctr">
                     <a:lnL w="9525" cap="flat" cmpd="sng" algn="ctr">
                       <a:solidFill>
                         <a:srgbClr val="D8DBE0"/>
@@ -7245,7 +7116,7 @@
                     <a:bodyPr/>
                     <a:lstStyle/>
                     <a:p>
-                      <a:pPr algn="l" indent="0" marL="0">
+                      <a:pPr marL="0" indent="0" algn="l">
                         <a:buNone/>
                       </a:pPr>
                       <a:r>
@@ -7253,20 +7124,20 @@
                           <a:solidFill>
                             <a:srgbClr val="1F2329"/>
                           </a:solidFill>
-                          <a:latin typeface="微软雅黑" pitchFamily="34" charset="0"/>
-                          <a:ea typeface="微软雅黑" pitchFamily="34" charset="-122"/>
-                          <a:cs typeface="微软雅黑" pitchFamily="34" charset="-120"/>
+                          <a:latin typeface="微软雅黑" panose="020B0503020204020204" pitchFamily="34" charset="-122"/>
+                          <a:ea typeface="微软雅黑" panose="020B0503020204020204" pitchFamily="34" charset="-122"/>
+                          <a:cs typeface="微软雅黑" panose="020B0503020204020204" pitchFamily="34" charset="-120"/>
                         </a:rPr>
                         <a:t>DFS判可达路径</a:t>
                       </a:r>
                       <a:endParaRPr lang="en-US" sz="1500" dirty="0">
-                        <a:latin typeface="微软雅黑" charset="0"/>
-                        <a:ea typeface="微软雅黑" charset="0"/>
-                        <a:cs typeface="微软雅黑" charset="0"/>
+                        <a:latin typeface="微软雅黑" panose="020B0503020204020204" pitchFamily="34" charset="-122"/>
+                        <a:ea typeface="微软雅黑" panose="020B0503020204020204" pitchFamily="34" charset="-122"/>
+                        <a:cs typeface="微软雅黑" panose="020B0503020204020204" pitchFamily="34" charset="-122"/>
                       </a:endParaRPr>
                     </a:p>
                   </a:txBody>
-                  <a:tcPr marL="91440" marR="91440" marT="45720" marB="45720" anchor="ctr">
+                  <a:tcPr anchor="ctr">
                     <a:lnL w="9525" cap="flat" cmpd="sng" algn="ctr">
                       <a:solidFill>
                         <a:srgbClr val="D8DBE0"/>
@@ -7313,7 +7184,7 @@
                     <a:bodyPr/>
                     <a:lstStyle/>
                     <a:p>
-                      <a:pPr algn="l" indent="0" marL="0">
+                      <a:pPr marL="0" indent="0" algn="l">
                         <a:buNone/>
                       </a:pPr>
                       <a:r>
@@ -7321,20 +7192,20 @@
                           <a:solidFill>
                             <a:srgbClr val="1F2329"/>
                           </a:solidFill>
-                          <a:latin typeface="微软雅黑" pitchFamily="34" charset="0"/>
-                          <a:ea typeface="微软雅黑" pitchFamily="34" charset="-122"/>
-                          <a:cs typeface="微软雅黑" pitchFamily="34" charset="-120"/>
+                          <a:latin typeface="微软雅黑" panose="020B0503020204020204" pitchFamily="34" charset="-122"/>
+                          <a:ea typeface="微软雅黑" panose="020B0503020204020204" pitchFamily="34" charset="-122"/>
+                          <a:cs typeface="微软雅黑" panose="020B0503020204020204" pitchFamily="34" charset="-120"/>
                         </a:rPr>
                         <a:t>邻接表DFS判vi到vj路径，DFS模板（2025算法3前置）</a:t>
                       </a:r>
                       <a:endParaRPr lang="en-US" sz="1500" dirty="0">
-                        <a:latin typeface="微软雅黑" charset="0"/>
-                        <a:ea typeface="微软雅黑" charset="0"/>
-                        <a:cs typeface="微软雅黑" charset="0"/>
+                        <a:latin typeface="微软雅黑" panose="020B0503020204020204" pitchFamily="34" charset="-122"/>
+                        <a:ea typeface="微软雅黑" panose="020B0503020204020204" pitchFamily="34" charset="-122"/>
+                        <a:cs typeface="微软雅黑" panose="020B0503020204020204" pitchFamily="34" charset="-122"/>
                       </a:endParaRPr>
                     </a:p>
                   </a:txBody>
-                  <a:tcPr marL="91440" marR="91440" marT="45720" marB="45720" anchor="ctr">
+                  <a:tcPr anchor="ctr">
                     <a:lnL w="9525" cap="flat" cmpd="sng" algn="ctr">
                       <a:solidFill>
                         <a:srgbClr val="D8DBE0"/>
@@ -7391,7 +7262,7 @@
 
 <file path=ppt/slides/slide6.xml><?xml version="1.0" encoding="utf-8"?>
 <p:sld xmlns:a="http://schemas.openxmlformats.org/drawingml/2006/main" xmlns:r="http://schemas.openxmlformats.org/officeDocument/2006/relationships" xmlns:p="http://schemas.openxmlformats.org/presentationml/2006/main">
-  <p:cSld name="Slide 6">
+  <p:cSld>
     <p:bg>
       <p:bgPr>
         <a:blipFill dpi="0" rotWithShape="1">
@@ -7435,13 +7306,12 @@
             <a:avLst/>
           </a:prstGeom>
           <a:noFill/>
-          <a:ln/>
         </p:spPr>
         <p:txBody>
           <a:bodyPr wrap="square" rtlCol="0" anchor="ctr"/>
           <a:lstStyle/>
           <a:p>
-            <a:pPr algn="r" indent="0" marL="0">
+            <a:pPr marL="0" indent="0" algn="r">
               <a:buNone/>
             </a:pPr>
             <a:r>
@@ -7449,9 +7319,9 @@
                 <a:solidFill>
                   <a:srgbClr val="8A9099"/>
                 </a:solidFill>
-                <a:latin typeface="微软雅黑" pitchFamily="34" charset="0"/>
-                <a:ea typeface="微软雅黑" pitchFamily="34" charset="-122"/>
-                <a:cs typeface="微软雅黑" pitchFamily="34" charset="-120"/>
+                <a:latin typeface="微软雅黑" panose="020B0503020204020204" pitchFamily="34" charset="-122"/>
+                <a:ea typeface="微软雅黑" panose="020B0503020204020204" pitchFamily="34" charset="-122"/>
+                <a:cs typeface="微软雅黑" panose="020B0503020204020204" pitchFamily="34" charset="-120"/>
               </a:rPr>
               <a:t>6 / 9</a:t>
             </a:r>
@@ -7474,13 +7344,12 @@
             <a:avLst/>
           </a:prstGeom>
           <a:noFill/>
-          <a:ln/>
         </p:spPr>
         <p:txBody>
           <a:bodyPr wrap="square" rtlCol="0" anchor="ctr"/>
           <a:lstStyle/>
           <a:p>
-            <a:pPr algn="l" indent="0" marL="0">
+            <a:pPr marL="0" indent="0" algn="l">
               <a:buNone/>
             </a:pPr>
             <a:r>
@@ -7488,9 +7357,9 @@
                 <a:solidFill>
                   <a:srgbClr val="1F4E9C"/>
                 </a:solidFill>
-                <a:latin typeface="微软雅黑" pitchFamily="34" charset="0"/>
-                <a:ea typeface="微软雅黑" pitchFamily="34" charset="-122"/>
-                <a:cs typeface="微软雅黑" pitchFamily="34" charset="-120"/>
+                <a:latin typeface="微软雅黑" panose="020B0503020204020204" pitchFamily="34" charset="-122"/>
+                <a:ea typeface="微软雅黑" panose="020B0503020204020204" pitchFamily="34" charset="-122"/>
+                <a:cs typeface="微软雅黑" panose="020B0503020204020204" pitchFamily="34" charset="-120"/>
               </a:rPr>
               <a:t>有价值必做</a:t>
             </a:r>
@@ -7513,13 +7382,12 @@
             <a:avLst/>
           </a:prstGeom>
           <a:noFill/>
-          <a:ln/>
         </p:spPr>
         <p:txBody>
           <a:bodyPr wrap="square" rtlCol="0" anchor="ctr"/>
           <a:lstStyle/>
           <a:p>
-            <a:pPr algn="l" indent="0" marL="0">
+            <a:pPr marL="0" indent="0" algn="l">
               <a:buNone/>
             </a:pPr>
             <a:r>
@@ -7527,9 +7395,9 @@
                 <a:solidFill>
                   <a:srgbClr val="1F2329"/>
                 </a:solidFill>
-                <a:latin typeface="微软雅黑" pitchFamily="34" charset="0"/>
-                <a:ea typeface="微软雅黑" pitchFamily="34" charset="-122"/>
-                <a:cs typeface="微软雅黑" pitchFamily="34" charset="-120"/>
+                <a:latin typeface="微软雅黑" panose="020B0503020204020204" pitchFamily="34" charset="-122"/>
+                <a:ea typeface="微软雅黑" panose="020B0503020204020204" pitchFamily="34" charset="-122"/>
+                <a:cs typeface="微软雅黑" panose="020B0503020204020204" pitchFamily="34" charset="-120"/>
               </a:rPr>
               <a:t>必做题（4/4）</a:t>
             </a:r>
@@ -7543,17 +7411,11 @@
           <p:cNvGraphicFramePr>
             <a:graphicFrameLocks noGrp="1"/>
           </p:cNvGraphicFramePr>
-          <p:nvPr>
-            <p:extLst>
-              <p:ext uri="{D42A27DB-BD31-4B8C-83A1-F6EECF244321}">
-                <p14:modId xmlns:p14="http://schemas.microsoft.com/office/powerpoint/2010/main" val="1579011935"/>
-              </p:ext>
-            </p:extLst>
-          </p:nvPr>
+          <p:nvPr/>
         </p:nvGraphicFramePr>
         <p:xfrm>
           <a:off x="822960" y="2395728"/>
-          <a:ext cx="10545775" cy="914400"/>
+          <a:ext cx="10545775" cy="2103120"/>
         </p:xfrm>
         <a:graphic>
           <a:graphicData uri="http://schemas.openxmlformats.org/drawingml/2006/table">
@@ -7570,7 +7432,7 @@
                     <a:bodyPr/>
                     <a:lstStyle/>
                     <a:p>
-                      <a:pPr algn="l" indent="0" marL="0">
+                      <a:pPr marL="0" indent="0" algn="l">
                         <a:buNone/>
                       </a:pPr>
                       <a:r>
@@ -7578,20 +7440,20 @@
                           <a:solidFill>
                             <a:srgbClr val="1F4E9C"/>
                           </a:solidFill>
-                          <a:latin typeface="微软雅黑" pitchFamily="34" charset="0"/>
-                          <a:ea typeface="微软雅黑" pitchFamily="34" charset="-122"/>
-                          <a:cs typeface="微软雅黑" pitchFamily="34" charset="-120"/>
+                          <a:latin typeface="微软雅黑" panose="020B0503020204020204" pitchFamily="34" charset="-122"/>
+                          <a:ea typeface="微软雅黑" panose="020B0503020204020204" pitchFamily="34" charset="-122"/>
+                          <a:cs typeface="微软雅黑" panose="020B0503020204020204" pitchFamily="34" charset="-120"/>
                         </a:rPr>
                         <a:t>题号</a:t>
                       </a:r>
                       <a:endParaRPr lang="en-US" sz="1500" dirty="0">
-                        <a:latin typeface="微软雅黑" charset="0"/>
-                        <a:ea typeface="微软雅黑" charset="0"/>
-                        <a:cs typeface="微软雅黑" charset="0"/>
+                        <a:latin typeface="微软雅黑" panose="020B0503020204020204" pitchFamily="34" charset="-122"/>
+                        <a:ea typeface="微软雅黑" panose="020B0503020204020204" pitchFamily="34" charset="-122"/>
+                        <a:cs typeface="微软雅黑" panose="020B0503020204020204" pitchFamily="34" charset="-122"/>
                       </a:endParaRPr>
                     </a:p>
                   </a:txBody>
-                  <a:tcPr marL="91440" marR="91440" marT="45720" marB="45720" anchor="ctr">
+                  <a:tcPr anchor="ctr">
                     <a:lnL w="9525" cap="flat" cmpd="sng" algn="ctr">
                       <a:solidFill>
                         <a:srgbClr val="D8DBE0"/>
@@ -7638,7 +7500,7 @@
                     <a:bodyPr/>
                     <a:lstStyle/>
                     <a:p>
-                      <a:pPr algn="l" indent="0" marL="0">
+                      <a:pPr marL="0" indent="0" algn="l">
                         <a:buNone/>
                       </a:pPr>
                       <a:r>
@@ -7646,20 +7508,20 @@
                           <a:solidFill>
                             <a:srgbClr val="1F4E9C"/>
                           </a:solidFill>
-                          <a:latin typeface="微软雅黑" pitchFamily="34" charset="0"/>
-                          <a:ea typeface="微软雅黑" pitchFamily="34" charset="-122"/>
-                          <a:cs typeface="微软雅黑" pitchFamily="34" charset="-120"/>
+                          <a:latin typeface="微软雅黑" panose="020B0503020204020204" pitchFamily="34" charset="-122"/>
+                          <a:ea typeface="微软雅黑" panose="020B0503020204020204" pitchFamily="34" charset="-122"/>
+                          <a:cs typeface="微软雅黑" panose="020B0503020204020204" pitchFamily="34" charset="-120"/>
                         </a:rPr>
                         <a:t>考点</a:t>
                       </a:r>
                       <a:endParaRPr lang="en-US" sz="1500" dirty="0">
-                        <a:latin typeface="微软雅黑" charset="0"/>
-                        <a:ea typeface="微软雅黑" charset="0"/>
-                        <a:cs typeface="微软雅黑" charset="0"/>
+                        <a:latin typeface="微软雅黑" panose="020B0503020204020204" pitchFamily="34" charset="-122"/>
+                        <a:ea typeface="微软雅黑" panose="020B0503020204020204" pitchFamily="34" charset="-122"/>
+                        <a:cs typeface="微软雅黑" panose="020B0503020204020204" pitchFamily="34" charset="-122"/>
                       </a:endParaRPr>
                     </a:p>
                   </a:txBody>
-                  <a:tcPr marL="91440" marR="91440" marT="45720" marB="45720" anchor="ctr">
+                  <a:tcPr anchor="ctr">
                     <a:lnL w="9525" cap="flat" cmpd="sng" algn="ctr">
                       <a:solidFill>
                         <a:srgbClr val="D8DBE0"/>
@@ -7706,7 +7568,7 @@
                     <a:bodyPr/>
                     <a:lstStyle/>
                     <a:p>
-                      <a:pPr algn="l" indent="0" marL="0">
+                      <a:pPr marL="0" indent="0" algn="l">
                         <a:buNone/>
                       </a:pPr>
                       <a:r>
@@ -7714,20 +7576,20 @@
                           <a:solidFill>
                             <a:srgbClr val="1F4E9C"/>
                           </a:solidFill>
-                          <a:latin typeface="微软雅黑" pitchFamily="34" charset="0"/>
-                          <a:ea typeface="微软雅黑" pitchFamily="34" charset="-122"/>
-                          <a:cs typeface="微软雅黑" pitchFamily="34" charset="-120"/>
+                          <a:latin typeface="微软雅黑" panose="020B0503020204020204" pitchFamily="34" charset="-122"/>
+                          <a:ea typeface="微软雅黑" panose="020B0503020204020204" pitchFamily="34" charset="-122"/>
+                          <a:cs typeface="微软雅黑" panose="020B0503020204020204" pitchFamily="34" charset="-120"/>
                         </a:rPr>
                         <a:t>价值</a:t>
                       </a:r>
                       <a:endParaRPr lang="en-US" sz="1500" dirty="0">
-                        <a:latin typeface="微软雅黑" charset="0"/>
-                        <a:ea typeface="微软雅黑" charset="0"/>
-                        <a:cs typeface="微软雅黑" charset="0"/>
+                        <a:latin typeface="微软雅黑" panose="020B0503020204020204" pitchFamily="34" charset="-122"/>
+                        <a:ea typeface="微软雅黑" panose="020B0503020204020204" pitchFamily="34" charset="-122"/>
+                        <a:cs typeface="微软雅黑" panose="020B0503020204020204" pitchFamily="34" charset="-122"/>
                       </a:endParaRPr>
                     </a:p>
                   </a:txBody>
-                  <a:tcPr marL="91440" marR="91440" marT="45720" marB="45720" anchor="ctr">
+                  <a:tcPr anchor="ctr">
                     <a:lnL w="9525" cap="flat" cmpd="sng" algn="ctr">
                       <a:solidFill>
                         <a:srgbClr val="D8DBE0"/>
@@ -7776,7 +7638,7 @@
                     <a:bodyPr/>
                     <a:lstStyle/>
                     <a:p>
-                      <a:pPr algn="l" indent="0" marL="0">
+                      <a:pPr marL="0" indent="0" algn="l">
                         <a:buNone/>
                       </a:pPr>
                       <a:r>
@@ -7784,20 +7646,20 @@
                           <a:solidFill>
                             <a:srgbClr val="1F2329"/>
                           </a:solidFill>
-                          <a:latin typeface="微软雅黑" pitchFamily="34" charset="0"/>
-                          <a:ea typeface="微软雅黑" pitchFamily="34" charset="-122"/>
-                          <a:cs typeface="微软雅黑" pitchFamily="34" charset="-120"/>
+                          <a:latin typeface="微软雅黑" panose="020B0503020204020204" pitchFamily="34" charset="-122"/>
+                          <a:ea typeface="微软雅黑" panose="020B0503020204020204" pitchFamily="34" charset="-122"/>
+                          <a:cs typeface="微软雅黑" panose="020B0503020204020204" pitchFamily="34" charset="-120"/>
                         </a:rPr>
                         <a:t>7算14</a:t>
                       </a:r>
                       <a:endParaRPr lang="en-US" sz="1500" dirty="0">
-                        <a:latin typeface="微软雅黑" charset="0"/>
-                        <a:ea typeface="微软雅黑" charset="0"/>
-                        <a:cs typeface="微软雅黑" charset="0"/>
+                        <a:latin typeface="微软雅黑" panose="020B0503020204020204" pitchFamily="34" charset="-122"/>
+                        <a:ea typeface="微软雅黑" panose="020B0503020204020204" pitchFamily="34" charset="-122"/>
+                        <a:cs typeface="微软雅黑" panose="020B0503020204020204" pitchFamily="34" charset="-122"/>
                       </a:endParaRPr>
                     </a:p>
                   </a:txBody>
-                  <a:tcPr marL="91440" marR="91440" marT="45720" marB="45720" anchor="ctr">
+                  <a:tcPr anchor="ctr">
                     <a:lnL w="9525" cap="flat" cmpd="sng" algn="ctr">
                       <a:solidFill>
                         <a:srgbClr val="D8DBE0"/>
@@ -7844,7 +7706,7 @@
                     <a:bodyPr/>
                     <a:lstStyle/>
                     <a:p>
-                      <a:pPr algn="l" indent="0" marL="0">
+                      <a:pPr marL="0" indent="0" algn="l">
                         <a:buNone/>
                       </a:pPr>
                       <a:r>
@@ -7852,20 +7714,20 @@
                           <a:solidFill>
                             <a:srgbClr val="1F2329"/>
                           </a:solidFill>
-                          <a:latin typeface="微软雅黑" pitchFamily="34" charset="0"/>
-                          <a:ea typeface="微软雅黑" pitchFamily="34" charset="-122"/>
-                          <a:cs typeface="微软雅黑" pitchFamily="34" charset="-120"/>
+                          <a:latin typeface="微软雅黑" panose="020B0503020204020204" pitchFamily="34" charset="-122"/>
+                          <a:ea typeface="微软雅黑" panose="020B0503020204020204" pitchFamily="34" charset="-122"/>
+                          <a:cs typeface="微软雅黑" panose="020B0503020204020204" pitchFamily="34" charset="-120"/>
                         </a:rPr>
                         <a:t>BFS判可达路径</a:t>
                       </a:r>
                       <a:endParaRPr lang="en-US" sz="1500" dirty="0">
-                        <a:latin typeface="微软雅黑" charset="0"/>
-                        <a:ea typeface="微软雅黑" charset="0"/>
-                        <a:cs typeface="微软雅黑" charset="0"/>
+                        <a:latin typeface="微软雅黑" panose="020B0503020204020204" pitchFamily="34" charset="-122"/>
+                        <a:ea typeface="微软雅黑" panose="020B0503020204020204" pitchFamily="34" charset="-122"/>
+                        <a:cs typeface="微软雅黑" panose="020B0503020204020204" pitchFamily="34" charset="-122"/>
                       </a:endParaRPr>
                     </a:p>
                   </a:txBody>
-                  <a:tcPr marL="91440" marR="91440" marT="45720" marB="45720" anchor="ctr">
+                  <a:tcPr anchor="ctr">
                     <a:lnL w="9525" cap="flat" cmpd="sng" algn="ctr">
                       <a:solidFill>
                         <a:srgbClr val="D8DBE0"/>
@@ -7912,7 +7774,7 @@
                     <a:bodyPr/>
                     <a:lstStyle/>
                     <a:p>
-                      <a:pPr algn="l" indent="0" marL="0">
+                      <a:pPr marL="0" indent="0" algn="l">
                         <a:buNone/>
                       </a:pPr>
                       <a:r>
@@ -7920,20 +7782,20 @@
                           <a:solidFill>
                             <a:srgbClr val="1F2329"/>
                           </a:solidFill>
-                          <a:latin typeface="微软雅黑" pitchFamily="34" charset="0"/>
-                          <a:ea typeface="微软雅黑" pitchFamily="34" charset="-122"/>
-                          <a:cs typeface="微软雅黑" pitchFamily="34" charset="-120"/>
+                          <a:latin typeface="微软雅黑" panose="020B0503020204020204" pitchFamily="34" charset="-122"/>
+                          <a:ea typeface="微软雅黑" panose="020B0503020204020204" pitchFamily="34" charset="-122"/>
+                          <a:cs typeface="微软雅黑" panose="020B0503020204020204" pitchFamily="34" charset="-120"/>
                         </a:rPr>
                         <a:t>BFS版判路径，BFS模板</a:t>
                       </a:r>
                       <a:endParaRPr lang="en-US" sz="1500" dirty="0">
-                        <a:latin typeface="微软雅黑" charset="0"/>
-                        <a:ea typeface="微软雅黑" charset="0"/>
-                        <a:cs typeface="微软雅黑" charset="0"/>
+                        <a:latin typeface="微软雅黑" panose="020B0503020204020204" pitchFamily="34" charset="-122"/>
+                        <a:ea typeface="微软雅黑" panose="020B0503020204020204" pitchFamily="34" charset="-122"/>
+                        <a:cs typeface="微软雅黑" panose="020B0503020204020204" pitchFamily="34" charset="-122"/>
                       </a:endParaRPr>
                     </a:p>
                   </a:txBody>
-                  <a:tcPr marL="91440" marR="91440" marT="45720" marB="45720" anchor="ctr">
+                  <a:tcPr anchor="ctr">
                     <a:lnL w="9525" cap="flat" cmpd="sng" algn="ctr">
                       <a:solidFill>
                         <a:srgbClr val="D8DBE0"/>
@@ -7982,7 +7844,7 @@
                     <a:bodyPr/>
                     <a:lstStyle/>
                     <a:p>
-                      <a:pPr algn="l" indent="0" marL="0">
+                      <a:pPr marL="0" indent="0" algn="l">
                         <a:buNone/>
                       </a:pPr>
                       <a:r>
@@ -7990,20 +7852,20 @@
                           <a:solidFill>
                             <a:srgbClr val="1F2329"/>
                           </a:solidFill>
-                          <a:latin typeface="微软雅黑" pitchFamily="34" charset="0"/>
-                          <a:ea typeface="微软雅黑" pitchFamily="34" charset="-122"/>
-                          <a:cs typeface="微软雅黑" pitchFamily="34" charset="-120"/>
+                          <a:latin typeface="微软雅黑" panose="020B0503020204020204" pitchFamily="34" charset="-122"/>
+                          <a:ea typeface="微软雅黑" panose="020B0503020204020204" pitchFamily="34" charset="-122"/>
+                          <a:cs typeface="微软雅黑" panose="020B0503020204020204" pitchFamily="34" charset="-120"/>
                         </a:rPr>
                         <a:t>7算18</a:t>
                       </a:r>
                       <a:endParaRPr lang="en-US" sz="1500" dirty="0">
-                        <a:latin typeface="微软雅黑" charset="0"/>
-                        <a:ea typeface="微软雅黑" charset="0"/>
-                        <a:cs typeface="微软雅黑" charset="0"/>
+                        <a:latin typeface="微软雅黑" panose="020B0503020204020204" pitchFamily="34" charset="-122"/>
+                        <a:ea typeface="微软雅黑" panose="020B0503020204020204" pitchFamily="34" charset="-122"/>
+                        <a:cs typeface="微软雅黑" panose="020B0503020204020204" pitchFamily="34" charset="-122"/>
                       </a:endParaRPr>
                     </a:p>
                   </a:txBody>
-                  <a:tcPr marL="91440" marR="91440" marT="45720" marB="45720" anchor="ctr">
+                  <a:tcPr anchor="ctr">
                     <a:lnL w="9525" cap="flat" cmpd="sng" algn="ctr">
                       <a:solidFill>
                         <a:srgbClr val="D8DBE0"/>
@@ -8050,7 +7912,7 @@
                     <a:bodyPr/>
                     <a:lstStyle/>
                     <a:p>
-                      <a:pPr algn="l" indent="0" marL="0">
+                      <a:pPr marL="0" indent="0" algn="l">
                         <a:buNone/>
                       </a:pPr>
                       <a:r>
@@ -8058,20 +7920,20 @@
                           <a:solidFill>
                             <a:srgbClr val="1F2329"/>
                           </a:solidFill>
-                          <a:latin typeface="微软雅黑" pitchFamily="34" charset="0"/>
-                          <a:ea typeface="微软雅黑" pitchFamily="34" charset="-122"/>
-                          <a:cs typeface="微软雅黑" pitchFamily="34" charset="-120"/>
+                          <a:latin typeface="微软雅黑" panose="020B0503020204020204" pitchFamily="34" charset="-122"/>
+                          <a:ea typeface="微软雅黑" panose="020B0503020204020204" pitchFamily="34" charset="-122"/>
+                          <a:cs typeface="微软雅黑" panose="020B0503020204020204" pitchFamily="34" charset="-120"/>
                         </a:rPr>
                         <a:t>长度k简单路径</a:t>
                       </a:r>
                       <a:endParaRPr lang="en-US" sz="1500" dirty="0">
-                        <a:latin typeface="微软雅黑" charset="0"/>
-                        <a:ea typeface="微软雅黑" charset="0"/>
-                        <a:cs typeface="微软雅黑" charset="0"/>
+                        <a:latin typeface="微软雅黑" panose="020B0503020204020204" pitchFamily="34" charset="-122"/>
+                        <a:ea typeface="微软雅黑" panose="020B0503020204020204" pitchFamily="34" charset="-122"/>
+                        <a:cs typeface="微软雅黑" panose="020B0503020204020204" pitchFamily="34" charset="-122"/>
                       </a:endParaRPr>
                     </a:p>
                   </a:txBody>
-                  <a:tcPr marL="91440" marR="91440" marT="45720" marB="45720" anchor="ctr">
+                  <a:tcPr anchor="ctr">
                     <a:lnL w="9525" cap="flat" cmpd="sng" algn="ctr">
                       <a:solidFill>
                         <a:srgbClr val="D8DBE0"/>
@@ -8118,7 +7980,7 @@
                     <a:bodyPr/>
                     <a:lstStyle/>
                     <a:p>
-                      <a:pPr algn="l" indent="0" marL="0">
+                      <a:pPr marL="0" indent="0" algn="l">
                         <a:buNone/>
                       </a:pPr>
                       <a:r>
@@ -8126,20 +7988,20 @@
                           <a:solidFill>
                             <a:srgbClr val="1F2329"/>
                           </a:solidFill>
-                          <a:latin typeface="微软雅黑" pitchFamily="34" charset="0"/>
-                          <a:ea typeface="微软雅黑" pitchFamily="34" charset="-122"/>
-                          <a:cs typeface="微软雅黑" pitchFamily="34" charset="-120"/>
+                          <a:latin typeface="微软雅黑" panose="020B0503020204020204" pitchFamily="34" charset="-122"/>
+                          <a:ea typeface="微软雅黑" panose="020B0503020204020204" pitchFamily="34" charset="-122"/>
+                          <a:cs typeface="微软雅黑" panose="020B0503020204020204" pitchFamily="34" charset="-120"/>
                         </a:rPr>
                         <a:t>邻接表无向图判长度k路径，2024算法设计2原题（DFS回溯模板）</a:t>
                       </a:r>
                       <a:endParaRPr lang="en-US" sz="1500" dirty="0">
-                        <a:latin typeface="微软雅黑" charset="0"/>
-                        <a:ea typeface="微软雅黑" charset="0"/>
-                        <a:cs typeface="微软雅黑" charset="0"/>
+                        <a:latin typeface="微软雅黑" panose="020B0503020204020204" pitchFamily="34" charset="-122"/>
+                        <a:ea typeface="微软雅黑" panose="020B0503020204020204" pitchFamily="34" charset="-122"/>
+                        <a:cs typeface="微软雅黑" panose="020B0503020204020204" pitchFamily="34" charset="-122"/>
                       </a:endParaRPr>
                     </a:p>
                   </a:txBody>
-                  <a:tcPr marL="91440" marR="91440" marT="45720" marB="45720" anchor="ctr">
+                  <a:tcPr anchor="ctr">
                     <a:lnL w="9525" cap="flat" cmpd="sng" algn="ctr">
                       <a:solidFill>
                         <a:srgbClr val="D8DBE0"/>
@@ -8188,7 +8050,7 @@
                     <a:bodyPr/>
                     <a:lstStyle/>
                     <a:p>
-                      <a:pPr algn="l" indent="0" marL="0">
+                      <a:pPr marL="0" indent="0" algn="l">
                         <a:buNone/>
                       </a:pPr>
                       <a:r>
@@ -8196,20 +8058,20 @@
                           <a:solidFill>
                             <a:srgbClr val="1F2329"/>
                           </a:solidFill>
-                          <a:latin typeface="微软雅黑" pitchFamily="34" charset="0"/>
-                          <a:ea typeface="微软雅黑" pitchFamily="34" charset="-122"/>
-                          <a:cs typeface="微软雅黑" pitchFamily="34" charset="-120"/>
+                          <a:latin typeface="微软雅黑" panose="020B0503020204020204" pitchFamily="34" charset="-122"/>
+                          <a:ea typeface="微软雅黑" panose="020B0503020204020204" pitchFamily="34" charset="-122"/>
+                          <a:cs typeface="微软雅黑" panose="020B0503020204020204" pitchFamily="34" charset="-120"/>
                         </a:rPr>
                         <a:t>7算19</a:t>
                       </a:r>
                       <a:endParaRPr lang="en-US" sz="1500" dirty="0">
-                        <a:latin typeface="微软雅黑" charset="0"/>
-                        <a:ea typeface="微软雅黑" charset="0"/>
-                        <a:cs typeface="微软雅黑" charset="0"/>
+                        <a:latin typeface="微软雅黑" panose="020B0503020204020204" pitchFamily="34" charset="-122"/>
+                        <a:ea typeface="微软雅黑" panose="020B0503020204020204" pitchFamily="34" charset="-122"/>
+                        <a:cs typeface="微软雅黑" panose="020B0503020204020204" pitchFamily="34" charset="-122"/>
                       </a:endParaRPr>
                     </a:p>
                   </a:txBody>
-                  <a:tcPr marL="91440" marR="91440" marT="45720" marB="45720" anchor="ctr">
+                  <a:tcPr anchor="ctr">
                     <a:lnL w="9525" cap="flat" cmpd="sng" algn="ctr">
                       <a:solidFill>
                         <a:srgbClr val="D8DBE0"/>
@@ -8256,7 +8118,7 @@
                     <a:bodyPr/>
                     <a:lstStyle/>
                     <a:p>
-                      <a:pPr algn="l" indent="0" marL="0">
+                      <a:pPr marL="0" indent="0" algn="l">
                         <a:buNone/>
                       </a:pPr>
                       <a:r>
@@ -8264,20 +8126,20 @@
                           <a:solidFill>
                             <a:srgbClr val="1F2329"/>
                           </a:solidFill>
-                          <a:latin typeface="微软雅黑" pitchFamily="34" charset="0"/>
-                          <a:ea typeface="微软雅黑" pitchFamily="34" charset="-122"/>
-                          <a:cs typeface="微软雅黑" pitchFamily="34" charset="-120"/>
+                          <a:latin typeface="微软雅黑" panose="020B0503020204020204" pitchFamily="34" charset="-122"/>
+                          <a:ea typeface="微软雅黑" panose="020B0503020204020204" pitchFamily="34" charset="-122"/>
+                          <a:cs typeface="微软雅黑" panose="020B0503020204020204" pitchFamily="34" charset="-120"/>
                         </a:rPr>
                         <a:t>u到v所有简单路径</a:t>
                       </a:r>
                       <a:endParaRPr lang="en-US" sz="1500" dirty="0">
-                        <a:latin typeface="微软雅黑" charset="0"/>
-                        <a:ea typeface="微软雅黑" charset="0"/>
-                        <a:cs typeface="微软雅黑" charset="0"/>
+                        <a:latin typeface="微软雅黑" panose="020B0503020204020204" pitchFamily="34" charset="-122"/>
+                        <a:ea typeface="微软雅黑" panose="020B0503020204020204" pitchFamily="34" charset="-122"/>
+                        <a:cs typeface="微软雅黑" panose="020B0503020204020204" pitchFamily="34" charset="-122"/>
                       </a:endParaRPr>
                     </a:p>
                   </a:txBody>
-                  <a:tcPr marL="91440" marR="91440" marT="45720" marB="45720" anchor="ctr">
+                  <a:tcPr anchor="ctr">
                     <a:lnL w="9525" cap="flat" cmpd="sng" algn="ctr">
                       <a:solidFill>
                         <a:srgbClr val="D8DBE0"/>
@@ -8324,7 +8186,7 @@
                     <a:bodyPr/>
                     <a:lstStyle/>
                     <a:p>
-                      <a:pPr algn="l" indent="0" marL="0">
+                      <a:pPr marL="0" indent="0" algn="l">
                         <a:buNone/>
                       </a:pPr>
                       <a:r>
@@ -8332,20 +8194,20 @@
                           <a:solidFill>
                             <a:srgbClr val="1F2329"/>
                           </a:solidFill>
-                          <a:latin typeface="微软雅黑" pitchFamily="34" charset="0"/>
-                          <a:ea typeface="微软雅黑" pitchFamily="34" charset="-122"/>
-                          <a:cs typeface="微软雅黑" pitchFamily="34" charset="-120"/>
+                          <a:latin typeface="微软雅黑" panose="020B0503020204020204" pitchFamily="34" charset="-122"/>
+                          <a:ea typeface="微软雅黑" panose="020B0503020204020204" pitchFamily="34" charset="-122"/>
+                          <a:cs typeface="微软雅黑" panose="020B0503020204020204" pitchFamily="34" charset="-120"/>
                         </a:rPr>
                         <a:t>DFS回溯+visited清除，2025算法3（经过k的路径）同族</a:t>
                       </a:r>
                       <a:endParaRPr lang="en-US" sz="1500" dirty="0">
-                        <a:latin typeface="微软雅黑" charset="0"/>
-                        <a:ea typeface="微软雅黑" charset="0"/>
-                        <a:cs typeface="微软雅黑" charset="0"/>
+                        <a:latin typeface="微软雅黑" panose="020B0503020204020204" pitchFamily="34" charset="-122"/>
+                        <a:ea typeface="微软雅黑" panose="020B0503020204020204" pitchFamily="34" charset="-122"/>
+                        <a:cs typeface="微软雅黑" panose="020B0503020204020204" pitchFamily="34" charset="-122"/>
                       </a:endParaRPr>
                     </a:p>
                   </a:txBody>
-                  <a:tcPr marL="91440" marR="91440" marT="45720" marB="45720" anchor="ctr">
+                  <a:tcPr anchor="ctr">
                     <a:lnL w="9525" cap="flat" cmpd="sng" algn="ctr">
                       <a:solidFill>
                         <a:srgbClr val="D8DBE0"/>
@@ -8394,7 +8256,7 @@
                     <a:bodyPr/>
                     <a:lstStyle/>
                     <a:p>
-                      <a:pPr algn="l" indent="0" marL="0">
+                      <a:pPr marL="0" indent="0" algn="l">
                         <a:buNone/>
                       </a:pPr>
                       <a:r>
@@ -8402,20 +8264,20 @@
                           <a:solidFill>
                             <a:srgbClr val="1F2329"/>
                           </a:solidFill>
-                          <a:latin typeface="微软雅黑" pitchFamily="34" charset="0"/>
-                          <a:ea typeface="微软雅黑" pitchFamily="34" charset="-122"/>
-                          <a:cs typeface="微软雅黑" pitchFamily="34" charset="-120"/>
+                          <a:latin typeface="微软雅黑" panose="020B0503020204020204" pitchFamily="34" charset="-122"/>
+                          <a:ea typeface="微软雅黑" panose="020B0503020204020204" pitchFamily="34" charset="-122"/>
+                          <a:cs typeface="微软雅黑" panose="020B0503020204020204" pitchFamily="34" charset="-120"/>
                         </a:rPr>
                         <a:t>7算25</a:t>
                       </a:r>
                       <a:endParaRPr lang="en-US" sz="1500" dirty="0">
-                        <a:latin typeface="微软雅黑" charset="0"/>
-                        <a:ea typeface="微软雅黑" charset="0"/>
-                        <a:cs typeface="微软雅黑" charset="0"/>
+                        <a:latin typeface="微软雅黑" panose="020B0503020204020204" pitchFamily="34" charset="-122"/>
+                        <a:ea typeface="微软雅黑" panose="020B0503020204020204" pitchFamily="34" charset="-122"/>
+                        <a:cs typeface="微软雅黑" panose="020B0503020204020204" pitchFamily="34" charset="-122"/>
                       </a:endParaRPr>
                     </a:p>
                   </a:txBody>
-                  <a:tcPr marL="91440" marR="91440" marT="45720" marB="45720" anchor="ctr">
+                  <a:tcPr anchor="ctr">
                     <a:lnL w="9525" cap="flat" cmpd="sng" algn="ctr">
                       <a:solidFill>
                         <a:srgbClr val="D8DBE0"/>
@@ -8462,7 +8324,7 @@
                     <a:bodyPr/>
                     <a:lstStyle/>
                     <a:p>
-                      <a:pPr algn="l" indent="0" marL="0">
+                      <a:pPr marL="0" indent="0" algn="l">
                         <a:buNone/>
                       </a:pPr>
                       <a:r>
@@ -8470,20 +8332,20 @@
                           <a:solidFill>
                             <a:srgbClr val="1F2329"/>
                           </a:solidFill>
-                          <a:latin typeface="微软雅黑" pitchFamily="34" charset="0"/>
-                          <a:ea typeface="微软雅黑" pitchFamily="34" charset="-122"/>
-                          <a:cs typeface="微软雅黑" pitchFamily="34" charset="-120"/>
+                          <a:latin typeface="微软雅黑" panose="020B0503020204020204" pitchFamily="34" charset="-122"/>
+                          <a:ea typeface="微软雅黑" panose="020B0503020204020204" pitchFamily="34" charset="-122"/>
+                          <a:cs typeface="微软雅黑" panose="020B0503020204020204" pitchFamily="34" charset="-120"/>
                         </a:rPr>
                         <a:t>DAG顶点拓扑编号</a:t>
                       </a:r>
                       <a:endParaRPr lang="en-US" sz="1500" dirty="0">
-                        <a:latin typeface="微软雅黑" charset="0"/>
-                        <a:ea typeface="微软雅黑" charset="0"/>
-                        <a:cs typeface="微软雅黑" charset="0"/>
+                        <a:latin typeface="微软雅黑" panose="020B0503020204020204" pitchFamily="34" charset="-122"/>
+                        <a:ea typeface="微软雅黑" panose="020B0503020204020204" pitchFamily="34" charset="-122"/>
+                        <a:cs typeface="微软雅黑" panose="020B0503020204020204" pitchFamily="34" charset="-122"/>
                       </a:endParaRPr>
                     </a:p>
                   </a:txBody>
-                  <a:tcPr marL="91440" marR="91440" marT="45720" marB="45720" anchor="ctr">
+                  <a:tcPr anchor="ctr">
                     <a:lnL w="9525" cap="flat" cmpd="sng" algn="ctr">
                       <a:solidFill>
                         <a:srgbClr val="D8DBE0"/>
@@ -8530,7 +8392,7 @@
                     <a:bodyPr/>
                     <a:lstStyle/>
                     <a:p>
-                      <a:pPr algn="l" indent="0" marL="0">
+                      <a:pPr marL="0" indent="0" algn="l">
                         <a:buNone/>
                       </a:pPr>
                       <a:r>
@@ -8538,20 +8400,20 @@
                           <a:solidFill>
                             <a:srgbClr val="1F2329"/>
                           </a:solidFill>
-                          <a:latin typeface="微软雅黑" pitchFamily="34" charset="0"/>
-                          <a:ea typeface="微软雅黑" pitchFamily="34" charset="-122"/>
-                          <a:cs typeface="微软雅黑" pitchFamily="34" charset="-120"/>
+                          <a:latin typeface="微软雅黑" panose="020B0503020204020204" pitchFamily="34" charset="-122"/>
+                          <a:ea typeface="微软雅黑" panose="020B0503020204020204" pitchFamily="34" charset="-122"/>
+                          <a:cs typeface="微软雅黑" panose="020B0503020204020204" pitchFamily="34" charset="-120"/>
                         </a:rPr>
                         <a:t>按弧方向给顶点编号i&lt;j，拓扑排序的直接应用（2026算法26族）</a:t>
                       </a:r>
                       <a:endParaRPr lang="en-US" sz="1500" dirty="0">
-                        <a:latin typeface="微软雅黑" charset="0"/>
-                        <a:ea typeface="微软雅黑" charset="0"/>
-                        <a:cs typeface="微软雅黑" charset="0"/>
+                        <a:latin typeface="微软雅黑" panose="020B0503020204020204" pitchFamily="34" charset="-122"/>
+                        <a:ea typeface="微软雅黑" panose="020B0503020204020204" pitchFamily="34" charset="-122"/>
+                        <a:cs typeface="微软雅黑" panose="020B0503020204020204" pitchFamily="34" charset="-122"/>
                       </a:endParaRPr>
                     </a:p>
                   </a:txBody>
-                  <a:tcPr marL="91440" marR="91440" marT="45720" marB="45720" anchor="ctr">
+                  <a:tcPr anchor="ctr">
                     <a:lnL w="9525" cap="flat" cmpd="sng" algn="ctr">
                       <a:solidFill>
                         <a:srgbClr val="D8DBE0"/>
@@ -8608,7 +8470,7 @@
 
 <file path=ppt/slides/slide7.xml><?xml version="1.0" encoding="utf-8"?>
 <p:sld xmlns:a="http://schemas.openxmlformats.org/drawingml/2006/main" xmlns:r="http://schemas.openxmlformats.org/officeDocument/2006/relationships" xmlns:p="http://schemas.openxmlformats.org/presentationml/2006/main">
-  <p:cSld name="Slide 7">
+  <p:cSld>
     <p:bg>
       <p:bgPr>
         <a:blipFill dpi="0" rotWithShape="1">
@@ -8652,13 +8514,12 @@
             <a:avLst/>
           </a:prstGeom>
           <a:noFill/>
-          <a:ln/>
         </p:spPr>
         <p:txBody>
           <a:bodyPr wrap="square" rtlCol="0" anchor="ctr"/>
           <a:lstStyle/>
           <a:p>
-            <a:pPr algn="r" indent="0" marL="0">
+            <a:pPr marL="0" indent="0" algn="r">
               <a:buNone/>
             </a:pPr>
             <a:r>
@@ -8666,11 +8527,11 @@
                 <a:solidFill>
                   <a:srgbClr val="8A9099"/>
                 </a:solidFill>
-                <a:latin typeface="微软雅黑" pitchFamily="34" charset="0"/>
-                <a:ea typeface="微软雅黑" pitchFamily="34" charset="-122"/>
-                <a:cs typeface="微软雅黑" pitchFamily="34" charset="-120"/>
+                <a:latin typeface="微软雅黑" panose="020B0503020204020204" pitchFamily="34" charset="-122"/>
+                <a:ea typeface="微软雅黑" panose="020B0503020204020204" pitchFamily="34" charset="-122"/>
+                <a:cs typeface="微软雅黑" panose="020B0503020204020204" pitchFamily="34" charset="-120"/>
               </a:rPr>
-              <a:t>7 / 9</a:t>
+              <a:t>8 / 9</a:t>
             </a:r>
             <a:endParaRPr lang="en-US" sz="1000" dirty="0"/>
           </a:p>
@@ -8691,13 +8552,12 @@
             <a:avLst/>
           </a:prstGeom>
           <a:noFill/>
-          <a:ln/>
         </p:spPr>
         <p:txBody>
           <a:bodyPr wrap="square" rtlCol="0" anchor="ctr"/>
           <a:lstStyle/>
           <a:p>
-            <a:pPr algn="l" indent="0" marL="0">
+            <a:pPr marL="0" indent="0" algn="l">
               <a:buNone/>
             </a:pPr>
             <a:r>
@@ -8705,11 +8565,11 @@
                 <a:solidFill>
                   <a:srgbClr val="1F4E9C"/>
                 </a:solidFill>
-                <a:latin typeface="微软雅黑" pitchFamily="34" charset="0"/>
-                <a:ea typeface="微软雅黑" pitchFamily="34" charset="-122"/>
-                <a:cs typeface="微软雅黑" pitchFamily="34" charset="-120"/>
+                <a:latin typeface="微软雅黑" panose="020B0503020204020204" pitchFamily="34" charset="-122"/>
+                <a:ea typeface="微软雅黑" panose="020B0503020204020204" pitchFamily="34" charset="-122"/>
+                <a:cs typeface="微软雅黑" panose="020B0503020204020204" pitchFamily="34" charset="-120"/>
               </a:rPr>
-              <a:t>可做可不做</a:t>
+              <a:t>完全不做</a:t>
             </a:r>
             <a:endParaRPr lang="en-US" sz="1400" dirty="0"/>
           </a:p>
@@ -8730,13 +8590,12 @@
             <a:avLst/>
           </a:prstGeom>
           <a:noFill/>
-          <a:ln/>
         </p:spPr>
         <p:txBody>
           <a:bodyPr wrap="square" rtlCol="0" anchor="ctr"/>
           <a:lstStyle/>
           <a:p>
-            <a:pPr algn="l" indent="0" marL="0">
+            <a:pPr marL="0" indent="0" algn="l">
               <a:buNone/>
             </a:pPr>
             <a:r>
@@ -8744,11 +8603,11 @@
                 <a:solidFill>
                   <a:srgbClr val="1F2329"/>
                 </a:solidFill>
-                <a:latin typeface="微软雅黑" pitchFamily="34" charset="0"/>
-                <a:ea typeface="微软雅黑" pitchFamily="34" charset="-122"/>
-                <a:cs typeface="微软雅黑" pitchFamily="34" charset="-120"/>
+                <a:latin typeface="微软雅黑" panose="020B0503020204020204" pitchFamily="34" charset="-122"/>
+                <a:ea typeface="微软雅黑" panose="020B0503020204020204" pitchFamily="34" charset="-122"/>
+                <a:cs typeface="微软雅黑" panose="020B0503020204020204" pitchFamily="34" charset="-120"/>
               </a:rPr>
-              <a:t>可做可不做清单</a:t>
+              <a:t>完全不做清单</a:t>
             </a:r>
             <a:endParaRPr lang="en-US" sz="2800" dirty="0"/>
           </a:p>
@@ -8756,21 +8615,15 @@
       </p:sp>
       <p:graphicFrame>
         <p:nvGraphicFramePr>
-          <p:cNvPr id="8" name="Table 0"/>
+          <p:cNvPr id="9" name="Table 0"/>
           <p:cNvGraphicFramePr>
             <a:graphicFrameLocks noGrp="1"/>
           </p:cNvGraphicFramePr>
-          <p:nvPr>
-            <p:extLst>
-              <p:ext uri="{D42A27DB-BD31-4B8C-83A1-F6EECF244321}">
-                <p14:modId xmlns:p14="http://schemas.microsoft.com/office/powerpoint/2010/main" val="1579011935"/>
-              </p:ext>
-            </p:extLst>
-          </p:nvPr>
+          <p:nvPr/>
         </p:nvGraphicFramePr>
         <p:xfrm>
           <a:off x="822960" y="2395728"/>
-          <a:ext cx="10545775" cy="914400"/>
+          <a:ext cx="10545775" cy="2523744"/>
         </p:xfrm>
         <a:graphic>
           <a:graphicData uri="http://schemas.openxmlformats.org/drawingml/2006/table">
@@ -8786,7 +8639,7 @@
                     <a:bodyPr/>
                     <a:lstStyle/>
                     <a:p>
-                      <a:pPr algn="l" indent="0" marL="0">
+                      <a:pPr marL="0" indent="0" algn="l">
                         <a:buNone/>
                       </a:pPr>
                       <a:r>
@@ -8794,20 +8647,20 @@
                           <a:solidFill>
                             <a:srgbClr val="1F4E9C"/>
                           </a:solidFill>
-                          <a:latin typeface="微软雅黑" pitchFamily="34" charset="0"/>
-                          <a:ea typeface="微软雅黑" pitchFamily="34" charset="-122"/>
-                          <a:cs typeface="微软雅黑" pitchFamily="34" charset="-120"/>
+                          <a:latin typeface="微软雅黑" panose="020B0503020204020204" pitchFamily="34" charset="-122"/>
+                          <a:ea typeface="微软雅黑" panose="020B0503020204020204" pitchFamily="34" charset="-122"/>
+                          <a:cs typeface="微软雅黑" panose="020B0503020204020204" pitchFamily="34" charset="-120"/>
                         </a:rPr>
-                        <a:t>分组</a:t>
+                        <a:t>内容</a:t>
                       </a:r>
                       <a:endParaRPr lang="en-US" sz="1500" dirty="0">
-                        <a:latin typeface="微软雅黑" charset="0"/>
-                        <a:ea typeface="微软雅黑" charset="0"/>
-                        <a:cs typeface="微软雅黑" charset="0"/>
+                        <a:latin typeface="微软雅黑" panose="020B0503020204020204" pitchFamily="34" charset="-122"/>
+                        <a:ea typeface="微软雅黑" panose="020B0503020204020204" pitchFamily="34" charset="-122"/>
+                        <a:cs typeface="微软雅黑" panose="020B0503020204020204" pitchFamily="34" charset="-122"/>
                       </a:endParaRPr>
                     </a:p>
                   </a:txBody>
-                  <a:tcPr marL="91440" marR="91440" marT="45720" marB="45720" anchor="ctr">
+                  <a:tcPr anchor="ctr">
                     <a:lnL w="9525" cap="flat" cmpd="sng" algn="ctr">
                       <a:solidFill>
                         <a:srgbClr val="D8DBE0"/>
@@ -8854,7 +8707,7 @@
                     <a:bodyPr/>
                     <a:lstStyle/>
                     <a:p>
-                      <a:pPr algn="l" indent="0" marL="0">
+                      <a:pPr marL="0" indent="0" algn="l">
                         <a:buNone/>
                       </a:pPr>
                       <a:r>
@@ -8862,20 +8715,20 @@
                           <a:solidFill>
                             <a:srgbClr val="1F4E9C"/>
                           </a:solidFill>
-                          <a:latin typeface="微软雅黑" pitchFamily="34" charset="0"/>
-                          <a:ea typeface="微软雅黑" pitchFamily="34" charset="-122"/>
-                          <a:cs typeface="微软雅黑" pitchFamily="34" charset="-120"/>
+                          <a:latin typeface="微软雅黑" panose="020B0503020204020204" pitchFamily="34" charset="-122"/>
+                          <a:ea typeface="微软雅黑" panose="020B0503020204020204" pitchFamily="34" charset="-122"/>
+                          <a:cs typeface="微软雅黑" panose="020B0503020204020204" pitchFamily="34" charset="-120"/>
                         </a:rPr>
                         <a:t>题号</a:t>
                       </a:r>
                       <a:endParaRPr lang="en-US" sz="1500" dirty="0">
-                        <a:latin typeface="微软雅黑" charset="0"/>
-                        <a:ea typeface="微软雅黑" charset="0"/>
-                        <a:cs typeface="微软雅黑" charset="0"/>
+                        <a:latin typeface="微软雅黑" panose="020B0503020204020204" pitchFamily="34" charset="-122"/>
+                        <a:ea typeface="微软雅黑" panose="020B0503020204020204" pitchFamily="34" charset="-122"/>
+                        <a:cs typeface="微软雅黑" panose="020B0503020204020204" pitchFamily="34" charset="-122"/>
                       </a:endParaRPr>
                     </a:p>
                   </a:txBody>
-                  <a:tcPr marL="91440" marR="91440" marT="45720" marB="45720" anchor="ctr">
+                  <a:tcPr anchor="ctr">
                     <a:lnL w="9525" cap="flat" cmpd="sng" algn="ctr">
                       <a:solidFill>
                         <a:srgbClr val="D8DBE0"/>
@@ -8924,7 +8777,7 @@
                     <a:bodyPr/>
                     <a:lstStyle/>
                     <a:p>
-                      <a:pPr algn="l" indent="0" marL="0">
+                      <a:pPr marL="0" indent="0" algn="l">
                         <a:buNone/>
                       </a:pPr>
                       <a:r>
@@ -8932,20 +8785,20 @@
                           <a:solidFill>
                             <a:srgbClr val="1F2329"/>
                           </a:solidFill>
-                          <a:latin typeface="微软雅黑" pitchFamily="34" charset="0"/>
-                          <a:ea typeface="微软雅黑" pitchFamily="34" charset="-122"/>
-                          <a:cs typeface="微软雅黑" pitchFamily="34" charset="-120"/>
+                          <a:latin typeface="微软雅黑" panose="020B0503020204020204" pitchFamily="34" charset="-122"/>
+                          <a:ea typeface="微软雅黑" panose="020B0503020204020204" pitchFamily="34" charset="-122"/>
+                          <a:cs typeface="微软雅黑" panose="020B0503020204020204" pitchFamily="34" charset="-120"/>
                         </a:rPr>
-                        <a:t>选择题：图的概念与存储（度/连通/强连通概念…</a:t>
+                        <a:t>关节点（重连通）</a:t>
                       </a:r>
                       <a:endParaRPr lang="en-US" sz="1500" dirty="0">
-                        <a:latin typeface="微软雅黑" charset="0"/>
-                        <a:ea typeface="微软雅黑" charset="0"/>
-                        <a:cs typeface="微软雅黑" charset="0"/>
+                        <a:latin typeface="微软雅黑" panose="020B0503020204020204" pitchFamily="34" charset="-122"/>
+                        <a:ea typeface="微软雅黑" panose="020B0503020204020204" pitchFamily="34" charset="-122"/>
+                        <a:cs typeface="微软雅黑" panose="020B0503020204020204" pitchFamily="34" charset="-122"/>
                       </a:endParaRPr>
                     </a:p>
                   </a:txBody>
-                  <a:tcPr marL="91440" marR="91440" marT="45720" marB="45720" anchor="ctr">
+                  <a:tcPr anchor="ctr">
                     <a:lnL w="9525" cap="flat" cmpd="sng" algn="ctr">
                       <a:solidFill>
                         <a:srgbClr val="D8DBE0"/>
@@ -8992,7 +8845,7 @@
                     <a:bodyPr/>
                     <a:lstStyle/>
                     <a:p>
-                      <a:pPr algn="l" indent="0" marL="0">
+                      <a:pPr marL="0" indent="0" algn="l">
                         <a:buNone/>
                       </a:pPr>
                       <a:r>
@@ -9000,20 +8853,20 @@
                           <a:solidFill>
                             <a:srgbClr val="1F2329"/>
                           </a:solidFill>
-                          <a:latin typeface="微软雅黑" pitchFamily="34" charset="0"/>
-                          <a:ea typeface="微软雅黑" pitchFamily="34" charset="-122"/>
-                          <a:cs typeface="微软雅黑" pitchFamily="34" charset="-120"/>
+                          <a:latin typeface="微软雅黑" panose="020B0503020204020204" pitchFamily="34" charset="-122"/>
+                          <a:ea typeface="微软雅黑" panose="020B0503020204020204" pitchFamily="34" charset="-122"/>
+                          <a:cs typeface="微软雅黑" panose="020B0503020204020204" pitchFamily="34" charset="-120"/>
                         </a:rPr>
-                        <a:t>选2—7、9—20、23、24</a:t>
+                        <a:t>选26；答8</a:t>
                       </a:r>
                       <a:endParaRPr lang="en-US" sz="1500" dirty="0">
-                        <a:latin typeface="微软雅黑" charset="0"/>
-                        <a:ea typeface="微软雅黑" charset="0"/>
-                        <a:cs typeface="微软雅黑" charset="0"/>
+                        <a:latin typeface="微软雅黑" panose="020B0503020204020204" pitchFamily="34" charset="-122"/>
+                        <a:ea typeface="微软雅黑" panose="020B0503020204020204" pitchFamily="34" charset="-122"/>
+                        <a:cs typeface="微软雅黑" panose="020B0503020204020204" pitchFamily="34" charset="-122"/>
                       </a:endParaRPr>
                     </a:p>
                   </a:txBody>
-                  <a:tcPr marL="91440" marR="91440" marT="45720" marB="45720" anchor="ctr">
+                  <a:tcPr anchor="ctr">
                     <a:lnL w="9525" cap="flat" cmpd="sng" algn="ctr">
                       <a:solidFill>
                         <a:srgbClr val="D8DBE0"/>
@@ -9062,7 +8915,7 @@
                     <a:bodyPr/>
                     <a:lstStyle/>
                     <a:p>
-                      <a:pPr algn="l" indent="0" marL="0">
+                      <a:pPr marL="0" indent="0" algn="l">
                         <a:buNone/>
                       </a:pPr>
                       <a:r>
@@ -9070,20 +8923,20 @@
                           <a:solidFill>
                             <a:srgbClr val="1F2329"/>
                           </a:solidFill>
-                          <a:latin typeface="微软雅黑" pitchFamily="34" charset="0"/>
-                          <a:ea typeface="微软雅黑" pitchFamily="34" charset="-122"/>
-                          <a:cs typeface="微软雅黑" pitchFamily="34" charset="-120"/>
+                          <a:latin typeface="微软雅黑" panose="020B0503020204020204" pitchFamily="34" charset="-122"/>
+                          <a:ea typeface="微软雅黑" panose="020B0503020204020204" pitchFamily="34" charset="-122"/>
+                          <a:cs typeface="微软雅黑" panose="020B0503020204020204" pitchFamily="34" charset="-120"/>
                         </a:rPr>
-                        <a:t>解答题：图概念巩固（邻接矩阵幂、传递性、MS…</a:t>
+                        <a:t>证明与推导题</a:t>
                       </a:r>
                       <a:endParaRPr lang="en-US" sz="1500" dirty="0">
-                        <a:latin typeface="微软雅黑" charset="0"/>
-                        <a:ea typeface="微软雅黑" charset="0"/>
-                        <a:cs typeface="微软雅黑" charset="0"/>
+                        <a:latin typeface="微软雅黑" panose="020B0503020204020204" pitchFamily="34" charset="-122"/>
+                        <a:ea typeface="微软雅黑" panose="020B0503020204020204" pitchFamily="34" charset="-122"/>
+                        <a:cs typeface="微软雅黑" panose="020B0503020204020204" pitchFamily="34" charset="-122"/>
                       </a:endParaRPr>
                     </a:p>
                   </a:txBody>
-                  <a:tcPr marL="91440" marR="91440" marT="45720" marB="45720" anchor="ctr">
+                  <a:tcPr anchor="ctr">
                     <a:lnL w="9525" cap="flat" cmpd="sng" algn="ctr">
                       <a:solidFill>
                         <a:srgbClr val="D8DBE0"/>
@@ -9130,7 +8983,7 @@
                     <a:bodyPr/>
                     <a:lstStyle/>
                     <a:p>
-                      <a:pPr algn="l" indent="0" marL="0">
+                      <a:pPr marL="0" indent="0" algn="l">
                         <a:buNone/>
                       </a:pPr>
                       <a:r>
@@ -9138,20 +8991,20 @@
                           <a:solidFill>
                             <a:srgbClr val="1F2329"/>
                           </a:solidFill>
-                          <a:latin typeface="微软雅黑" pitchFamily="34" charset="0"/>
-                          <a:ea typeface="微软雅黑" pitchFamily="34" charset="-122"/>
-                          <a:cs typeface="微软雅黑" pitchFamily="34" charset="-120"/>
+                          <a:latin typeface="微软雅黑" panose="020B0503020204020204" pitchFamily="34" charset="-122"/>
+                          <a:ea typeface="微软雅黑" panose="020B0503020204020204" pitchFamily="34" charset="-122"/>
+                          <a:cs typeface="微软雅黑" panose="020B0503020204020204" pitchFamily="34" charset="-120"/>
                         </a:rPr>
-                        <a:t>答1—3</a:t>
+                        <a:t>答6、12；算17</a:t>
                       </a:r>
                       <a:endParaRPr lang="en-US" sz="1500" dirty="0">
-                        <a:latin typeface="微软雅黑" charset="0"/>
-                        <a:ea typeface="微软雅黑" charset="0"/>
-                        <a:cs typeface="微软雅黑" charset="0"/>
+                        <a:latin typeface="微软雅黑" panose="020B0503020204020204" pitchFamily="34" charset="-122"/>
+                        <a:ea typeface="微软雅黑" panose="020B0503020204020204" pitchFamily="34" charset="-122"/>
+                        <a:cs typeface="微软雅黑" panose="020B0503020204020204" pitchFamily="34" charset="-122"/>
                       </a:endParaRPr>
                     </a:p>
                   </a:txBody>
-                  <a:tcPr marL="91440" marR="91440" marT="45720" marB="45720" anchor="ctr">
+                  <a:tcPr anchor="ctr">
                     <a:lnL w="9525" cap="flat" cmpd="sng" algn="ctr">
                       <a:solidFill>
                         <a:srgbClr val="D8DBE0"/>
@@ -9200,7 +9053,7 @@
                     <a:bodyPr/>
                     <a:lstStyle/>
                     <a:p>
-                      <a:pPr algn="l" indent="0" marL="0">
+                      <a:pPr marL="0" indent="0" algn="l">
                         <a:buNone/>
                       </a:pPr>
                       <a:r>
@@ -9208,20 +9061,20 @@
                           <a:solidFill>
                             <a:srgbClr val="1F2329"/>
                           </a:solidFill>
-                          <a:latin typeface="微软雅黑" pitchFamily="34" charset="0"/>
-                          <a:ea typeface="微软雅黑" pitchFamily="34" charset="-122"/>
-                          <a:cs typeface="微软雅黑" pitchFamily="34" charset="-120"/>
+                          <a:latin typeface="微软雅黑" panose="020B0503020204020204" pitchFamily="34" charset="-122"/>
+                          <a:ea typeface="微软雅黑" panose="020B0503020204020204" pitchFamily="34" charset="-122"/>
+                          <a:cs typeface="微软雅黑" panose="020B0503020204020204" pitchFamily="34" charset="-120"/>
                         </a:rPr>
-                        <a:t>算法设计题：图算法域内巩固（建图与基本操作、…</a:t>
+                        <a:t>十字链表与邻接多重表</a:t>
                       </a:r>
                       <a:endParaRPr lang="en-US" sz="1500" dirty="0">
-                        <a:latin typeface="微软雅黑" charset="0"/>
-                        <a:ea typeface="微软雅黑" charset="0"/>
-                        <a:cs typeface="微软雅黑" charset="0"/>
+                        <a:latin typeface="微软雅黑" panose="020B0503020204020204" pitchFamily="34" charset="-122"/>
+                        <a:ea typeface="微软雅黑" panose="020B0503020204020204" pitchFamily="34" charset="-122"/>
+                        <a:cs typeface="微软雅黑" panose="020B0503020204020204" pitchFamily="34" charset="-122"/>
                       </a:endParaRPr>
                     </a:p>
                   </a:txBody>
-                  <a:tcPr marL="91440" marR="91440" marT="45720" marB="45720" anchor="ctr">
+                  <a:tcPr anchor="ctr">
                     <a:lnL w="9525" cap="flat" cmpd="sng" algn="ctr">
                       <a:solidFill>
                         <a:srgbClr val="D8DBE0"/>
@@ -9268,7 +9121,7 @@
                     <a:bodyPr/>
                     <a:lstStyle/>
                     <a:p>
-                      <a:pPr algn="l" indent="0" marL="0">
+                      <a:pPr marL="0" indent="0" algn="l">
                         <a:buNone/>
                       </a:pPr>
                       <a:r>
@@ -9276,20 +9129,20 @@
                           <a:solidFill>
                             <a:srgbClr val="1F2329"/>
                           </a:solidFill>
-                          <a:latin typeface="微软雅黑" pitchFamily="34" charset="0"/>
-                          <a:ea typeface="微软雅黑" pitchFamily="34" charset="-122"/>
-                          <a:cs typeface="微软雅黑" pitchFamily="34" charset="-120"/>
+                          <a:latin typeface="微软雅黑" panose="020B0503020204020204" pitchFamily="34" charset="-122"/>
+                          <a:ea typeface="微软雅黑" panose="020B0503020204020204" pitchFamily="34" charset="-122"/>
+                          <a:cs typeface="微软雅黑" panose="020B0503020204020204" pitchFamily="34" charset="-120"/>
                         </a:rPr>
-                        <a:t>算1—3、7—12、15、20、21、23、24…</a:t>
+                        <a:t>算4—6</a:t>
                       </a:r>
                       <a:endParaRPr lang="en-US" sz="1500" dirty="0">
-                        <a:latin typeface="微软雅黑" charset="0"/>
-                        <a:ea typeface="微软雅黑" charset="0"/>
-                        <a:cs typeface="微软雅黑" charset="0"/>
+                        <a:latin typeface="微软雅黑" panose="020B0503020204020204" pitchFamily="34" charset="-122"/>
+                        <a:ea typeface="微软雅黑" panose="020B0503020204020204" pitchFamily="34" charset="-122"/>
+                        <a:cs typeface="微软雅黑" panose="020B0503020204020204" pitchFamily="34" charset="-122"/>
                       </a:endParaRPr>
                     </a:p>
                   </a:txBody>
-                  <a:tcPr marL="91440" marR="91440" marT="45720" marB="45720" anchor="ctr">
+                  <a:tcPr anchor="ctr">
                     <a:lnL w="9525" cap="flat" cmpd="sng" algn="ctr">
                       <a:solidFill>
                         <a:srgbClr val="D8DBE0"/>
@@ -9338,7 +9191,7 @@
                     <a:bodyPr/>
                     <a:lstStyle/>
                     <a:p>
-                      <a:pPr algn="l" indent="0" marL="0">
+                      <a:pPr marL="0" indent="0" algn="l">
                         <a:buNone/>
                       </a:pPr>
                       <a:r>
@@ -9346,20 +9199,20 @@
                           <a:solidFill>
                             <a:srgbClr val="1F2329"/>
                           </a:solidFill>
-                          <a:latin typeface="微软雅黑" pitchFamily="34" charset="0"/>
-                          <a:ea typeface="微软雅黑" pitchFamily="34" charset="-122"/>
-                          <a:cs typeface="微软雅黑" pitchFamily="34" charset="-120"/>
+                          <a:latin typeface="微软雅黑" panose="020B0503020204020204" pitchFamily="34" charset="-122"/>
+                          <a:ea typeface="微软雅黑" panose="020B0503020204020204" pitchFamily="34" charset="-122"/>
+                          <a:cs typeface="微软雅黑" panose="020B0503020204020204" pitchFamily="34" charset="-120"/>
                         </a:rPr>
-                        <a:t>（续）</a:t>
+                        <a:t>DFS编号体系</a:t>
                       </a:r>
                       <a:endParaRPr lang="en-US" sz="1500" dirty="0">
-                        <a:latin typeface="微软雅黑" charset="0"/>
-                        <a:ea typeface="微软雅黑" charset="0"/>
-                        <a:cs typeface="微软雅黑" charset="0"/>
+                        <a:latin typeface="微软雅黑" panose="020B0503020204020204" pitchFamily="34" charset="-122"/>
+                        <a:ea typeface="微软雅黑" panose="020B0503020204020204" pitchFamily="34" charset="-122"/>
+                        <a:cs typeface="微软雅黑" panose="020B0503020204020204" pitchFamily="34" charset="-122"/>
                       </a:endParaRPr>
                     </a:p>
                   </a:txBody>
-                  <a:tcPr marL="91440" marR="91440" marT="45720" marB="45720" anchor="ctr">
+                  <a:tcPr anchor="ctr">
                     <a:lnL w="9525" cap="flat" cmpd="sng" algn="ctr">
                       <a:solidFill>
                         <a:srgbClr val="D8DBE0"/>
@@ -9406,7 +9259,7 @@
                     <a:bodyPr/>
                     <a:lstStyle/>
                     <a:p>
-                      <a:pPr algn="l" indent="0" marL="0">
+                      <a:pPr marL="0" indent="0" algn="l">
                         <a:buNone/>
                       </a:pPr>
                       <a:r>
@@ -9414,20 +9267,158 @@
                           <a:solidFill>
                             <a:srgbClr val="1F2329"/>
                           </a:solidFill>
-                          <a:latin typeface="微软雅黑" pitchFamily="34" charset="0"/>
-                          <a:ea typeface="微软雅黑" pitchFamily="34" charset="-122"/>
-                          <a:cs typeface="微软雅黑" pitchFamily="34" charset="-120"/>
+                          <a:latin typeface="微软雅黑" panose="020B0503020204020204" pitchFamily="34" charset="-122"/>
+                          <a:ea typeface="微软雅黑" panose="020B0503020204020204" pitchFamily="34" charset="-122"/>
+                          <a:cs typeface="微软雅黑" panose="020B0503020204020204" pitchFamily="34" charset="-120"/>
                         </a:rPr>
-                        <a:t>26—34</a:t>
+                        <a:t>算16</a:t>
                       </a:r>
                       <a:endParaRPr lang="en-US" sz="1500" dirty="0">
-                        <a:latin typeface="微软雅黑" charset="0"/>
-                        <a:ea typeface="微软雅黑" charset="0"/>
-                        <a:cs typeface="微软雅黑" charset="0"/>
+                        <a:latin typeface="微软雅黑" panose="020B0503020204020204" pitchFamily="34" charset="-122"/>
+                        <a:ea typeface="微软雅黑" panose="020B0503020204020204" pitchFamily="34" charset="-122"/>
+                        <a:cs typeface="微软雅黑" panose="020B0503020204020204" pitchFamily="34" charset="-122"/>
                       </a:endParaRPr>
                     </a:p>
                   </a:txBody>
-                  <a:tcPr marL="91440" marR="91440" marT="45720" marB="45720" anchor="ctr">
+                  <a:tcPr anchor="ctr">
+                    <a:lnL w="9525" cap="flat" cmpd="sng" algn="ctr">
+                      <a:solidFill>
+                        <a:srgbClr val="D8DBE0"/>
+                      </a:solidFill>
+                      <a:prstDash val="solid"/>
+                      <a:round/>
+                      <a:headEnd type="none" w="med" len="med"/>
+                      <a:tailEnd type="none" w="med" len="med"/>
+                    </a:lnL>
+                    <a:lnR w="9525" cap="flat" cmpd="sng" algn="ctr">
+                      <a:solidFill>
+                        <a:srgbClr val="D8DBE0"/>
+                      </a:solidFill>
+                      <a:prstDash val="solid"/>
+                      <a:round/>
+                      <a:headEnd type="none" w="med" len="med"/>
+                      <a:tailEnd type="none" w="med" len="med"/>
+                    </a:lnR>
+                    <a:lnT w="9525" cap="flat" cmpd="sng" algn="ctr">
+                      <a:solidFill>
+                        <a:srgbClr val="D8DBE0"/>
+                      </a:solidFill>
+                      <a:prstDash val="solid"/>
+                      <a:round/>
+                      <a:headEnd type="none" w="med" len="med"/>
+                      <a:tailEnd type="none" w="med" len="med"/>
+                    </a:lnT>
+                    <a:lnB w="9525" cap="flat" cmpd="sng" algn="ctr">
+                      <a:solidFill>
+                        <a:srgbClr val="D8DBE0"/>
+                      </a:solidFill>
+                      <a:prstDash val="solid"/>
+                      <a:round/>
+                      <a:headEnd type="none" w="med" len="med"/>
+                      <a:tailEnd type="none" w="med" len="med"/>
+                    </a:lnB>
+                    <a:solidFill>
+                      <a:srgbClr val="FFFFFF"/>
+                    </a:solidFill>
+                  </a:tcPr>
+                </a:tc>
+              </a:tr>
+              <a:tr h="420624">
+                <a:tc>
+                  <a:txBody>
+                    <a:bodyPr/>
+                    <a:lstStyle/>
+                    <a:p>
+                      <a:pPr marL="0" indent="0" algn="l">
+                        <a:buNone/>
+                      </a:pPr>
+                      <a:r>
+                        <a:rPr lang="en-US" sz="1500" dirty="0">
+                          <a:solidFill>
+                            <a:srgbClr val="1F2329"/>
+                          </a:solidFill>
+                          <a:latin typeface="微软雅黑" panose="020B0503020204020204" pitchFamily="34" charset="-122"/>
+                          <a:ea typeface="微软雅黑" panose="020B0503020204020204" pitchFamily="34" charset="-122"/>
+                          <a:cs typeface="微软雅黑" panose="020B0503020204020204" pitchFamily="34" charset="-120"/>
+                        </a:rPr>
+                        <a:t>强连通分量算法</a:t>
+                      </a:r>
+                      <a:endParaRPr lang="en-US" sz="1500" dirty="0">
+                        <a:latin typeface="微软雅黑" panose="020B0503020204020204" pitchFamily="34" charset="-122"/>
+                        <a:ea typeface="微软雅黑" panose="020B0503020204020204" pitchFamily="34" charset="-122"/>
+                        <a:cs typeface="微软雅黑" panose="020B0503020204020204" pitchFamily="34" charset="-122"/>
+                      </a:endParaRPr>
+                    </a:p>
+                  </a:txBody>
+                  <a:tcPr anchor="ctr">
+                    <a:lnL w="9525" cap="flat" cmpd="sng" algn="ctr">
+                      <a:solidFill>
+                        <a:srgbClr val="D8DBE0"/>
+                      </a:solidFill>
+                      <a:prstDash val="solid"/>
+                      <a:round/>
+                      <a:headEnd type="none" w="med" len="med"/>
+                      <a:tailEnd type="none" w="med" len="med"/>
+                    </a:lnL>
+                    <a:lnR w="9525" cap="flat" cmpd="sng" algn="ctr">
+                      <a:solidFill>
+                        <a:srgbClr val="D8DBE0"/>
+                      </a:solidFill>
+                      <a:prstDash val="solid"/>
+                      <a:round/>
+                      <a:headEnd type="none" w="med" len="med"/>
+                      <a:tailEnd type="none" w="med" len="med"/>
+                    </a:lnR>
+                    <a:lnT w="9525" cap="flat" cmpd="sng" algn="ctr">
+                      <a:solidFill>
+                        <a:srgbClr val="D8DBE0"/>
+                      </a:solidFill>
+                      <a:prstDash val="solid"/>
+                      <a:round/>
+                      <a:headEnd type="none" w="med" len="med"/>
+                      <a:tailEnd type="none" w="med" len="med"/>
+                    </a:lnT>
+                    <a:lnB w="9525" cap="flat" cmpd="sng" algn="ctr">
+                      <a:solidFill>
+                        <a:srgbClr val="D8DBE0"/>
+                      </a:solidFill>
+                      <a:prstDash val="solid"/>
+                      <a:round/>
+                      <a:headEnd type="none" w="med" len="med"/>
+                      <a:tailEnd type="none" w="med" len="med"/>
+                    </a:lnB>
+                    <a:solidFill>
+                      <a:srgbClr val="FFFFFF"/>
+                    </a:solidFill>
+                  </a:tcPr>
+                </a:tc>
+                <a:tc>
+                  <a:txBody>
+                    <a:bodyPr/>
+                    <a:lstStyle/>
+                    <a:p>
+                      <a:pPr marL="0" indent="0" algn="l">
+                        <a:buNone/>
+                      </a:pPr>
+                      <a:r>
+                        <a:rPr lang="en-US" sz="1500" dirty="0">
+                          <a:solidFill>
+                            <a:srgbClr val="1F2329"/>
+                          </a:solidFill>
+                          <a:latin typeface="微软雅黑" panose="020B0503020204020204" pitchFamily="34" charset="-122"/>
+                          <a:ea typeface="微软雅黑" panose="020B0503020204020204" pitchFamily="34" charset="-122"/>
+                          <a:cs typeface="微软雅黑" panose="020B0503020204020204" pitchFamily="34" charset="-120"/>
+                        </a:rPr>
+                        <a:t>算22</a:t>
+                      </a:r>
+                      <a:endParaRPr lang="en-US" sz="1500" dirty="0">
+                        <a:latin typeface="微软雅黑" panose="020B0503020204020204" pitchFamily="34" charset="-122"/>
+                        <a:ea typeface="微软雅黑" panose="020B0503020204020204" pitchFamily="34" charset="-122"/>
+                        <a:cs typeface="微软雅黑" panose="020B0503020204020204" pitchFamily="34" charset="-122"/>
+                      </a:endParaRPr>
+                    </a:p>
+                  </a:txBody>
+                  <a:tcPr anchor="ctr">
                     <a:lnL w="9525" cap="flat" cmpd="sng" algn="ctr">
                       <a:solidFill>
                         <a:srgbClr val="D8DBE0"/>
@@ -9484,7 +9475,7 @@
 
 <file path=ppt/slides/slide8.xml><?xml version="1.0" encoding="utf-8"?>
 <p:sld xmlns:a="http://schemas.openxmlformats.org/drawingml/2006/main" xmlns:r="http://schemas.openxmlformats.org/officeDocument/2006/relationships" xmlns:p="http://schemas.openxmlformats.org/presentationml/2006/main">
-  <p:cSld name="Slide 8">
+  <p:cSld>
     <p:bg>
       <p:bgPr>
         <a:blipFill dpi="0" rotWithShape="1">
@@ -9528,13 +9519,12 @@
             <a:avLst/>
           </a:prstGeom>
           <a:noFill/>
-          <a:ln/>
         </p:spPr>
         <p:txBody>
           <a:bodyPr wrap="square" rtlCol="0" anchor="ctr"/>
           <a:lstStyle/>
           <a:p>
-            <a:pPr algn="r" indent="0" marL="0">
+            <a:pPr marL="0" indent="0" algn="r">
               <a:buNone/>
             </a:pPr>
             <a:r>
@@ -9542,11 +9532,11 @@
                 <a:solidFill>
                   <a:srgbClr val="8A9099"/>
                 </a:solidFill>
-                <a:latin typeface="微软雅黑" pitchFamily="34" charset="0"/>
-                <a:ea typeface="微软雅黑" pitchFamily="34" charset="-122"/>
-                <a:cs typeface="微软雅黑" pitchFamily="34" charset="-120"/>
+                <a:latin typeface="微软雅黑" panose="020B0503020204020204" pitchFamily="34" charset="-122"/>
+                <a:ea typeface="微软雅黑" panose="020B0503020204020204" pitchFamily="34" charset="-122"/>
+                <a:cs typeface="微软雅黑" panose="020B0503020204020204" pitchFamily="34" charset="-120"/>
               </a:rPr>
-              <a:t>8 / 9</a:t>
+              <a:t>7 / 9</a:t>
             </a:r>
             <a:endParaRPr lang="en-US" sz="1000" dirty="0"/>
           </a:p>
@@ -9567,13 +9557,12 @@
             <a:avLst/>
           </a:prstGeom>
           <a:noFill/>
-          <a:ln/>
         </p:spPr>
         <p:txBody>
           <a:bodyPr wrap="square" rtlCol="0" anchor="ctr"/>
           <a:lstStyle/>
           <a:p>
-            <a:pPr algn="l" indent="0" marL="0">
+            <a:pPr marL="0" indent="0" algn="l">
               <a:buNone/>
             </a:pPr>
             <a:r>
@@ -9581,11 +9570,11 @@
                 <a:solidFill>
                   <a:srgbClr val="1F4E9C"/>
                 </a:solidFill>
-                <a:latin typeface="微软雅黑" pitchFamily="34" charset="0"/>
-                <a:ea typeface="微软雅黑" pitchFamily="34" charset="-122"/>
-                <a:cs typeface="微软雅黑" pitchFamily="34" charset="-120"/>
+                <a:latin typeface="微软雅黑" panose="020B0503020204020204" pitchFamily="34" charset="-122"/>
+                <a:ea typeface="微软雅黑" panose="020B0503020204020204" pitchFamily="34" charset="-122"/>
+                <a:cs typeface="微软雅黑" panose="020B0503020204020204" pitchFamily="34" charset="-120"/>
               </a:rPr>
-              <a:t>完全不做</a:t>
+              <a:t>可做可不做</a:t>
             </a:r>
             <a:endParaRPr lang="en-US" sz="1400" dirty="0"/>
           </a:p>
@@ -9606,13 +9595,12 @@
             <a:avLst/>
           </a:prstGeom>
           <a:noFill/>
-          <a:ln/>
         </p:spPr>
         <p:txBody>
           <a:bodyPr wrap="square" rtlCol="0" anchor="ctr"/>
           <a:lstStyle/>
           <a:p>
-            <a:pPr algn="l" indent="0" marL="0">
+            <a:pPr marL="0" indent="0" algn="l">
               <a:buNone/>
             </a:pPr>
             <a:r>
@@ -9620,11 +9608,11 @@
                 <a:solidFill>
                   <a:srgbClr val="1F2329"/>
                 </a:solidFill>
-                <a:latin typeface="微软雅黑" pitchFamily="34" charset="0"/>
-                <a:ea typeface="微软雅黑" pitchFamily="34" charset="-122"/>
-                <a:cs typeface="微软雅黑" pitchFamily="34" charset="-120"/>
+                <a:latin typeface="微软雅黑" panose="020B0503020204020204" pitchFamily="34" charset="-122"/>
+                <a:ea typeface="微软雅黑" panose="020B0503020204020204" pitchFamily="34" charset="-122"/>
+                <a:cs typeface="微软雅黑" panose="020B0503020204020204" pitchFamily="34" charset="-120"/>
               </a:rPr>
-              <a:t>完全不做清单</a:t>
+              <a:t>可做可不做清单</a:t>
             </a:r>
             <a:endParaRPr lang="en-US" sz="2800" dirty="0"/>
           </a:p>
@@ -9632,21 +9620,15 @@
       </p:sp>
       <p:graphicFrame>
         <p:nvGraphicFramePr>
-          <p:cNvPr id="9" name="Table 0"/>
+          <p:cNvPr id="8" name="Table 0"/>
           <p:cNvGraphicFramePr>
             <a:graphicFrameLocks noGrp="1"/>
           </p:cNvGraphicFramePr>
-          <p:nvPr>
-            <p:extLst>
-              <p:ext uri="{D42A27DB-BD31-4B8C-83A1-F6EECF244321}">
-                <p14:modId xmlns:p14="http://schemas.microsoft.com/office/powerpoint/2010/main" val="1579011935"/>
-              </p:ext>
-            </p:extLst>
-          </p:nvPr>
+          <p:nvPr/>
         </p:nvGraphicFramePr>
         <p:xfrm>
           <a:off x="822960" y="2395728"/>
-          <a:ext cx="10545775" cy="914400"/>
+          <a:ext cx="10545775" cy="2103120"/>
         </p:xfrm>
         <a:graphic>
           <a:graphicData uri="http://schemas.openxmlformats.org/drawingml/2006/table">
@@ -9662,7 +9644,7 @@
                     <a:bodyPr/>
                     <a:lstStyle/>
                     <a:p>
-                      <a:pPr algn="l" indent="0" marL="0">
+                      <a:pPr marL="0" indent="0" algn="l">
                         <a:buNone/>
                       </a:pPr>
                       <a:r>
@@ -9670,20 +9652,20 @@
                           <a:solidFill>
                             <a:srgbClr val="1F4E9C"/>
                           </a:solidFill>
-                          <a:latin typeface="微软雅黑" pitchFamily="34" charset="0"/>
-                          <a:ea typeface="微软雅黑" pitchFamily="34" charset="-122"/>
-                          <a:cs typeface="微软雅黑" pitchFamily="34" charset="-120"/>
+                          <a:latin typeface="微软雅黑" panose="020B0503020204020204" pitchFamily="34" charset="-122"/>
+                          <a:ea typeface="微软雅黑" panose="020B0503020204020204" pitchFamily="34" charset="-122"/>
+                          <a:cs typeface="微软雅黑" panose="020B0503020204020204" pitchFamily="34" charset="-120"/>
                         </a:rPr>
-                        <a:t>内容</a:t>
+                        <a:t>分组</a:t>
                       </a:r>
                       <a:endParaRPr lang="en-US" sz="1500" dirty="0">
-                        <a:latin typeface="微软雅黑" charset="0"/>
-                        <a:ea typeface="微软雅黑" charset="0"/>
-                        <a:cs typeface="微软雅黑" charset="0"/>
+                        <a:latin typeface="微软雅黑" panose="020B0503020204020204" pitchFamily="34" charset="-122"/>
+                        <a:ea typeface="微软雅黑" panose="020B0503020204020204" pitchFamily="34" charset="-122"/>
+                        <a:cs typeface="微软雅黑" panose="020B0503020204020204" pitchFamily="34" charset="-122"/>
                       </a:endParaRPr>
                     </a:p>
                   </a:txBody>
-                  <a:tcPr marL="91440" marR="91440" marT="45720" marB="45720" anchor="ctr">
+                  <a:tcPr anchor="ctr">
                     <a:lnL w="9525" cap="flat" cmpd="sng" algn="ctr">
                       <a:solidFill>
                         <a:srgbClr val="D8DBE0"/>
@@ -9730,7 +9712,7 @@
                     <a:bodyPr/>
                     <a:lstStyle/>
                     <a:p>
-                      <a:pPr algn="l" indent="0" marL="0">
+                      <a:pPr marL="0" indent="0" algn="l">
                         <a:buNone/>
                       </a:pPr>
                       <a:r>
@@ -9738,20 +9720,20 @@
                           <a:solidFill>
                             <a:srgbClr val="1F4E9C"/>
                           </a:solidFill>
-                          <a:latin typeface="微软雅黑" pitchFamily="34" charset="0"/>
-                          <a:ea typeface="微软雅黑" pitchFamily="34" charset="-122"/>
-                          <a:cs typeface="微软雅黑" pitchFamily="34" charset="-120"/>
+                          <a:latin typeface="微软雅黑" panose="020B0503020204020204" pitchFamily="34" charset="-122"/>
+                          <a:ea typeface="微软雅黑" panose="020B0503020204020204" pitchFamily="34" charset="-122"/>
+                          <a:cs typeface="微软雅黑" panose="020B0503020204020204" pitchFamily="34" charset="-120"/>
                         </a:rPr>
                         <a:t>题号</a:t>
                       </a:r>
                       <a:endParaRPr lang="en-US" sz="1500" dirty="0">
-                        <a:latin typeface="微软雅黑" charset="0"/>
-                        <a:ea typeface="微软雅黑" charset="0"/>
-                        <a:cs typeface="微软雅黑" charset="0"/>
+                        <a:latin typeface="微软雅黑" panose="020B0503020204020204" pitchFamily="34" charset="-122"/>
+                        <a:ea typeface="微软雅黑" panose="020B0503020204020204" pitchFamily="34" charset="-122"/>
+                        <a:cs typeface="微软雅黑" panose="020B0503020204020204" pitchFamily="34" charset="-122"/>
                       </a:endParaRPr>
                     </a:p>
                   </a:txBody>
-                  <a:tcPr marL="91440" marR="91440" marT="45720" marB="45720" anchor="ctr">
+                  <a:tcPr anchor="ctr">
                     <a:lnL w="9525" cap="flat" cmpd="sng" algn="ctr">
                       <a:solidFill>
                         <a:srgbClr val="D8DBE0"/>
@@ -9800,7 +9782,7 @@
                     <a:bodyPr/>
                     <a:lstStyle/>
                     <a:p>
-                      <a:pPr algn="l" indent="0" marL="0">
+                      <a:pPr marL="0" indent="0" algn="l">
                         <a:buNone/>
                       </a:pPr>
                       <a:r>
@@ -9808,20 +9790,20 @@
                           <a:solidFill>
                             <a:srgbClr val="1F2329"/>
                           </a:solidFill>
-                          <a:latin typeface="微软雅黑" pitchFamily="34" charset="0"/>
-                          <a:ea typeface="微软雅黑" pitchFamily="34" charset="-122"/>
-                          <a:cs typeface="微软雅黑" pitchFamily="34" charset="-120"/>
+                          <a:latin typeface="微软雅黑" panose="020B0503020204020204" pitchFamily="34" charset="-122"/>
+                          <a:ea typeface="微软雅黑" panose="020B0503020204020204" pitchFamily="34" charset="-122"/>
+                          <a:cs typeface="微软雅黑" panose="020B0503020204020204" pitchFamily="34" charset="-120"/>
                         </a:rPr>
-                        <a:t>关节点（重连通）</a:t>
+                        <a:t>选择题：图的概念与存储（度/连通/强连通概念…</a:t>
                       </a:r>
                       <a:endParaRPr lang="en-US" sz="1500" dirty="0">
-                        <a:latin typeface="微软雅黑" charset="0"/>
-                        <a:ea typeface="微软雅黑" charset="0"/>
-                        <a:cs typeface="微软雅黑" charset="0"/>
+                        <a:latin typeface="微软雅黑" panose="020B0503020204020204" pitchFamily="34" charset="-122"/>
+                        <a:ea typeface="微软雅黑" panose="020B0503020204020204" pitchFamily="34" charset="-122"/>
+                        <a:cs typeface="微软雅黑" panose="020B0503020204020204" pitchFamily="34" charset="-122"/>
                       </a:endParaRPr>
                     </a:p>
                   </a:txBody>
-                  <a:tcPr marL="91440" marR="91440" marT="45720" marB="45720" anchor="ctr">
+                  <a:tcPr anchor="ctr">
                     <a:lnL w="9525" cap="flat" cmpd="sng" algn="ctr">
                       <a:solidFill>
                         <a:srgbClr val="D8DBE0"/>
@@ -9868,7 +9850,7 @@
                     <a:bodyPr/>
                     <a:lstStyle/>
                     <a:p>
-                      <a:pPr algn="l" indent="0" marL="0">
+                      <a:pPr marL="0" indent="0" algn="l">
                         <a:buNone/>
                       </a:pPr>
                       <a:r>
@@ -9876,20 +9858,20 @@
                           <a:solidFill>
                             <a:srgbClr val="1F2329"/>
                           </a:solidFill>
-                          <a:latin typeface="微软雅黑" pitchFamily="34" charset="0"/>
-                          <a:ea typeface="微软雅黑" pitchFamily="34" charset="-122"/>
-                          <a:cs typeface="微软雅黑" pitchFamily="34" charset="-120"/>
+                          <a:latin typeface="微软雅黑" panose="020B0503020204020204" pitchFamily="34" charset="-122"/>
+                          <a:ea typeface="微软雅黑" panose="020B0503020204020204" pitchFamily="34" charset="-122"/>
+                          <a:cs typeface="微软雅黑" panose="020B0503020204020204" pitchFamily="34" charset="-120"/>
                         </a:rPr>
-                        <a:t>选26；答8</a:t>
+                        <a:t>选2—7、9—20、23、24</a:t>
                       </a:r>
                       <a:endParaRPr lang="en-US" sz="1500" dirty="0">
-                        <a:latin typeface="微软雅黑" charset="0"/>
-                        <a:ea typeface="微软雅黑" charset="0"/>
-                        <a:cs typeface="微软雅黑" charset="0"/>
+                        <a:latin typeface="微软雅黑" panose="020B0503020204020204" pitchFamily="34" charset="-122"/>
+                        <a:ea typeface="微软雅黑" panose="020B0503020204020204" pitchFamily="34" charset="-122"/>
+                        <a:cs typeface="微软雅黑" panose="020B0503020204020204" pitchFamily="34" charset="-122"/>
                       </a:endParaRPr>
                     </a:p>
                   </a:txBody>
-                  <a:tcPr marL="91440" marR="91440" marT="45720" marB="45720" anchor="ctr">
+                  <a:tcPr anchor="ctr">
                     <a:lnL w="9525" cap="flat" cmpd="sng" algn="ctr">
                       <a:solidFill>
                         <a:srgbClr val="D8DBE0"/>
@@ -9938,7 +9920,7 @@
                     <a:bodyPr/>
                     <a:lstStyle/>
                     <a:p>
-                      <a:pPr algn="l" indent="0" marL="0">
+                      <a:pPr marL="0" indent="0" algn="l">
                         <a:buNone/>
                       </a:pPr>
                       <a:r>
@@ -9946,20 +9928,20 @@
                           <a:solidFill>
                             <a:srgbClr val="1F2329"/>
                           </a:solidFill>
-                          <a:latin typeface="微软雅黑" pitchFamily="34" charset="0"/>
-                          <a:ea typeface="微软雅黑" pitchFamily="34" charset="-122"/>
-                          <a:cs typeface="微软雅黑" pitchFamily="34" charset="-120"/>
+                          <a:latin typeface="微软雅黑" panose="020B0503020204020204" pitchFamily="34" charset="-122"/>
+                          <a:ea typeface="微软雅黑" panose="020B0503020204020204" pitchFamily="34" charset="-122"/>
+                          <a:cs typeface="微软雅黑" panose="020B0503020204020204" pitchFamily="34" charset="-120"/>
                         </a:rPr>
-                        <a:t>证明与推导题</a:t>
+                        <a:t>解答题：图概念巩固（邻接矩阵幂、传递性、MS…</a:t>
                       </a:r>
                       <a:endParaRPr lang="en-US" sz="1500" dirty="0">
-                        <a:latin typeface="微软雅黑" charset="0"/>
-                        <a:ea typeface="微软雅黑" charset="0"/>
-                        <a:cs typeface="微软雅黑" charset="0"/>
+                        <a:latin typeface="微软雅黑" panose="020B0503020204020204" pitchFamily="34" charset="-122"/>
+                        <a:ea typeface="微软雅黑" panose="020B0503020204020204" pitchFamily="34" charset="-122"/>
+                        <a:cs typeface="微软雅黑" panose="020B0503020204020204" pitchFamily="34" charset="-122"/>
                       </a:endParaRPr>
                     </a:p>
                   </a:txBody>
-                  <a:tcPr marL="91440" marR="91440" marT="45720" marB="45720" anchor="ctr">
+                  <a:tcPr anchor="ctr">
                     <a:lnL w="9525" cap="flat" cmpd="sng" algn="ctr">
                       <a:solidFill>
                         <a:srgbClr val="D8DBE0"/>
@@ -10006,7 +9988,7 @@
                     <a:bodyPr/>
                     <a:lstStyle/>
                     <a:p>
-                      <a:pPr algn="l" indent="0" marL="0">
+                      <a:pPr marL="0" indent="0" algn="l">
                         <a:buNone/>
                       </a:pPr>
                       <a:r>
@@ -10014,20 +9996,20 @@
                           <a:solidFill>
                             <a:srgbClr val="1F2329"/>
                           </a:solidFill>
-                          <a:latin typeface="微软雅黑" pitchFamily="34" charset="0"/>
-                          <a:ea typeface="微软雅黑" pitchFamily="34" charset="-122"/>
-                          <a:cs typeface="微软雅黑" pitchFamily="34" charset="-120"/>
+                          <a:latin typeface="微软雅黑" panose="020B0503020204020204" pitchFamily="34" charset="-122"/>
+                          <a:ea typeface="微软雅黑" panose="020B0503020204020204" pitchFamily="34" charset="-122"/>
+                          <a:cs typeface="微软雅黑" panose="020B0503020204020204" pitchFamily="34" charset="-120"/>
                         </a:rPr>
-                        <a:t>答6、12；算17</a:t>
+                        <a:t>答1—3</a:t>
                       </a:r>
                       <a:endParaRPr lang="en-US" sz="1500" dirty="0">
-                        <a:latin typeface="微软雅黑" charset="0"/>
-                        <a:ea typeface="微软雅黑" charset="0"/>
-                        <a:cs typeface="微软雅黑" charset="0"/>
+                        <a:latin typeface="微软雅黑" panose="020B0503020204020204" pitchFamily="34" charset="-122"/>
+                        <a:ea typeface="微软雅黑" panose="020B0503020204020204" pitchFamily="34" charset="-122"/>
+                        <a:cs typeface="微软雅黑" panose="020B0503020204020204" pitchFamily="34" charset="-122"/>
                       </a:endParaRPr>
                     </a:p>
                   </a:txBody>
-                  <a:tcPr marL="91440" marR="91440" marT="45720" marB="45720" anchor="ctr">
+                  <a:tcPr anchor="ctr">
                     <a:lnL w="9525" cap="flat" cmpd="sng" algn="ctr">
                       <a:solidFill>
                         <a:srgbClr val="D8DBE0"/>
@@ -10076,7 +10058,7 @@
                     <a:bodyPr/>
                     <a:lstStyle/>
                     <a:p>
-                      <a:pPr algn="l" indent="0" marL="0">
+                      <a:pPr marL="0" indent="0" algn="l">
                         <a:buNone/>
                       </a:pPr>
                       <a:r>
@@ -10084,20 +10066,20 @@
                           <a:solidFill>
                             <a:srgbClr val="1F2329"/>
                           </a:solidFill>
-                          <a:latin typeface="微软雅黑" pitchFamily="34" charset="0"/>
-                          <a:ea typeface="微软雅黑" pitchFamily="34" charset="-122"/>
-                          <a:cs typeface="微软雅黑" pitchFamily="34" charset="-120"/>
+                          <a:latin typeface="微软雅黑" panose="020B0503020204020204" pitchFamily="34" charset="-122"/>
+                          <a:ea typeface="微软雅黑" panose="020B0503020204020204" pitchFamily="34" charset="-122"/>
+                          <a:cs typeface="微软雅黑" panose="020B0503020204020204" pitchFamily="34" charset="-120"/>
                         </a:rPr>
-                        <a:t>十字链表与邻接多重表</a:t>
+                        <a:t>算法设计题：图算法域内巩固（建图与基本操作、…</a:t>
                       </a:r>
                       <a:endParaRPr lang="en-US" sz="1500" dirty="0">
-                        <a:latin typeface="微软雅黑" charset="0"/>
-                        <a:ea typeface="微软雅黑" charset="0"/>
-                        <a:cs typeface="微软雅黑" charset="0"/>
+                        <a:latin typeface="微软雅黑" panose="020B0503020204020204" pitchFamily="34" charset="-122"/>
+                        <a:ea typeface="微软雅黑" panose="020B0503020204020204" pitchFamily="34" charset="-122"/>
+                        <a:cs typeface="微软雅黑" panose="020B0503020204020204" pitchFamily="34" charset="-122"/>
                       </a:endParaRPr>
                     </a:p>
                   </a:txBody>
-                  <a:tcPr marL="91440" marR="91440" marT="45720" marB="45720" anchor="ctr">
+                  <a:tcPr anchor="ctr">
                     <a:lnL w="9525" cap="flat" cmpd="sng" algn="ctr">
                       <a:solidFill>
                         <a:srgbClr val="D8DBE0"/>
@@ -10144,7 +10126,7 @@
                     <a:bodyPr/>
                     <a:lstStyle/>
                     <a:p>
-                      <a:pPr algn="l" indent="0" marL="0">
+                      <a:pPr marL="0" indent="0" algn="l">
                         <a:buNone/>
                       </a:pPr>
                       <a:r>
@@ -10152,20 +10134,20 @@
                           <a:solidFill>
                             <a:srgbClr val="1F2329"/>
                           </a:solidFill>
-                          <a:latin typeface="微软雅黑" pitchFamily="34" charset="0"/>
-                          <a:ea typeface="微软雅黑" pitchFamily="34" charset="-122"/>
-                          <a:cs typeface="微软雅黑" pitchFamily="34" charset="-120"/>
+                          <a:latin typeface="微软雅黑" panose="020B0503020204020204" pitchFamily="34" charset="-122"/>
+                          <a:ea typeface="微软雅黑" panose="020B0503020204020204" pitchFamily="34" charset="-122"/>
+                          <a:cs typeface="微软雅黑" panose="020B0503020204020204" pitchFamily="34" charset="-120"/>
                         </a:rPr>
-                        <a:t>算4—6</a:t>
+                        <a:t>算1—3、7—12、15、20、21、23、24…</a:t>
                       </a:r>
                       <a:endParaRPr lang="en-US" sz="1500" dirty="0">
-                        <a:latin typeface="微软雅黑" charset="0"/>
-                        <a:ea typeface="微软雅黑" charset="0"/>
-                        <a:cs typeface="微软雅黑" charset="0"/>
+                        <a:latin typeface="微软雅黑" panose="020B0503020204020204" pitchFamily="34" charset="-122"/>
+                        <a:ea typeface="微软雅黑" panose="020B0503020204020204" pitchFamily="34" charset="-122"/>
+                        <a:cs typeface="微软雅黑" panose="020B0503020204020204" pitchFamily="34" charset="-122"/>
                       </a:endParaRPr>
                     </a:p>
                   </a:txBody>
-                  <a:tcPr marL="91440" marR="91440" marT="45720" marB="45720" anchor="ctr">
+                  <a:tcPr anchor="ctr">
                     <a:lnL w="9525" cap="flat" cmpd="sng" algn="ctr">
                       <a:solidFill>
                         <a:srgbClr val="D8DBE0"/>
@@ -10214,7 +10196,7 @@
                     <a:bodyPr/>
                     <a:lstStyle/>
                     <a:p>
-                      <a:pPr algn="l" indent="0" marL="0">
+                      <a:pPr marL="0" indent="0" algn="l">
                         <a:buNone/>
                       </a:pPr>
                       <a:r>
@@ -10222,20 +10204,20 @@
                           <a:solidFill>
                             <a:srgbClr val="1F2329"/>
                           </a:solidFill>
-                          <a:latin typeface="微软雅黑" pitchFamily="34" charset="0"/>
-                          <a:ea typeface="微软雅黑" pitchFamily="34" charset="-122"/>
-                          <a:cs typeface="微软雅黑" pitchFamily="34" charset="-120"/>
+                          <a:latin typeface="微软雅黑" panose="020B0503020204020204" pitchFamily="34" charset="-122"/>
+                          <a:ea typeface="微软雅黑" panose="020B0503020204020204" pitchFamily="34" charset="-122"/>
+                          <a:cs typeface="微软雅黑" panose="020B0503020204020204" pitchFamily="34" charset="-120"/>
                         </a:rPr>
-                        <a:t>DFS编号体系</a:t>
+                        <a:t>（续）</a:t>
                       </a:r>
                       <a:endParaRPr lang="en-US" sz="1500" dirty="0">
-                        <a:latin typeface="微软雅黑" charset="0"/>
-                        <a:ea typeface="微软雅黑" charset="0"/>
-                        <a:cs typeface="微软雅黑" charset="0"/>
+                        <a:latin typeface="微软雅黑" panose="020B0503020204020204" pitchFamily="34" charset="-122"/>
+                        <a:ea typeface="微软雅黑" panose="020B0503020204020204" pitchFamily="34" charset="-122"/>
+                        <a:cs typeface="微软雅黑" panose="020B0503020204020204" pitchFamily="34" charset="-122"/>
                       </a:endParaRPr>
                     </a:p>
                   </a:txBody>
-                  <a:tcPr marL="91440" marR="91440" marT="45720" marB="45720" anchor="ctr">
+                  <a:tcPr anchor="ctr">
                     <a:lnL w="9525" cap="flat" cmpd="sng" algn="ctr">
                       <a:solidFill>
                         <a:srgbClr val="D8DBE0"/>
@@ -10282,7 +10264,7 @@
                     <a:bodyPr/>
                     <a:lstStyle/>
                     <a:p>
-                      <a:pPr algn="l" indent="0" marL="0">
+                      <a:pPr marL="0" indent="0" algn="l">
                         <a:buNone/>
                       </a:pPr>
                       <a:r>
@@ -10290,158 +10272,20 @@
                           <a:solidFill>
                             <a:srgbClr val="1F2329"/>
                           </a:solidFill>
-                          <a:latin typeface="微软雅黑" pitchFamily="34" charset="0"/>
-                          <a:ea typeface="微软雅黑" pitchFamily="34" charset="-122"/>
-                          <a:cs typeface="微软雅黑" pitchFamily="34" charset="-120"/>
+                          <a:latin typeface="微软雅黑" panose="020B0503020204020204" pitchFamily="34" charset="-122"/>
+                          <a:ea typeface="微软雅黑" panose="020B0503020204020204" pitchFamily="34" charset="-122"/>
+                          <a:cs typeface="微软雅黑" panose="020B0503020204020204" pitchFamily="34" charset="-120"/>
                         </a:rPr>
-                        <a:t>算16</a:t>
+                        <a:t>26—34</a:t>
                       </a:r>
                       <a:endParaRPr lang="en-US" sz="1500" dirty="0">
-                        <a:latin typeface="微软雅黑" charset="0"/>
-                        <a:ea typeface="微软雅黑" charset="0"/>
-                        <a:cs typeface="微软雅黑" charset="0"/>
+                        <a:latin typeface="微软雅黑" panose="020B0503020204020204" pitchFamily="34" charset="-122"/>
+                        <a:ea typeface="微软雅黑" panose="020B0503020204020204" pitchFamily="34" charset="-122"/>
+                        <a:cs typeface="微软雅黑" panose="020B0503020204020204" pitchFamily="34" charset="-122"/>
                       </a:endParaRPr>
                     </a:p>
                   </a:txBody>
-                  <a:tcPr marL="91440" marR="91440" marT="45720" marB="45720" anchor="ctr">
-                    <a:lnL w="9525" cap="flat" cmpd="sng" algn="ctr">
-                      <a:solidFill>
-                        <a:srgbClr val="D8DBE0"/>
-                      </a:solidFill>
-                      <a:prstDash val="solid"/>
-                      <a:round/>
-                      <a:headEnd type="none" w="med" len="med"/>
-                      <a:tailEnd type="none" w="med" len="med"/>
-                    </a:lnL>
-                    <a:lnR w="9525" cap="flat" cmpd="sng" algn="ctr">
-                      <a:solidFill>
-                        <a:srgbClr val="D8DBE0"/>
-                      </a:solidFill>
-                      <a:prstDash val="solid"/>
-                      <a:round/>
-                      <a:headEnd type="none" w="med" len="med"/>
-                      <a:tailEnd type="none" w="med" len="med"/>
-                    </a:lnR>
-                    <a:lnT w="9525" cap="flat" cmpd="sng" algn="ctr">
-                      <a:solidFill>
-                        <a:srgbClr val="D8DBE0"/>
-                      </a:solidFill>
-                      <a:prstDash val="solid"/>
-                      <a:round/>
-                      <a:headEnd type="none" w="med" len="med"/>
-                      <a:tailEnd type="none" w="med" len="med"/>
-                    </a:lnT>
-                    <a:lnB w="9525" cap="flat" cmpd="sng" algn="ctr">
-                      <a:solidFill>
-                        <a:srgbClr val="D8DBE0"/>
-                      </a:solidFill>
-                      <a:prstDash val="solid"/>
-                      <a:round/>
-                      <a:headEnd type="none" w="med" len="med"/>
-                      <a:tailEnd type="none" w="med" len="med"/>
-                    </a:lnB>
-                    <a:solidFill>
-                      <a:srgbClr val="FFFFFF"/>
-                    </a:solidFill>
-                  </a:tcPr>
-                </a:tc>
-              </a:tr>
-              <a:tr h="420624">
-                <a:tc>
-                  <a:txBody>
-                    <a:bodyPr/>
-                    <a:lstStyle/>
-                    <a:p>
-                      <a:pPr algn="l" indent="0" marL="0">
-                        <a:buNone/>
-                      </a:pPr>
-                      <a:r>
-                        <a:rPr lang="en-US" sz="1500" dirty="0">
-                          <a:solidFill>
-                            <a:srgbClr val="1F2329"/>
-                          </a:solidFill>
-                          <a:latin typeface="微软雅黑" pitchFamily="34" charset="0"/>
-                          <a:ea typeface="微软雅黑" pitchFamily="34" charset="-122"/>
-                          <a:cs typeface="微软雅黑" pitchFamily="34" charset="-120"/>
-                        </a:rPr>
-                        <a:t>强连通分量算法</a:t>
-                      </a:r>
-                      <a:endParaRPr lang="en-US" sz="1500" dirty="0">
-                        <a:latin typeface="微软雅黑" charset="0"/>
-                        <a:ea typeface="微软雅黑" charset="0"/>
-                        <a:cs typeface="微软雅黑" charset="0"/>
-                      </a:endParaRPr>
-                    </a:p>
-                  </a:txBody>
-                  <a:tcPr marL="91440" marR="91440" marT="45720" marB="45720" anchor="ctr">
-                    <a:lnL w="9525" cap="flat" cmpd="sng" algn="ctr">
-                      <a:solidFill>
-                        <a:srgbClr val="D8DBE0"/>
-                      </a:solidFill>
-                      <a:prstDash val="solid"/>
-                      <a:round/>
-                      <a:headEnd type="none" w="med" len="med"/>
-                      <a:tailEnd type="none" w="med" len="med"/>
-                    </a:lnL>
-                    <a:lnR w="9525" cap="flat" cmpd="sng" algn="ctr">
-                      <a:solidFill>
-                        <a:srgbClr val="D8DBE0"/>
-                      </a:solidFill>
-                      <a:prstDash val="solid"/>
-                      <a:round/>
-                      <a:headEnd type="none" w="med" len="med"/>
-                      <a:tailEnd type="none" w="med" len="med"/>
-                    </a:lnR>
-                    <a:lnT w="9525" cap="flat" cmpd="sng" algn="ctr">
-                      <a:solidFill>
-                        <a:srgbClr val="D8DBE0"/>
-                      </a:solidFill>
-                      <a:prstDash val="solid"/>
-                      <a:round/>
-                      <a:headEnd type="none" w="med" len="med"/>
-                      <a:tailEnd type="none" w="med" len="med"/>
-                    </a:lnT>
-                    <a:lnB w="9525" cap="flat" cmpd="sng" algn="ctr">
-                      <a:solidFill>
-                        <a:srgbClr val="D8DBE0"/>
-                      </a:solidFill>
-                      <a:prstDash val="solid"/>
-                      <a:round/>
-                      <a:headEnd type="none" w="med" len="med"/>
-                      <a:tailEnd type="none" w="med" len="med"/>
-                    </a:lnB>
-                    <a:solidFill>
-                      <a:srgbClr val="FFFFFF"/>
-                    </a:solidFill>
-                  </a:tcPr>
-                </a:tc>
-                <a:tc>
-                  <a:txBody>
-                    <a:bodyPr/>
-                    <a:lstStyle/>
-                    <a:p>
-                      <a:pPr algn="l" indent="0" marL="0">
-                        <a:buNone/>
-                      </a:pPr>
-                      <a:r>
-                        <a:rPr lang="en-US" sz="1500" dirty="0">
-                          <a:solidFill>
-                            <a:srgbClr val="1F2329"/>
-                          </a:solidFill>
-                          <a:latin typeface="微软雅黑" pitchFamily="34" charset="0"/>
-                          <a:ea typeface="微软雅黑" pitchFamily="34" charset="-122"/>
-                          <a:cs typeface="微软雅黑" pitchFamily="34" charset="-120"/>
-                        </a:rPr>
-                        <a:t>算22</a:t>
-                      </a:r>
-                      <a:endParaRPr lang="en-US" sz="1500" dirty="0">
-                        <a:latin typeface="微软雅黑" charset="0"/>
-                        <a:ea typeface="微软雅黑" charset="0"/>
-                        <a:cs typeface="微软雅黑" charset="0"/>
-                      </a:endParaRPr>
-                    </a:p>
-                  </a:txBody>
-                  <a:tcPr marL="91440" marR="91440" marT="45720" marB="45720" anchor="ctr">
+                  <a:tcPr anchor="ctr">
                     <a:lnL w="9525" cap="flat" cmpd="sng" algn="ctr">
                       <a:solidFill>
                         <a:srgbClr val="D8DBE0"/>
@@ -10498,7 +10342,7 @@
 
 <file path=ppt/slides/slide9.xml><?xml version="1.0" encoding="utf-8"?>
 <p:sld xmlns:a="http://schemas.openxmlformats.org/drawingml/2006/main" xmlns:r="http://schemas.openxmlformats.org/officeDocument/2006/relationships" xmlns:p="http://schemas.openxmlformats.org/presentationml/2006/main">
-  <p:cSld name="Slide 9">
+  <p:cSld>
     <p:bg>
       <p:bgPr>
         <a:blipFill dpi="0" rotWithShape="1">
@@ -10542,13 +10386,12 @@
             <a:avLst/>
           </a:prstGeom>
           <a:noFill/>
-          <a:ln/>
         </p:spPr>
         <p:txBody>
           <a:bodyPr wrap="square" rtlCol="0" anchor="ctr"/>
           <a:lstStyle/>
           <a:p>
-            <a:pPr algn="r" indent="0" marL="0">
+            <a:pPr marL="0" indent="0" algn="r">
               <a:buNone/>
             </a:pPr>
             <a:r>
@@ -10556,9 +10399,9 @@
                 <a:solidFill>
                   <a:srgbClr val="8A9099"/>
                 </a:solidFill>
-                <a:latin typeface="微软雅黑" pitchFamily="34" charset="0"/>
-                <a:ea typeface="微软雅黑" pitchFamily="34" charset="-122"/>
-                <a:cs typeface="微软雅黑" pitchFamily="34" charset="-120"/>
+                <a:latin typeface="微软雅黑" panose="020B0503020204020204" pitchFamily="34" charset="-122"/>
+                <a:ea typeface="微软雅黑" panose="020B0503020204020204" pitchFamily="34" charset="-122"/>
+                <a:cs typeface="微软雅黑" panose="020B0503020204020204" pitchFamily="34" charset="-120"/>
               </a:rPr>
               <a:t>9 / 9</a:t>
             </a:r>
@@ -10581,13 +10424,12 @@
             <a:avLst/>
           </a:prstGeom>
           <a:noFill/>
-          <a:ln/>
         </p:spPr>
         <p:txBody>
           <a:bodyPr wrap="square" rtlCol="0" anchor="ctr"/>
           <a:lstStyle/>
           <a:p>
-            <a:pPr algn="l" indent="0" marL="0">
+            <a:pPr marL="0" indent="0" algn="l">
               <a:buNone/>
             </a:pPr>
             <a:r>
@@ -10595,9 +10437,9 @@
                 <a:solidFill>
                   <a:srgbClr val="1F4E9C"/>
                 </a:solidFill>
-                <a:latin typeface="微软雅黑" pitchFamily="34" charset="0"/>
-                <a:ea typeface="微软雅黑" pitchFamily="34" charset="-122"/>
-                <a:cs typeface="微软雅黑" pitchFamily="34" charset="-120"/>
+                <a:latin typeface="微软雅黑" panose="020B0503020204020204" pitchFamily="34" charset="-122"/>
+                <a:ea typeface="微软雅黑" panose="020B0503020204020204" pitchFamily="34" charset="-122"/>
+                <a:cs typeface="微软雅黑" panose="020B0503020204020204" pitchFamily="34" charset="-120"/>
               </a:rPr>
               <a:t>使用建议</a:t>
             </a:r>
@@ -10620,13 +10462,12 @@
             <a:avLst/>
           </a:prstGeom>
           <a:noFill/>
-          <a:ln/>
         </p:spPr>
         <p:txBody>
           <a:bodyPr wrap="square" rtlCol="0" anchor="ctr"/>
           <a:lstStyle/>
           <a:p>
-            <a:pPr algn="l" indent="0" marL="0">
+            <a:pPr marL="0" indent="0" algn="l">
               <a:buNone/>
             </a:pPr>
             <a:r>
@@ -10634,9 +10475,9 @@
                 <a:solidFill>
                   <a:srgbClr val="1F2329"/>
                 </a:solidFill>
-                <a:latin typeface="微软雅黑" pitchFamily="34" charset="0"/>
-                <a:ea typeface="微软雅黑" pitchFamily="34" charset="-122"/>
-                <a:cs typeface="微软雅黑" pitchFamily="34" charset="-120"/>
+                <a:latin typeface="微软雅黑" panose="020B0503020204020204" pitchFamily="34" charset="-122"/>
+                <a:ea typeface="微软雅黑" panose="020B0503020204020204" pitchFamily="34" charset="-122"/>
+                <a:cs typeface="微软雅黑" panose="020B0503020204020204" pitchFamily="34" charset="-120"/>
               </a:rPr>
               <a:t>第7章刷题路线</a:t>
             </a:r>
@@ -10659,13 +10500,12 @@
             <a:avLst/>
           </a:prstGeom>
           <a:noFill/>
-          <a:ln/>
         </p:spPr>
         <p:txBody>
           <a:bodyPr wrap="square" rtlCol="0" anchor="t"/>
           <a:lstStyle/>
           <a:p>
-            <a:pPr algn="l" indent="0" marL="0">
+            <a:pPr marL="0" indent="0" algn="l">
               <a:lnSpc>
                 <a:spcPct val="115000"/>
               </a:lnSpc>
@@ -10676,18 +10516,12 @@
                 <a:solidFill>
                   <a:srgbClr val="1F4E9C"/>
                 </a:solidFill>
-                <a:latin typeface="微软雅黑" pitchFamily="34" charset="0"/>
-                <a:ea typeface="微软雅黑" pitchFamily="34" charset="-122"/>
-                <a:cs typeface="微软雅黑" pitchFamily="34" charset="-120"/>
+                <a:latin typeface="微软雅黑" panose="020B0503020204020204" pitchFamily="34" charset="-122"/>
+                <a:ea typeface="微软雅黑" panose="020B0503020204020204" pitchFamily="34" charset="-122"/>
+                <a:cs typeface="微软雅黑" panose="020B0503020204020204" pitchFamily="34" charset="-120"/>
               </a:rPr>
               <a:t>•  </a:t>
             </a:r>
-            <a:pPr algn="l" indent="0" marL="0">
-              <a:lnSpc>
-                <a:spcPct val="115000"/>
-              </a:lnSpc>
-              <a:buNone/>
-            </a:pPr>
             <a:r>
               <a:rPr lang="en-US" sz="1800" dirty="0">
                 <a:solidFill>
@@ -10715,13 +10549,12 @@
             <a:avLst/>
           </a:prstGeom>
           <a:noFill/>
-          <a:ln/>
         </p:spPr>
         <p:txBody>
           <a:bodyPr wrap="square" rtlCol="0" anchor="t"/>
           <a:lstStyle/>
           <a:p>
-            <a:pPr algn="l" indent="0" marL="0">
+            <a:pPr marL="0" indent="0" algn="l">
               <a:lnSpc>
                 <a:spcPct val="115000"/>
               </a:lnSpc>
@@ -10732,18 +10565,12 @@
                 <a:solidFill>
                   <a:srgbClr val="1F4E9C"/>
                 </a:solidFill>
-                <a:latin typeface="微软雅黑" pitchFamily="34" charset="0"/>
-                <a:ea typeface="微软雅黑" pitchFamily="34" charset="-122"/>
-                <a:cs typeface="微软雅黑" pitchFamily="34" charset="-120"/>
+                <a:latin typeface="微软雅黑" panose="020B0503020204020204" pitchFamily="34" charset="-122"/>
+                <a:ea typeface="微软雅黑" panose="020B0503020204020204" pitchFamily="34" charset="-122"/>
+                <a:cs typeface="微软雅黑" panose="020B0503020204020204" pitchFamily="34" charset="-120"/>
               </a:rPr>
               <a:t>•  </a:t>
             </a:r>
-            <a:pPr algn="l" indent="0" marL="0">
-              <a:lnSpc>
-                <a:spcPct val="115000"/>
-              </a:lnSpc>
-              <a:buNone/>
-            </a:pPr>
             <a:r>
               <a:rPr lang="en-US" sz="1800" dirty="0">
                 <a:solidFill>
@@ -10771,13 +10598,12 @@
             <a:avLst/>
           </a:prstGeom>
           <a:noFill/>
-          <a:ln/>
         </p:spPr>
         <p:txBody>
           <a:bodyPr wrap="square" rtlCol="0" anchor="t"/>
           <a:lstStyle/>
           <a:p>
-            <a:pPr algn="l" indent="0" marL="0">
+            <a:pPr marL="0" indent="0" algn="l">
               <a:lnSpc>
                 <a:spcPct val="115000"/>
               </a:lnSpc>
@@ -10788,18 +10614,12 @@
                 <a:solidFill>
                   <a:srgbClr val="1F4E9C"/>
                 </a:solidFill>
-                <a:latin typeface="微软雅黑" pitchFamily="34" charset="0"/>
-                <a:ea typeface="微软雅黑" pitchFamily="34" charset="-122"/>
-                <a:cs typeface="微软雅黑" pitchFamily="34" charset="-120"/>
+                <a:latin typeface="微软雅黑" panose="020B0503020204020204" pitchFamily="34" charset="-122"/>
+                <a:ea typeface="微软雅黑" panose="020B0503020204020204" pitchFamily="34" charset="-122"/>
+                <a:cs typeface="微软雅黑" panose="020B0503020204020204" pitchFamily="34" charset="-120"/>
               </a:rPr>
               <a:t>•  </a:t>
             </a:r>
-            <a:pPr algn="l" indent="0" marL="0">
-              <a:lnSpc>
-                <a:spcPct val="115000"/>
-              </a:lnSpc>
-              <a:buNone/>
-            </a:pPr>
             <a:r>
               <a:rPr lang="en-US" sz="1800" dirty="0">
                 <a:solidFill>
@@ -10827,13 +10647,12 @@
             <a:avLst/>
           </a:prstGeom>
           <a:noFill/>
-          <a:ln/>
         </p:spPr>
         <p:txBody>
           <a:bodyPr wrap="square" rtlCol="0" anchor="t"/>
           <a:lstStyle/>
           <a:p>
-            <a:pPr algn="l" indent="0" marL="0">
+            <a:pPr marL="0" indent="0" algn="l">
               <a:buNone/>
             </a:pPr>
             <a:r>
@@ -10841,9 +10660,9 @@
                 <a:solidFill>
                   <a:srgbClr val="8A9099"/>
                 </a:solidFill>
-                <a:latin typeface="微软雅黑" pitchFamily="34" charset="0"/>
-                <a:ea typeface="微软雅黑" pitchFamily="34" charset="-122"/>
-                <a:cs typeface="微软雅黑" pitchFamily="34" charset="-120"/>
+                <a:latin typeface="微软雅黑" panose="020B0503020204020204" pitchFamily="34" charset="-122"/>
+                <a:ea typeface="微软雅黑" panose="020B0503020204020204" pitchFamily="34" charset="-122"/>
+                <a:cs typeface="微软雅黑" panose="020B0503020204020204" pitchFamily="34" charset="-120"/>
               </a:rPr>
               <a:t>知识点回看：重邮数据结构笔记「图」对应小节；答疑进页面底部群。</a:t>
             </a:r>
@@ -10902,7 +10721,7 @@
     </a:clrScheme>
     <a:fontScheme name="Office">
       <a:majorFont>
-        <a:latin typeface="Calibri Light" panose="020F0302020204030204"/>
+        <a:latin typeface="Calibri Light"/>
         <a:ea typeface=""/>
         <a:cs typeface=""/>
         <a:font script="Jpan" typeface="游ゴシック Light"/>
@@ -10935,26 +10754,9 @@
         <a:font script="Viet" typeface="Times New Roman"/>
         <a:font script="Uigh" typeface="Microsoft Uighur"/>
         <a:font script="Geor" typeface="Sylfaen"/>
-        <a:font script="Armn" typeface="Arial"/>
-        <a:font script="Bugi" typeface="Leelawadee UI"/>
-        <a:font script="Bopo" typeface="Microsoft JhengHei"/>
-        <a:font script="Java" typeface="Javanese Text"/>
-        <a:font script="Lisu" typeface="Segoe UI"/>
-        <a:font script="Mymr" typeface="Myanmar Text"/>
-        <a:font script="Nkoo" typeface="Ebrima"/>
-        <a:font script="Olck" typeface="Nirmala UI"/>
-        <a:font script="Osma" typeface="Ebrima"/>
-        <a:font script="Phag" typeface="Phagspa"/>
-        <a:font script="Syrn" typeface="Estrangelo Edessa"/>
-        <a:font script="Syrj" typeface="Estrangelo Edessa"/>
-        <a:font script="Syre" typeface="Estrangelo Edessa"/>
-        <a:font script="Sora" typeface="Nirmala UI"/>
-        <a:font script="Tale" typeface="Microsoft Tai Le"/>
-        <a:font script="Talu" typeface="Microsoft New Tai Lue"/>
-        <a:font script="Tfng" typeface="Ebrima"/>
       </a:majorFont>
       <a:minorFont>
-        <a:latin typeface="Calibri" panose="020F0502020204030204"/>
+        <a:latin typeface="Calibri"/>
         <a:ea typeface=""/>
         <a:cs typeface=""/>
         <a:font script="Jpan" typeface="游ゴシック"/>
@@ -10987,23 +10789,6 @@
         <a:font script="Viet" typeface="Arial"/>
         <a:font script="Uigh" typeface="Microsoft Uighur"/>
         <a:font script="Geor" typeface="Sylfaen"/>
-        <a:font script="Armn" typeface="Arial"/>
-        <a:font script="Bugi" typeface="Leelawadee UI"/>
-        <a:font script="Bopo" typeface="Microsoft JhengHei"/>
-        <a:font script="Java" typeface="Javanese Text"/>
-        <a:font script="Lisu" typeface="Segoe UI"/>
-        <a:font script="Mymr" typeface="Myanmar Text"/>
-        <a:font script="Nkoo" typeface="Ebrima"/>
-        <a:font script="Olck" typeface="Nirmala UI"/>
-        <a:font script="Osma" typeface="Ebrima"/>
-        <a:font script="Phag" typeface="Phagspa"/>
-        <a:font script="Syrn" typeface="Estrangelo Edessa"/>
-        <a:font script="Syrj" typeface="Estrangelo Edessa"/>
-        <a:font script="Syre" typeface="Estrangelo Edessa"/>
-        <a:font script="Sora" typeface="Nirmala UI"/>
-        <a:font script="Tale" typeface="Microsoft Tai Le"/>
-        <a:font script="Talu" typeface="Microsoft New Tai Lue"/>
-        <a:font script="Tfng" typeface="Ebrima"/>
       </a:minorFont>
     </a:fontScheme>
     <a:fmtScheme name="Office">
@@ -11144,8 +10929,265 @@
       </a:bgFillStyleLst>
     </a:fmtScheme>
   </a:themeElements>
-  <a:objectDefaults/>
-  <a:extraClrSchemeLst/>
+  <a:extLst>
+    <a:ext uri="{05A4C25C-085E-4340-85A3-A5531E510DB2}">
+      <thm15:themeFamily xmlns:thm15="http://schemas.microsoft.com/office/thememl/2012/main" name="Office Theme" id="{62F939B6-93AF-4DB8-9C6B-D6C7DFDC589F}" vid="{4A3C46E8-61CC-4603-A589-7422A47A8E4A}"/>
+    </a:ext>
+  </a:extLst>
+</a:theme>
+</file>
+
+<file path=ppt/theme/theme2.xml><?xml version="1.0" encoding="utf-8"?>
+<a:theme xmlns:a="http://schemas.openxmlformats.org/drawingml/2006/main" name="Office Theme">
+  <a:themeElements>
+    <a:clrScheme name="Office">
+      <a:dk1>
+        <a:sysClr val="windowText" lastClr="000000"/>
+      </a:dk1>
+      <a:lt1>
+        <a:sysClr val="window" lastClr="FFFFFF"/>
+      </a:lt1>
+      <a:dk2>
+        <a:srgbClr val="44546A"/>
+      </a:dk2>
+      <a:lt2>
+        <a:srgbClr val="E7E6E6"/>
+      </a:lt2>
+      <a:accent1>
+        <a:srgbClr val="4472C4"/>
+      </a:accent1>
+      <a:accent2>
+        <a:srgbClr val="ED7D31"/>
+      </a:accent2>
+      <a:accent3>
+        <a:srgbClr val="A5A5A5"/>
+      </a:accent3>
+      <a:accent4>
+        <a:srgbClr val="FFC000"/>
+      </a:accent4>
+      <a:accent5>
+        <a:srgbClr val="5B9BD5"/>
+      </a:accent5>
+      <a:accent6>
+        <a:srgbClr val="70AD47"/>
+      </a:accent6>
+      <a:hlink>
+        <a:srgbClr val="0563C1"/>
+      </a:hlink>
+      <a:folHlink>
+        <a:srgbClr val="954F72"/>
+      </a:folHlink>
+    </a:clrScheme>
+    <a:fontScheme name="Office">
+      <a:majorFont>
+        <a:latin typeface="Calibri Light"/>
+        <a:ea typeface=""/>
+        <a:cs typeface=""/>
+        <a:font script="Jpan" typeface="游ゴシック Light"/>
+        <a:font script="Hang" typeface="맑은 고딕"/>
+        <a:font script="Hans" typeface="等线 Light"/>
+        <a:font script="Hant" typeface="新細明體"/>
+        <a:font script="Arab" typeface="Times New Roman"/>
+        <a:font script="Hebr" typeface="Times New Roman"/>
+        <a:font script="Thai" typeface="Angsana New"/>
+        <a:font script="Ethi" typeface="Nyala"/>
+        <a:font script="Beng" typeface="Vrinda"/>
+        <a:font script="Gujr" typeface="Shruti"/>
+        <a:font script="Khmr" typeface="MoolBoran"/>
+        <a:font script="Knda" typeface="Tunga"/>
+        <a:font script="Guru" typeface="Raavi"/>
+        <a:font script="Cans" typeface="Euphemia"/>
+        <a:font script="Cher" typeface="Plantagenet Cherokee"/>
+        <a:font script="Yiii" typeface="Microsoft Yi Baiti"/>
+        <a:font script="Tibt" typeface="Microsoft Himalaya"/>
+        <a:font script="Thaa" typeface="MV Boli"/>
+        <a:font script="Deva" typeface="Mangal"/>
+        <a:font script="Telu" typeface="Gautami"/>
+        <a:font script="Taml" typeface="Latha"/>
+        <a:font script="Syrc" typeface="Estrangelo Edessa"/>
+        <a:font script="Orya" typeface="Kalinga"/>
+        <a:font script="Mlym" typeface="Kartika"/>
+        <a:font script="Laoo" typeface="DokChampa"/>
+        <a:font script="Sinh" typeface="Iskoola Pota"/>
+        <a:font script="Mong" typeface="Mongolian Baiti"/>
+        <a:font script="Viet" typeface="Times New Roman"/>
+        <a:font script="Uigh" typeface="Microsoft Uighur"/>
+        <a:font script="Geor" typeface="Sylfaen"/>
+      </a:majorFont>
+      <a:minorFont>
+        <a:latin typeface="Calibri"/>
+        <a:ea typeface=""/>
+        <a:cs typeface=""/>
+        <a:font script="Jpan" typeface="游ゴシック"/>
+        <a:font script="Hang" typeface="맑은 고딕"/>
+        <a:font script="Hans" typeface="等线"/>
+        <a:font script="Hant" typeface="新細明體"/>
+        <a:font script="Arab" typeface="Arial"/>
+        <a:font script="Hebr" typeface="Arial"/>
+        <a:font script="Thai" typeface="Cordia New"/>
+        <a:font script="Ethi" typeface="Nyala"/>
+        <a:font script="Beng" typeface="Vrinda"/>
+        <a:font script="Gujr" typeface="Shruti"/>
+        <a:font script="Khmr" typeface="DaunPenh"/>
+        <a:font script="Knda" typeface="Tunga"/>
+        <a:font script="Guru" typeface="Raavi"/>
+        <a:font script="Cans" typeface="Euphemia"/>
+        <a:font script="Cher" typeface="Plantagenet Cherokee"/>
+        <a:font script="Yiii" typeface="Microsoft Yi Baiti"/>
+        <a:font script="Tibt" typeface="Microsoft Himalaya"/>
+        <a:font script="Thaa" typeface="MV Boli"/>
+        <a:font script="Deva" typeface="Mangal"/>
+        <a:font script="Telu" typeface="Gautami"/>
+        <a:font script="Taml" typeface="Latha"/>
+        <a:font script="Syrc" typeface="Estrangelo Edessa"/>
+        <a:font script="Orya" typeface="Kalinga"/>
+        <a:font script="Mlym" typeface="Kartika"/>
+        <a:font script="Laoo" typeface="DokChampa"/>
+        <a:font script="Sinh" typeface="Iskoola Pota"/>
+        <a:font script="Mong" typeface="Mongolian Baiti"/>
+        <a:font script="Viet" typeface="Arial"/>
+        <a:font script="Uigh" typeface="Microsoft Uighur"/>
+        <a:font script="Geor" typeface="Sylfaen"/>
+      </a:minorFont>
+    </a:fontScheme>
+    <a:fmtScheme name="Office">
+      <a:fillStyleLst>
+        <a:solidFill>
+          <a:schemeClr val="phClr"/>
+        </a:solidFill>
+        <a:gradFill rotWithShape="1">
+          <a:gsLst>
+            <a:gs pos="0">
+              <a:schemeClr val="phClr">
+                <a:lumMod val="110000"/>
+                <a:satMod val="105000"/>
+                <a:tint val="67000"/>
+              </a:schemeClr>
+            </a:gs>
+            <a:gs pos="50000">
+              <a:schemeClr val="phClr">
+                <a:lumMod val="105000"/>
+                <a:satMod val="103000"/>
+                <a:tint val="73000"/>
+              </a:schemeClr>
+            </a:gs>
+            <a:gs pos="100000">
+              <a:schemeClr val="phClr">
+                <a:lumMod val="105000"/>
+                <a:satMod val="109000"/>
+                <a:tint val="81000"/>
+              </a:schemeClr>
+            </a:gs>
+          </a:gsLst>
+          <a:lin ang="5400000" scaled="0"/>
+        </a:gradFill>
+        <a:gradFill rotWithShape="1">
+          <a:gsLst>
+            <a:gs pos="0">
+              <a:schemeClr val="phClr">
+                <a:satMod val="103000"/>
+                <a:lumMod val="102000"/>
+                <a:tint val="94000"/>
+              </a:schemeClr>
+            </a:gs>
+            <a:gs pos="50000">
+              <a:schemeClr val="phClr">
+                <a:satMod val="110000"/>
+                <a:lumMod val="100000"/>
+                <a:shade val="100000"/>
+              </a:schemeClr>
+            </a:gs>
+            <a:gs pos="100000">
+              <a:schemeClr val="phClr">
+                <a:lumMod val="99000"/>
+                <a:satMod val="120000"/>
+                <a:shade val="78000"/>
+              </a:schemeClr>
+            </a:gs>
+          </a:gsLst>
+          <a:lin ang="5400000" scaled="0"/>
+        </a:gradFill>
+      </a:fillStyleLst>
+      <a:lnStyleLst>
+        <a:ln w="6350" cap="flat" cmpd="sng" algn="ctr">
+          <a:solidFill>
+            <a:schemeClr val="phClr"/>
+          </a:solidFill>
+          <a:prstDash val="solid"/>
+          <a:miter lim="800000"/>
+        </a:ln>
+        <a:ln w="12700" cap="flat" cmpd="sng" algn="ctr">
+          <a:solidFill>
+            <a:schemeClr val="phClr"/>
+          </a:solidFill>
+          <a:prstDash val="solid"/>
+          <a:miter lim="800000"/>
+        </a:ln>
+        <a:ln w="19050" cap="flat" cmpd="sng" algn="ctr">
+          <a:solidFill>
+            <a:schemeClr val="phClr"/>
+          </a:solidFill>
+          <a:prstDash val="solid"/>
+          <a:miter lim="800000"/>
+        </a:ln>
+      </a:lnStyleLst>
+      <a:effectStyleLst>
+        <a:effectStyle>
+          <a:effectLst/>
+        </a:effectStyle>
+        <a:effectStyle>
+          <a:effectLst/>
+        </a:effectStyle>
+        <a:effectStyle>
+          <a:effectLst>
+            <a:outerShdw blurRad="57150" dist="19050" dir="5400000" algn="ctr" rotWithShape="0">
+              <a:srgbClr val="000000">
+                <a:alpha val="63000"/>
+              </a:srgbClr>
+            </a:outerShdw>
+          </a:effectLst>
+        </a:effectStyle>
+      </a:effectStyleLst>
+      <a:bgFillStyleLst>
+        <a:solidFill>
+          <a:schemeClr val="phClr"/>
+        </a:solidFill>
+        <a:solidFill>
+          <a:schemeClr val="phClr">
+            <a:tint val="95000"/>
+            <a:satMod val="170000"/>
+          </a:schemeClr>
+        </a:solidFill>
+        <a:gradFill rotWithShape="1">
+          <a:gsLst>
+            <a:gs pos="0">
+              <a:schemeClr val="phClr">
+                <a:tint val="93000"/>
+                <a:satMod val="150000"/>
+                <a:shade val="98000"/>
+                <a:lumMod val="102000"/>
+              </a:schemeClr>
+            </a:gs>
+            <a:gs pos="50000">
+              <a:schemeClr val="phClr">
+                <a:tint val="98000"/>
+                <a:satMod val="130000"/>
+                <a:shade val="90000"/>
+                <a:lumMod val="103000"/>
+              </a:schemeClr>
+            </a:gs>
+            <a:gs pos="100000">
+              <a:schemeClr val="phClr">
+                <a:shade val="63000"/>
+                <a:satMod val="120000"/>
+              </a:schemeClr>
+            </a:gs>
+          </a:gsLst>
+          <a:lin ang="5400000" scaled="0"/>
+        </a:gradFill>
+      </a:bgFillStyleLst>
+    </a:fmtScheme>
+  </a:themeElements>
   <a:extLst>
     <a:ext uri="{05A4C25C-085E-4340-85A3-A5531E510DB2}">
       <thm15:themeFamily xmlns:thm15="http://schemas.microsoft.com/office/thememl/2012/main" name="Office Theme" id="{62F939B6-93AF-4DB8-9C6B-D6C7DFDC589F}" vid="{4A3C46E8-61CC-4603-A589-7422A47A8E4A}"/>
